--- a/Ausgabe/Klasse_8/04_Netzwerke_in_der_Informatik/05_Praesentationen/Zusatz_Kryptografie.pptx
+++ b/Ausgabe/Klasse_8/04_Netzwerke_in_der_Informatik/05_Praesentationen/Zusatz_Kryptografie.pptx
@@ -13,13 +13,6 @@
     <p:sldId id="261" r:id="rId13"/>
     <p:sldId id="262" r:id="rId14"/>
     <p:sldId id="263" r:id="rId15"/>
-    <p:sldId id="264" r:id="rId16"/>
-    <p:sldId id="265" r:id="rId17"/>
-    <p:sldId id="266" r:id="rId18"/>
-    <p:sldId id="267" r:id="rId19"/>
-    <p:sldId id="268" r:id="rId20"/>
-    <p:sldId id="269" r:id="rId21"/>
-    <p:sldId id="270" r:id="rId22"/>
   </p:sldIdLst>
   <p:sldSz cx="12191695" cy="6858000" type="screen4x3"/>
   <p:notesSz cx="6858000" cy="9144000"/>
@@ -516,427 +509,7 @@
           <a:lstStyle/>
           <a:p>
             <a:r>
-              <a:t>Fachliche Orientierung: https://www.bsi.bund.de · TLS 1.3: https://www.rfc-editor.org/rfc/rfc8446</a:t>
-            </a:r>
-          </a:p>
-        </p:txBody>
-      </p:sp>
-      <p:sp>
-        <p:nvSpPr>
-          <p:cNvPr id="4" name="Slide Number Placeholder 3"/>
-          <p:cNvSpPr>
-            <a:spLocks noGrp="1"/>
-          </p:cNvSpPr>
-          <p:nvPr>
-            <p:ph type="sldNum" idx="5" sz="quarter"/>
-          </p:nvPr>
-        </p:nvSpPr>
-        <p:spPr/>
-      </p:sp>
-    </p:spTree>
-  </p:cSld>
-  <p:clrMapOvr>
-    <a:masterClrMapping/>
-  </p:clrMapOvr>
-</p:notes>
-</file>
-
-<file path=ppt/notesSlides/notesSlide10.xml><?xml version="1.0" encoding="utf-8"?>
-<p:notes xmlns:a="http://schemas.openxmlformats.org/drawingml/2006/main" xmlns:p="http://schemas.openxmlformats.org/presentationml/2006/main" xmlns:r="http://schemas.openxmlformats.org/officeDocument/2006/relationships">
-  <p:cSld>
-    <p:spTree>
-      <p:nvGrpSpPr>
-        <p:cNvPr id="1" name=""/>
-        <p:cNvGrpSpPr/>
-        <p:nvPr/>
-      </p:nvGrpSpPr>
-      <p:grpSpPr>
-        <a:xfrm>
-          <a:off x="0" y="0"/>
-          <a:ext cx="0" cy="0"/>
-          <a:chOff x="0" y="0"/>
-          <a:chExt cx="0" cy="0"/>
-        </a:xfrm>
-      </p:grpSpPr>
-      <p:sp>
-        <p:nvSpPr>
-          <p:cNvPr id="2" name="Slide Image Placeholder 1"/>
-          <p:cNvSpPr>
-            <a:spLocks noGrp="1"/>
-          </p:cNvSpPr>
-          <p:nvPr>
-            <p:ph type="sldImg" idx="2"/>
-          </p:nvPr>
-        </p:nvSpPr>
-        <p:spPr/>
-      </p:sp>
-      <p:sp>
-        <p:nvSpPr>
-          <p:cNvPr id="3" name="Notes Placeholder 2"/>
-          <p:cNvSpPr>
-            <a:spLocks noGrp="1"/>
-          </p:cNvSpPr>
-          <p:nvPr>
-            <p:ph type="body" idx="3" sz="quarter"/>
-          </p:nvPr>
-        </p:nvSpPr>
-        <p:spPr/>
-        <p:txBody>
-          <a:bodyPr/>
-          <a:lstStyle/>
-          <a:p>
-            <a:r>
-              <a:t>Die große Potenz nicht von Hand vollständig ausmultiplizieren; modulare Potenzierung erklären oder Rechner nutzen. Ziel ist das Prinzip.</a:t>
-            </a:r>
-          </a:p>
-        </p:txBody>
-      </p:sp>
-      <p:sp>
-        <p:nvSpPr>
-          <p:cNvPr id="4" name="Slide Number Placeholder 3"/>
-          <p:cNvSpPr>
-            <a:spLocks noGrp="1"/>
-          </p:cNvSpPr>
-          <p:nvPr>
-            <p:ph type="sldNum" idx="5" sz="quarter"/>
-          </p:nvPr>
-        </p:nvSpPr>
-        <p:spPr/>
-      </p:sp>
-    </p:spTree>
-  </p:cSld>
-  <p:clrMapOvr>
-    <a:masterClrMapping/>
-  </p:clrMapOvr>
-</p:notes>
-</file>
-
-<file path=ppt/notesSlides/notesSlide11.xml><?xml version="1.0" encoding="utf-8"?>
-<p:notes xmlns:a="http://schemas.openxmlformats.org/drawingml/2006/main" xmlns:p="http://schemas.openxmlformats.org/presentationml/2006/main" xmlns:r="http://schemas.openxmlformats.org/officeDocument/2006/relationships">
-  <p:cSld>
-    <p:spTree>
-      <p:nvGrpSpPr>
-        <p:cNvPr id="1" name=""/>
-        <p:cNvGrpSpPr/>
-        <p:nvPr/>
-      </p:nvGrpSpPr>
-      <p:grpSpPr>
-        <a:xfrm>
-          <a:off x="0" y="0"/>
-          <a:ext cx="0" cy="0"/>
-          <a:chOff x="0" y="0"/>
-          <a:chExt cx="0" cy="0"/>
-        </a:xfrm>
-      </p:grpSpPr>
-      <p:sp>
-        <p:nvSpPr>
-          <p:cNvPr id="2" name="Slide Image Placeholder 1"/>
-          <p:cNvSpPr>
-            <a:spLocks noGrp="1"/>
-          </p:cNvSpPr>
-          <p:nvPr>
-            <p:ph type="sldImg" idx="2"/>
-          </p:nvPr>
-        </p:nvSpPr>
-        <p:spPr/>
-      </p:sp>
-      <p:sp>
-        <p:nvSpPr>
-          <p:cNvPr id="3" name="Notes Placeholder 2"/>
-          <p:cNvSpPr>
-            <a:spLocks noGrp="1"/>
-          </p:cNvSpPr>
-          <p:nvPr>
-            <p:ph type="body" idx="3" sz="quarter"/>
-          </p:nvPr>
-        </p:nvSpPr>
-        <p:spPr/>
-        <p:txBody>
-          <a:bodyPr/>
-          <a:lstStyle/>
-          <a:p>
-            <a:r>
-              <a:t>Begriffe konzeptionell trennen. Keine unnötige mathematische Vertiefung.</a:t>
-            </a:r>
-          </a:p>
-        </p:txBody>
-      </p:sp>
-      <p:sp>
-        <p:nvSpPr>
-          <p:cNvPr id="4" name="Slide Number Placeholder 3"/>
-          <p:cNvSpPr>
-            <a:spLocks noGrp="1"/>
-          </p:cNvSpPr>
-          <p:nvPr>
-            <p:ph type="sldNum" idx="5" sz="quarter"/>
-          </p:nvPr>
-        </p:nvSpPr>
-        <p:spPr/>
-      </p:sp>
-    </p:spTree>
-  </p:cSld>
-  <p:clrMapOvr>
-    <a:masterClrMapping/>
-  </p:clrMapOvr>
-</p:notes>
-</file>
-
-<file path=ppt/notesSlides/notesSlide12.xml><?xml version="1.0" encoding="utf-8"?>
-<p:notes xmlns:a="http://schemas.openxmlformats.org/drawingml/2006/main" xmlns:p="http://schemas.openxmlformats.org/presentationml/2006/main" xmlns:r="http://schemas.openxmlformats.org/officeDocument/2006/relationships">
-  <p:cSld>
-    <p:spTree>
-      <p:nvGrpSpPr>
-        <p:cNvPr id="1" name=""/>
-        <p:cNvGrpSpPr/>
-        <p:nvPr/>
-      </p:nvGrpSpPr>
-      <p:grpSpPr>
-        <a:xfrm>
-          <a:off x="0" y="0"/>
-          <a:ext cx="0" cy="0"/>
-          <a:chOff x="0" y="0"/>
-          <a:chExt cx="0" cy="0"/>
-        </a:xfrm>
-      </p:grpSpPr>
-      <p:sp>
-        <p:nvSpPr>
-          <p:cNvPr id="2" name="Slide Image Placeholder 1"/>
-          <p:cNvSpPr>
-            <a:spLocks noGrp="1"/>
-          </p:cNvSpPr>
-          <p:nvPr>
-            <p:ph type="sldImg" idx="2"/>
-          </p:nvPr>
-        </p:nvSpPr>
-        <p:spPr/>
-      </p:sp>
-      <p:sp>
-        <p:nvSpPr>
-          <p:cNvPr id="3" name="Notes Placeholder 2"/>
-          <p:cNvSpPr>
-            <a:spLocks noGrp="1"/>
-          </p:cNvSpPr>
-          <p:nvPr>
-            <p:ph type="body" idx="3" sz="quarter"/>
-          </p:nvPr>
-        </p:nvSpPr>
-        <p:spPr/>
-        <p:txBody>
-          <a:bodyPr/>
-          <a:lstStyle/>
-          <a:p>
-            <a:r>
-              <a:t>Alltagsbezug Browser. Umgangssprachlich wird noch 'SSL' gesagt, technisch moderne HTTPS-Verbindungen verwenden TLS.</a:t>
-            </a:r>
-          </a:p>
-        </p:txBody>
-      </p:sp>
-      <p:sp>
-        <p:nvSpPr>
-          <p:cNvPr id="4" name="Slide Number Placeholder 3"/>
-          <p:cNvSpPr>
-            <a:spLocks noGrp="1"/>
-          </p:cNvSpPr>
-          <p:nvPr>
-            <p:ph type="sldNum" idx="5" sz="quarter"/>
-          </p:nvPr>
-        </p:nvSpPr>
-        <p:spPr/>
-      </p:sp>
-    </p:spTree>
-  </p:cSld>
-  <p:clrMapOvr>
-    <a:masterClrMapping/>
-  </p:clrMapOvr>
-</p:notes>
-</file>
-
-<file path=ppt/notesSlides/notesSlide13.xml><?xml version="1.0" encoding="utf-8"?>
-<p:notes xmlns:a="http://schemas.openxmlformats.org/drawingml/2006/main" xmlns:p="http://schemas.openxmlformats.org/presentationml/2006/main" xmlns:r="http://schemas.openxmlformats.org/officeDocument/2006/relationships">
-  <p:cSld>
-    <p:spTree>
-      <p:nvGrpSpPr>
-        <p:cNvPr id="1" name=""/>
-        <p:cNvGrpSpPr/>
-        <p:nvPr/>
-      </p:nvGrpSpPr>
-      <p:grpSpPr>
-        <a:xfrm>
-          <a:off x="0" y="0"/>
-          <a:ext cx="0" cy="0"/>
-          <a:chOff x="0" y="0"/>
-          <a:chExt cx="0" cy="0"/>
-        </a:xfrm>
-      </p:grpSpPr>
-      <p:sp>
-        <p:nvSpPr>
-          <p:cNvPr id="2" name="Slide Image Placeholder 1"/>
-          <p:cNvSpPr>
-            <a:spLocks noGrp="1"/>
-          </p:cNvSpPr>
-          <p:nvPr>
-            <p:ph type="sldImg" idx="2"/>
-          </p:nvPr>
-        </p:nvSpPr>
-        <p:spPr/>
-      </p:sp>
-      <p:sp>
-        <p:nvSpPr>
-          <p:cNvPr id="3" name="Notes Placeholder 2"/>
-          <p:cNvSpPr>
-            <a:spLocks noGrp="1"/>
-          </p:cNvSpPr>
-          <p:nvPr>
-            <p:ph type="body" idx="3" sz="quarter"/>
-          </p:nvPr>
-        </p:nvSpPr>
-        <p:spPr/>
-        <p:txBody>
-          <a:bodyPr/>
-          <a:lstStyle/>
-          <a:p>
-            <a:r>
-              <a:t>Fachliche Präzisierung: Modernes TLS 1.3 nutzt typischerweise (EC)DHE für Schlüsselaushandlung und Public-Key-Signaturen für Authentisierung; Nutzdaten werden anschließend symmetrisch geschützt. Nicht vereinfachend behaupten, RSA verschlüssele den gesamten HTTPS-Datenstrom.</a:t>
-            </a:r>
-          </a:p>
-        </p:txBody>
-      </p:sp>
-      <p:sp>
-        <p:nvSpPr>
-          <p:cNvPr id="4" name="Slide Number Placeholder 3"/>
-          <p:cNvSpPr>
-            <a:spLocks noGrp="1"/>
-          </p:cNvSpPr>
-          <p:nvPr>
-            <p:ph type="sldNum" idx="5" sz="quarter"/>
-          </p:nvPr>
-        </p:nvSpPr>
-        <p:spPr/>
-      </p:sp>
-    </p:spTree>
-  </p:cSld>
-  <p:clrMapOvr>
-    <a:masterClrMapping/>
-  </p:clrMapOvr>
-</p:notes>
-</file>
-
-<file path=ppt/notesSlides/notesSlide14.xml><?xml version="1.0" encoding="utf-8"?>
-<p:notes xmlns:a="http://schemas.openxmlformats.org/drawingml/2006/main" xmlns:p="http://schemas.openxmlformats.org/presentationml/2006/main" xmlns:r="http://schemas.openxmlformats.org/officeDocument/2006/relationships">
-  <p:cSld>
-    <p:spTree>
-      <p:nvGrpSpPr>
-        <p:cNvPr id="1" name=""/>
-        <p:cNvGrpSpPr/>
-        <p:nvPr/>
-      </p:nvGrpSpPr>
-      <p:grpSpPr>
-        <a:xfrm>
-          <a:off x="0" y="0"/>
-          <a:ext cx="0" cy="0"/>
-          <a:chOff x="0" y="0"/>
-          <a:chExt cx="0" cy="0"/>
-        </a:xfrm>
-      </p:grpSpPr>
-      <p:sp>
-        <p:nvSpPr>
-          <p:cNvPr id="2" name="Slide Image Placeholder 1"/>
-          <p:cNvSpPr>
-            <a:spLocks noGrp="1"/>
-          </p:cNvSpPr>
-          <p:nvPr>
-            <p:ph type="sldImg" idx="2"/>
-          </p:nvPr>
-        </p:nvSpPr>
-        <p:spPr/>
-      </p:sp>
-      <p:sp>
-        <p:nvSpPr>
-          <p:cNvPr id="3" name="Notes Placeholder 2"/>
-          <p:cNvSpPr>
-            <a:spLocks noGrp="1"/>
-          </p:cNvSpPr>
-          <p:nvPr>
-            <p:ph type="body" idx="3" sz="quarter"/>
-          </p:nvPr>
-        </p:nvSpPr>
-        <p:spPr/>
-        <p:txBody>
-          <a:bodyPr/>
-          <a:lstStyle/>
-          <a:p>
-            <a:r>
-              <a:t>Optionaler Kompetenzcheck. Je nach Lerngruppe RSA-Rechnung weglassen oder als mathematische Vertiefung nutzen.</a:t>
-            </a:r>
-          </a:p>
-        </p:txBody>
-      </p:sp>
-      <p:sp>
-        <p:nvSpPr>
-          <p:cNvPr id="4" name="Slide Number Placeholder 3"/>
-          <p:cNvSpPr>
-            <a:spLocks noGrp="1"/>
-          </p:cNvSpPr>
-          <p:nvPr>
-            <p:ph type="sldNum" idx="5" sz="quarter"/>
-          </p:nvPr>
-        </p:nvSpPr>
-        <p:spPr/>
-      </p:sp>
-    </p:spTree>
-  </p:cSld>
-  <p:clrMapOvr>
-    <a:masterClrMapping/>
-  </p:clrMapOvr>
-</p:notes>
-</file>
-
-<file path=ppt/notesSlides/notesSlide15.xml><?xml version="1.0" encoding="utf-8"?>
-<p:notes xmlns:a="http://schemas.openxmlformats.org/drawingml/2006/main" xmlns:p="http://schemas.openxmlformats.org/presentationml/2006/main" xmlns:r="http://schemas.openxmlformats.org/officeDocument/2006/relationships">
-  <p:cSld>
-    <p:spTree>
-      <p:nvGrpSpPr>
-        <p:cNvPr id="1" name=""/>
-        <p:cNvGrpSpPr/>
-        <p:nvPr/>
-      </p:nvGrpSpPr>
-      <p:grpSpPr>
-        <a:xfrm>
-          <a:off x="0" y="0"/>
-          <a:ext cx="0" cy="0"/>
-          <a:chOff x="0" y="0"/>
-          <a:chExt cx="0" cy="0"/>
-        </a:xfrm>
-      </p:grpSpPr>
-      <p:sp>
-        <p:nvSpPr>
-          <p:cNvPr id="2" name="Slide Image Placeholder 1"/>
-          <p:cNvSpPr>
-            <a:spLocks noGrp="1"/>
-          </p:cNvSpPr>
-          <p:nvPr>
-            <p:ph type="sldImg" idx="2"/>
-          </p:nvPr>
-        </p:nvSpPr>
-        <p:spPr/>
-      </p:sp>
-      <p:sp>
-        <p:nvSpPr>
-          <p:cNvPr id="3" name="Notes Placeholder 2"/>
-          <p:cNvSpPr>
-            <a:spLocks noGrp="1"/>
-          </p:cNvSpPr>
-          <p:nvPr>
-            <p:ph type="body" idx="3" sz="quarter"/>
-          </p:nvPr>
-        </p:nvSpPr>
-        <p:spPr/>
-        <p:txBody>
-          <a:bodyPr/>
-          <a:lstStyle/>
-          <a:p>
-            <a:r>
-              <a:t>Quellenfolie. Keine internen Repository-, Branch- oder Markdown-Verweise in der Schülerpräsentation.</a:t>
+              <a:t>Optionale Zusatzpräsentation. Quellen: https://www.bsi.bund.de · https://www.rfc-editor.org/rfc/rfc8446</a:t>
             </a:r>
           </a:p>
         </p:txBody>
@@ -1006,7 +579,7 @@
           <a:lstStyle/>
           <a:p>
             <a:r>
-              <a:t>Optionaler Zusatzblock. Erst das Schutzproblem aufbauen, dann Fachbegriffe. Nicht voraussetzen, dass Schüler Verschlüsselung kennen.</a:t>
+              <a:t>Optionaler Zusatzblock. Erst Problem, dann Begriffe.</a:t>
             </a:r>
           </a:p>
         </p:txBody>
@@ -1076,7 +649,7 @@
           <a:lstStyle/>
           <a:p>
             <a:r>
-              <a:t>Begriffe langsam einführen. Beispielnachricht verwenden.</a:t>
+              <a:t>Mit einfacher Nachricht demonstrieren.</a:t>
             </a:r>
           </a:p>
         </p:txBody>
@@ -1146,7 +719,7 @@
           <a:lstStyle/>
           <a:p>
             <a:r>
-              <a:t>Caesar als Lernmodell, ausdrücklich nicht als moderne Sicherheit darstellen.</a:t>
+              <a:t>Geschwindigkeitsargument für HTTPS vorbereiten.</a:t>
             </a:r>
           </a:p>
         </p:txBody>
@@ -1216,7 +789,7 @@
           <a:lstStyle/>
           <a:p>
             <a:r>
-              <a:t>Geschwindigkeitsaspekt als zentrale Begründung herausarbeiten: symmetrische Verfahren eignen sich für laufenden Datenverkehr.</a:t>
+              <a:t>Kleine Zahlen nur als Modell.</a:t>
             </a:r>
           </a:p>
         </p:txBody>
@@ -1286,7 +859,7 @@
           <a:lstStyle/>
           <a:p>
             <a:r>
-              <a:t>Vereinfachtes Modell. Nicht behaupten, dass moderne HTTPS-Nutzdaten komplett asymmetrisch verschlüsselt werden.</a:t>
+              <a:t>Modulare Potenzierung nicht vollständig ausmultiplizieren.</a:t>
             </a:r>
           </a:p>
         </p:txBody>
@@ -1356,7 +929,7 @@
           <a:lstStyle/>
           <a:p>
             <a:r>
-              <a:t>RSA-Rechnung als mathematische Vertiefung. Kleine Zahlen sind ausschließlich didaktisch und kryptografisch völlig unsicher.</a:t>
+              <a:t>Nicht behaupten, RSA verschlüssele den gesamten HTTPS-Datenstrom.</a:t>
             </a:r>
           </a:p>
         </p:txBody>
@@ -1426,77 +999,7 @@
           <a:lstStyle/>
           <a:p>
             <a:r>
-              <a:t>Modulares Rechnen bei Bedarf vorher erklären. Rechenweg gemeinsam nachvollziehen.</a:t>
-            </a:r>
-          </a:p>
-        </p:txBody>
-      </p:sp>
-      <p:sp>
-        <p:nvSpPr>
-          <p:cNvPr id="4" name="Slide Number Placeholder 3"/>
-          <p:cNvSpPr>
-            <a:spLocks noGrp="1"/>
-          </p:cNvSpPr>
-          <p:nvPr>
-            <p:ph type="sldNum" idx="5" sz="quarter"/>
-          </p:nvPr>
-        </p:nvSpPr>
-        <p:spPr/>
-      </p:sp>
-    </p:spTree>
-  </p:cSld>
-  <p:clrMapOvr>
-    <a:masterClrMapping/>
-  </p:clrMapOvr>
-</p:notes>
-</file>
-
-<file path=ppt/notesSlides/notesSlide9.xml><?xml version="1.0" encoding="utf-8"?>
-<p:notes xmlns:a="http://schemas.openxmlformats.org/drawingml/2006/main" xmlns:p="http://schemas.openxmlformats.org/presentationml/2006/main" xmlns:r="http://schemas.openxmlformats.org/officeDocument/2006/relationships">
-  <p:cSld>
-    <p:spTree>
-      <p:nvGrpSpPr>
-        <p:cNvPr id="1" name=""/>
-        <p:cNvGrpSpPr/>
-        <p:nvPr/>
-      </p:nvGrpSpPr>
-      <p:grpSpPr>
-        <a:xfrm>
-          <a:off x="0" y="0"/>
-          <a:ext cx="0" cy="0"/>
-          <a:chOff x="0" y="0"/>
-          <a:chExt cx="0" cy="0"/>
-        </a:xfrm>
-      </p:grpSpPr>
-      <p:sp>
-        <p:nvSpPr>
-          <p:cNvPr id="2" name="Slide Image Placeholder 1"/>
-          <p:cNvSpPr>
-            <a:spLocks noGrp="1"/>
-          </p:cNvSpPr>
-          <p:nvPr>
-            <p:ph type="sldImg" idx="2"/>
-          </p:nvPr>
-        </p:nvSpPr>
-        <p:spPr/>
-      </p:sp>
-      <p:sp>
-        <p:nvSpPr>
-          <p:cNvPr id="3" name="Notes Placeholder 2"/>
-          <p:cNvSpPr>
-            <a:spLocks noGrp="1"/>
-          </p:cNvSpPr>
-          <p:nvPr>
-            <p:ph type="body" idx="3" sz="quarter"/>
-          </p:nvPr>
-        </p:nvSpPr>
-        <p:spPr/>
-        <p:txBody>
-          <a:bodyPr/>
-          <a:lstStyle/>
-          <a:p>
-            <a:r>
-              <a:t>Schrittweise rechnen. Potenzen und Restrechnung erklären.</a:t>
+              <a:t>Quellenfolie. Quellenangaben sind für Lehrkraft/Weiterverwendung sichtbar.</a:t>
             </a:r>
           </a:p>
         </p:txBody>
@@ -4517,7 +4020,7 @@
             <a:avLst/>
           </a:prstGeom>
           <a:solidFill>
-            <a:srgbClr val="1F374E"/>
+            <a:srgbClr val="202C3C"/>
           </a:solidFill>
           <a:ln>
             <a:noFill/>
@@ -4553,8 +4056,8 @@
         </p:nvSpPr>
         <p:spPr>
           <a:xfrm>
-            <a:off x="731520" y="1417320"/>
-            <a:ext cx="10698480" cy="1188720"/>
+            <a:off x="731520" y="1554480"/>
+            <a:ext cx="10789920" cy="1097280"/>
           </a:xfrm>
           <a:prstGeom prst="rect">
             <a:avLst/>
@@ -4586,8 +4089,8 @@
         </p:nvSpPr>
         <p:spPr>
           <a:xfrm>
-            <a:off x="777240" y="2971800"/>
-            <a:ext cx="10515600" cy="731520"/>
+            <a:off x="777240" y="3017520"/>
+            <a:ext cx="10515600" cy="640080"/>
           </a:xfrm>
           <a:prstGeom prst="rect">
             <a:avLst/>
@@ -4619,7 +4122,7 @@
 </p:sld>
 </file>
 
-<file path=ppt/slides/slide10.xml><?xml version="1.0" encoding="utf-8"?>
+<file path=ppt/slides/slide2.xml><?xml version="1.0" encoding="utf-8"?>
 <p:sld xmlns:a="http://schemas.openxmlformats.org/drawingml/2006/main" xmlns:p="http://schemas.openxmlformats.org/presentationml/2006/main" xmlns:r="http://schemas.openxmlformats.org/officeDocument/2006/relationships">
   <p:cSld>
     <p:spTree>
@@ -4638,13 +4141,13 @@
         <p:spPr>
           <a:xfrm>
             <a:off x="0" y="0"/>
-            <a:ext cx="12191695" cy="100584"/>
+            <a:ext cx="12191695" cy="109728"/>
           </a:xfrm>
           <a:prstGeom prst="rect">
             <a:avLst/>
           </a:prstGeom>
           <a:solidFill>
-            <a:srgbClr val="4472C4"/>
+            <a:srgbClr val="305396"/>
           </a:solidFill>
           <a:ln>
             <a:noFill/>
@@ -4681,7 +4184,7 @@
         <p:spPr>
           <a:xfrm>
             <a:off x="594360" y="320040"/>
-            <a:ext cx="10972800" cy="502920"/>
+            <a:ext cx="10972800" cy="548640"/>
           </a:xfrm>
           <a:prstGeom prst="rect">
             <a:avLst/>
@@ -4697,117 +4200,34 @@
             <a:r>
               <a:rPr sz="2600" b="1">
                 <a:solidFill>
-                  <a:srgbClr val="1F374E"/>
+                  <a:srgbClr val="202C3C"/>
                 </a:solidFill>
               </a:rPr>
-              <a:t>RSA – wieder entschlüsseln</a:t>
-            </a:r>
-          </a:p>
-        </p:txBody>
-      </p:sp>
-      <p:sp>
-        <p:nvSpPr>
-          <p:cNvPr id="4" name="TextBox 3"/>
-          <p:cNvSpPr txBox="1"/>
+              <a:t>Leitfrage</a:t>
+            </a:r>
+          </a:p>
+        </p:txBody>
+      </p:sp>
+      <p:sp>
+        <p:nvSpPr>
+          <p:cNvPr id="4" name="Rounded Rectangle 3"/>
+          <p:cNvSpPr/>
           <p:nvPr/>
         </p:nvSpPr>
         <p:spPr>
           <a:xfrm>
-            <a:off x="685800" y="1234440"/>
-            <a:ext cx="5303520" cy="4937760"/>
+            <a:off x="777240" y="1234440"/>
+            <a:ext cx="10789920" cy="1234440"/>
           </a:xfrm>
-          <a:prstGeom prst="rect">
-            <a:avLst/>
-          </a:prstGeom>
-          <a:noFill/>
-        </p:spPr>
-        <p:txBody>
-          <a:bodyPr wrap="square">
-            <a:spAutoFit/>
-          </a:bodyPr>
-          <a:lstStyle/>
-          <a:p>
-            <a:pPr>
-              <a:spcAft>
-                <a:spcPts val="800"/>
-              </a:spcAft>
-              <a:defRPr sz="1900">
-                <a:solidFill>
-                  <a:srgbClr val="232323"/>
-                </a:solidFill>
-              </a:defRPr>
-            </a:pPr>
-            <a:r>
-              <a:t>Entschlüsselung: m = c^d mod n</a:t>
-            </a:r>
-          </a:p>
-          <a:p>
-            <a:pPr>
-              <a:spcAft>
-                <a:spcPts val="800"/>
-              </a:spcAft>
-              <a:defRPr sz="1900">
-                <a:solidFill>
-                  <a:srgbClr val="232323"/>
-                </a:solidFill>
-              </a:defRPr>
-            </a:pPr>
-            <a:r>
-              <a:t>m = 13²⁷ mod 55</a:t>
-            </a:r>
-          </a:p>
-          <a:p>
-            <a:pPr>
-              <a:spcAft>
-                <a:spcPts val="800"/>
-              </a:spcAft>
-              <a:defRPr sz="1900">
-                <a:solidFill>
-                  <a:srgbClr val="232323"/>
-                </a:solidFill>
-              </a:defRPr>
-            </a:pPr>
-            <a:r>
-              <a:t>Das Ergebnis ist wieder m = 7.</a:t>
-            </a:r>
-          </a:p>
-          <a:p>
-            <a:pPr>
-              <a:spcAft>
-                <a:spcPts val="800"/>
-              </a:spcAft>
-              <a:defRPr sz="1900">
-                <a:solidFill>
-                  <a:srgbClr val="232323"/>
-                </a:solidFill>
-              </a:defRPr>
-            </a:pPr>
-            <a:r>
-              <a:t>In echten Systemen werden sehr viel größere Zahlen und sichere Verfahren/Parameter verwendet.</a:t>
-            </a:r>
-          </a:p>
-        </p:txBody>
-      </p:sp>
-      <p:sp>
-        <p:nvSpPr>
-          <p:cNvPr id="5" name="Rectangle 4"/>
-          <p:cNvSpPr/>
-          <p:nvPr/>
-        </p:nvSpPr>
-        <p:spPr>
-          <a:xfrm>
-            <a:off x="6400800" y="1463040"/>
-            <a:ext cx="4754880" cy="2560320"/>
-          </a:xfrm>
-          <a:prstGeom prst="rect">
+          <a:prstGeom prst="roundRect">
             <a:avLst/>
           </a:prstGeom>
           <a:solidFill>
-            <a:srgbClr val="FAFAFA"/>
+            <a:srgbClr val="E5ECF6"/>
           </a:solidFill>
           <a:ln>
             <a:solidFill>
-              <a:srgbClr val="646464"/>
+              <a:srgbClr val="305396"/>
             </a:solidFill>
           </a:ln>
         </p:spPr>
@@ -4826,34 +4246,31 @@
           </a:fontRef>
         </p:style>
         <p:txBody>
-          <a:bodyPr rtlCol="0" anchor="ctr" wrap="none"/>
+          <a:bodyPr rtlCol="0" anchor="ctr" wrap="square"/>
           <a:lstStyle/>
           <a:p>
             <a:pPr algn="ctr"/>
             <a:r>
-              <a:rPr sz="1800">
-                <a:solidFill>
-                  <a:srgbClr val="232323"/>
-                </a:solidFill>
-                <a:latin typeface="Consolas"/>
+              <a:rPr sz="2200" b="1">
+                <a:solidFill>
+                  <a:srgbClr val="202C3C"/>
+                </a:solidFill>
               </a:rPr>
-              <a:t>m = 13²⁷ mod 55
-m = 7
-→ ursprüngliche Nachricht</a:t>
-            </a:r>
-          </a:p>
-        </p:txBody>
-      </p:sp>
-      <p:sp>
-        <p:nvSpPr>
-          <p:cNvPr id="6" name="TextBox 5"/>
+              <a:t>Wie können Daten geschützt werden, wenn andere mitlesen könnten?</a:t>
+            </a:r>
+          </a:p>
+        </p:txBody>
+      </p:sp>
+      <p:sp>
+        <p:nvSpPr>
+          <p:cNvPr id="5" name="TextBox 4"/>
           <p:cNvSpPr txBox="1"/>
           <p:nvPr/>
         </p:nvSpPr>
         <p:spPr>
           <a:xfrm>
-            <a:off x="502920" y="6510528"/>
-            <a:ext cx="11064240" cy="182880"/>
+            <a:off x="365760" y="6510528"/>
+            <a:ext cx="11430000" cy="228600"/>
           </a:xfrm>
           <a:prstGeom prst="rect">
             <a:avLst/>
@@ -4870,7 +4287,7 @@
             <a:r>
               <a:rPr sz="800">
                 <a:solidFill>
-                  <a:srgbClr val="646464"/>
+                  <a:srgbClr val="6E6E6E"/>
                 </a:solidFill>
               </a:rPr>
               <a:t>Grafik: eigene Darstellung</a:t>
@@ -4886,7 +4303,7 @@
 </p:sld>
 </file>
 
-<file path=ppt/slides/slide11.xml><?xml version="1.0" encoding="utf-8"?>
+<file path=ppt/slides/slide3.xml><?xml version="1.0" encoding="utf-8"?>
 <p:sld xmlns:a="http://schemas.openxmlformats.org/drawingml/2006/main" xmlns:p="http://schemas.openxmlformats.org/presentationml/2006/main" xmlns:r="http://schemas.openxmlformats.org/officeDocument/2006/relationships">
   <p:cSld>
     <p:spTree>
@@ -4905,13 +4322,13 @@
         <p:spPr>
           <a:xfrm>
             <a:off x="0" y="0"/>
-            <a:ext cx="12191695" cy="100584"/>
+            <a:ext cx="12191695" cy="109728"/>
           </a:xfrm>
           <a:prstGeom prst="rect">
             <a:avLst/>
           </a:prstGeom>
           <a:solidFill>
-            <a:srgbClr val="4472C4"/>
+            <a:srgbClr val="305396"/>
           </a:solidFill>
           <a:ln>
             <a:noFill/>
@@ -4948,7 +4365,7 @@
         <p:spPr>
           <a:xfrm>
             <a:off x="594360" y="320040"/>
-            <a:ext cx="10972800" cy="502920"/>
+            <a:ext cx="10972800" cy="548640"/>
           </a:xfrm>
           <a:prstGeom prst="rect">
             <a:avLst/>
@@ -4964,10 +4381,10 @@
             <a:r>
               <a:rPr sz="2600" b="1">
                 <a:solidFill>
-                  <a:srgbClr val="1F374E"/>
+                  <a:srgbClr val="202C3C"/>
                 </a:solidFill>
               </a:rPr>
-              <a:t>Digitale Signaturen und Hashwerte</a:t>
+              <a:t>Grundbegriffe</a:t>
             </a:r>
           </a:p>
         </p:txBody>
@@ -4981,7 +4398,7 @@
         <p:spPr>
           <a:xfrm>
             <a:off x="685800" y="1234440"/>
-            <a:ext cx="5303520" cy="4937760"/>
+            <a:ext cx="5394960" cy="5029200"/>
           </a:xfrm>
           <a:prstGeom prst="rect">
             <a:avLst/>
@@ -4996,46 +4413,61 @@
           <a:p>
             <a:pPr>
               <a:spcAft>
-                <a:spcPts val="800"/>
+                <a:spcPts val="700"/>
               </a:spcAft>
               <a:defRPr sz="1900">
                 <a:solidFill>
-                  <a:srgbClr val="232323"/>
+                  <a:srgbClr val="1E1E1E"/>
                 </a:solidFill>
               </a:defRPr>
             </a:pPr>
             <a:r>
-              <a:t>Hashwert: kurzer digitaler Fingerabdruck von Daten.</a:t>
+              <a:t>Klartext ist lesbar.</a:t>
             </a:r>
           </a:p>
           <a:p>
             <a:pPr>
               <a:spcAft>
-                <a:spcPts val="800"/>
+                <a:spcPts val="700"/>
               </a:spcAft>
               <a:defRPr sz="1900">
                 <a:solidFill>
-                  <a:srgbClr val="232323"/>
+                  <a:srgbClr val="1E1E1E"/>
                 </a:solidFill>
               </a:defRPr>
             </a:pPr>
             <a:r>
-              <a:t>Digitale Signatur: hilft, Herkunft und Unverändertheit zu prüfen.</a:t>
+              <a:t>Verschlüsselung erzeugt Geheimtext.</a:t>
             </a:r>
           </a:p>
           <a:p>
             <a:pPr>
               <a:spcAft>
-                <a:spcPts val="800"/>
+                <a:spcPts val="700"/>
               </a:spcAft>
               <a:defRPr sz="1900">
                 <a:solidFill>
-                  <a:srgbClr val="232323"/>
+                  <a:srgbClr val="1E1E1E"/>
                 </a:solidFill>
               </a:defRPr>
             </a:pPr>
             <a:r>
-              <a:t>Signieren ist nicht dasselbe wie Verschlüsseln.</a:t>
+              <a:t>Entschlüsselung macht ihn wieder lesbar.</a:t>
+            </a:r>
+          </a:p>
+          <a:p>
+            <a:pPr>
+              <a:spcAft>
+                <a:spcPts val="700"/>
+              </a:spcAft>
+              <a:defRPr sz="1900">
+                <a:solidFill>
+                  <a:srgbClr val="1E1E1E"/>
+                </a:solidFill>
+              </a:defRPr>
+            </a:pPr>
+            <a:r>
+              <a:t>Ein Schlüssel steuert das Verfahren.</a:t>
             </a:r>
           </a:p>
         </p:txBody>
@@ -5048,18 +4480,18 @@
         </p:nvSpPr>
         <p:spPr>
           <a:xfrm>
-            <a:off x="6400800" y="1417320"/>
-            <a:ext cx="4754880" cy="2743200"/>
+            <a:off x="6400800" y="1280160"/>
+            <a:ext cx="4754880" cy="3291840"/>
           </a:xfrm>
           <a:prstGeom prst="rect">
             <a:avLst/>
           </a:prstGeom>
           <a:solidFill>
-            <a:srgbClr val="FAFAFA"/>
+            <a:srgbClr val="FCFCFC"/>
           </a:solidFill>
           <a:ln>
             <a:solidFill>
-              <a:srgbClr val="646464"/>
+              <a:srgbClr val="6E6E6E"/>
             </a:solidFill>
           </a:ln>
         </p:spPr>
@@ -5083,15 +4515,17 @@
           <a:p>
             <a:pPr algn="ctr"/>
             <a:r>
-              <a:rPr sz="1500">
-                <a:solidFill>
-                  <a:srgbClr val="232323"/>
+              <a:rPr sz="1600">
+                <a:solidFill>
+                  <a:srgbClr val="1E1E1E"/>
                 </a:solidFill>
                 <a:latin typeface="Consolas"/>
               </a:rPr>
-              <a:t>Dokument → Hashwert
-Hashwert + privater Schlüssel → Signatur
-Prüfung mit öffentlichem Schlüssel</a:t>
+              <a:t>Klartext: HALLO
+   ↓ verschlüsseln
+Geheimtext: KDOOR
+   ↓ entschlüsseln
+Klartext: HALLO</a:t>
             </a:r>
           </a:p>
         </p:txBody>
@@ -5104,8 +4538,8 @@
         </p:nvSpPr>
         <p:spPr>
           <a:xfrm>
-            <a:off x="502920" y="6510528"/>
-            <a:ext cx="11064240" cy="182880"/>
+            <a:off x="365760" y="6510528"/>
+            <a:ext cx="11430000" cy="228600"/>
           </a:xfrm>
           <a:prstGeom prst="rect">
             <a:avLst/>
@@ -5122,7 +4556,7 @@
             <a:r>
               <a:rPr sz="800">
                 <a:solidFill>
-                  <a:srgbClr val="646464"/>
+                  <a:srgbClr val="6E6E6E"/>
                 </a:solidFill>
               </a:rPr>
               <a:t>Grafik: eigene Darstellung</a:t>
@@ -5138,7 +4572,7 @@
 </p:sld>
 </file>
 
-<file path=ppt/slides/slide12.xml><?xml version="1.0" encoding="utf-8"?>
+<file path=ppt/slides/slide4.xml><?xml version="1.0" encoding="utf-8"?>
 <p:sld xmlns:a="http://schemas.openxmlformats.org/drawingml/2006/main" xmlns:p="http://schemas.openxmlformats.org/presentationml/2006/main" xmlns:r="http://schemas.openxmlformats.org/officeDocument/2006/relationships">
   <p:cSld>
     <p:spTree>
@@ -5157,13 +4591,13 @@
         <p:spPr>
           <a:xfrm>
             <a:off x="0" y="0"/>
-            <a:ext cx="12191695" cy="100584"/>
+            <a:ext cx="12191695" cy="109728"/>
           </a:xfrm>
           <a:prstGeom prst="rect">
             <a:avLst/>
           </a:prstGeom>
           <a:solidFill>
-            <a:srgbClr val="4472C4"/>
+            <a:srgbClr val="305396"/>
           </a:solidFill>
           <a:ln>
             <a:noFill/>
@@ -5200,7 +4634,7 @@
         <p:spPr>
           <a:xfrm>
             <a:off x="594360" y="320040"/>
-            <a:ext cx="10972800" cy="502920"/>
+            <a:ext cx="10972800" cy="548640"/>
           </a:xfrm>
           <a:prstGeom prst="rect">
             <a:avLst/>
@@ -5216,10 +4650,10 @@
             <a:r>
               <a:rPr sz="2600" b="1">
                 <a:solidFill>
-                  <a:srgbClr val="1F374E"/>
+                  <a:srgbClr val="202C3C"/>
                 </a:solidFill>
               </a:rPr>
-              <a:t>HTTPS und TLS</a:t>
+              <a:t>Symmetrisch und asymmetrisch</a:t>
             </a:r>
           </a:p>
         </p:txBody>
@@ -5233,7 +4667,7 @@
         <p:spPr>
           <a:xfrm>
             <a:off x="685800" y="1234440"/>
-            <a:ext cx="5303520" cy="4937760"/>
+            <a:ext cx="5394960" cy="5029200"/>
           </a:xfrm>
           <a:prstGeom prst="rect">
             <a:avLst/>
@@ -5248,116 +4682,75 @@
           <a:p>
             <a:pPr>
               <a:spcAft>
-                <a:spcPts val="800"/>
+                <a:spcPts val="700"/>
               </a:spcAft>
               <a:defRPr sz="1900">
                 <a:solidFill>
-                  <a:srgbClr val="232323"/>
+                  <a:srgbClr val="1E1E1E"/>
                 </a:solidFill>
               </a:defRPr>
             </a:pPr>
             <a:r>
-              <a:t>HTTPS = Hypertext Transfer Protocol Secure.</a:t>
+              <a:t>symmetrisch: ein gemeinsamer geheimer Schlüssel</a:t>
             </a:r>
           </a:p>
           <a:p>
             <a:pPr>
               <a:spcAft>
-                <a:spcPts val="800"/>
+                <a:spcPts val="700"/>
               </a:spcAft>
               <a:defRPr sz="1900">
                 <a:solidFill>
-                  <a:srgbClr val="232323"/>
+                  <a:srgbClr val="1E1E1E"/>
                 </a:solidFill>
               </a:defRPr>
             </a:pPr>
             <a:r>
-              <a:t>TLS = Transport Layer Security schützt die Verbindung.</a:t>
+              <a:t>schnell und geeignet für Datenverkehr</a:t>
             </a:r>
           </a:p>
           <a:p>
             <a:pPr>
               <a:spcAft>
-                <a:spcPts val="800"/>
+                <a:spcPts val="700"/>
               </a:spcAft>
               <a:defRPr sz="1900">
                 <a:solidFill>
-                  <a:srgbClr val="232323"/>
+                  <a:srgbClr val="1E1E1E"/>
                 </a:solidFill>
               </a:defRPr>
             </a:pPr>
             <a:r>
-              <a:t>SSL = Secure Sockets Layer ist die ältere Technik/Bezeichnung; heute wird TLS verwendet.</a:t>
-            </a:r>
-          </a:p>
-        </p:txBody>
-      </p:sp>
-      <p:sp>
-        <p:nvSpPr>
-          <p:cNvPr id="5" name="Rectangle 4"/>
-          <p:cNvSpPr/>
+              <a:t>asymmetrisch: öffentlicher und privater Schlüssel</a:t>
+            </a:r>
+          </a:p>
+          <a:p>
+            <a:pPr>
+              <a:spcAft>
+                <a:spcPts val="700"/>
+              </a:spcAft>
+              <a:defRPr sz="1900">
+                <a:solidFill>
+                  <a:srgbClr val="1E1E1E"/>
+                </a:solidFill>
+              </a:defRPr>
+            </a:pPr>
+            <a:r>
+              <a:t>geeignet für Authentisierung und Schlüsselaushandlung</a:t>
+            </a:r>
+          </a:p>
+        </p:txBody>
+      </p:sp>
+      <p:sp>
+        <p:nvSpPr>
+          <p:cNvPr id="5" name="TextBox 4"/>
+          <p:cNvSpPr txBox="1"/>
           <p:nvPr/>
         </p:nvSpPr>
         <p:spPr>
           <a:xfrm>
-            <a:off x="6400800" y="1463040"/>
-            <a:ext cx="4754880" cy="2560320"/>
-          </a:xfrm>
-          <a:prstGeom prst="rect">
-            <a:avLst/>
-          </a:prstGeom>
-          <a:solidFill>
-            <a:srgbClr val="FAFAFA"/>
-          </a:solidFill>
-          <a:ln>
-            <a:solidFill>
-              <a:srgbClr val="646464"/>
-            </a:solidFill>
-          </a:ln>
-        </p:spPr>
-        <p:style>
-          <a:lnRef idx="1">
-            <a:schemeClr val="accent1"/>
-          </a:lnRef>
-          <a:fillRef idx="3">
-            <a:schemeClr val="accent1"/>
-          </a:fillRef>
-          <a:effectRef idx="2">
-            <a:schemeClr val="accent1"/>
-          </a:effectRef>
-          <a:fontRef idx="minor">
-            <a:schemeClr val="lt1"/>
-          </a:fontRef>
-        </p:style>
-        <p:txBody>
-          <a:bodyPr rtlCol="0" anchor="ctr" wrap="none"/>
-          <a:lstStyle/>
-          <a:p>
-            <a:pPr algn="ctr"/>
-            <a:r>
-              <a:rPr sz="1500">
-                <a:solidFill>
-                  <a:srgbClr val="232323"/>
-                </a:solidFill>
-                <a:latin typeface="Consolas"/>
-              </a:rPr>
-              <a:t>Browser  ⇄  HTTPS/TLS  ⇄  Server
-SSL: ältere Bezeichnung/Technik
-TLS: heute verwendet</a:t>
-            </a:r>
-          </a:p>
-        </p:txBody>
-      </p:sp>
-      <p:sp>
-        <p:nvSpPr>
-          <p:cNvPr id="6" name="TextBox 5"/>
-          <p:cNvSpPr txBox="1"/>
-          <p:nvPr/>
-        </p:nvSpPr>
-        <p:spPr>
-          <a:xfrm>
-            <a:off x="502920" y="6510528"/>
-            <a:ext cx="11064240" cy="182880"/>
+            <a:off x="365760" y="6510528"/>
+            <a:ext cx="11430000" cy="228600"/>
           </a:xfrm>
           <a:prstGeom prst="rect">
             <a:avLst/>
@@ -5374,10 +4767,10 @@
             <a:r>
               <a:rPr sz="800">
                 <a:solidFill>
-                  <a:srgbClr val="646464"/>
+                  <a:srgbClr val="6E6E6E"/>
                 </a:solidFill>
               </a:rPr>
-              <a:t>Grafik: eigene Darstellung · TLS 1.3: https://www.rfc-editor.org/rfc/rfc8446</a:t>
+              <a:t>Grafik: eigene Darstellung</a:t>
             </a:r>
           </a:p>
         </p:txBody>
@@ -5390,7 +4783,7 @@
 </p:sld>
 </file>
 
-<file path=ppt/slides/slide13.xml><?xml version="1.0" encoding="utf-8"?>
+<file path=ppt/slides/slide5.xml><?xml version="1.0" encoding="utf-8"?>
 <p:sld xmlns:a="http://schemas.openxmlformats.org/drawingml/2006/main" xmlns:p="http://schemas.openxmlformats.org/presentationml/2006/main" xmlns:r="http://schemas.openxmlformats.org/officeDocument/2006/relationships">
   <p:cSld>
     <p:spTree>
@@ -5409,13 +4802,13 @@
         <p:spPr>
           <a:xfrm>
             <a:off x="0" y="0"/>
-            <a:ext cx="12191695" cy="100584"/>
+            <a:ext cx="12191695" cy="109728"/>
           </a:xfrm>
           <a:prstGeom prst="rect">
             <a:avLst/>
           </a:prstGeom>
           <a:solidFill>
-            <a:srgbClr val="4472C4"/>
+            <a:srgbClr val="305396"/>
           </a:solidFill>
           <a:ln>
             <a:noFill/>
@@ -5452,7 +4845,7 @@
         <p:spPr>
           <a:xfrm>
             <a:off x="594360" y="320040"/>
-            <a:ext cx="10972800" cy="502920"/>
+            <a:ext cx="10972800" cy="548640"/>
           </a:xfrm>
           <a:prstGeom prst="rect">
             <a:avLst/>
@@ -5468,10 +4861,10 @@
             <a:r>
               <a:rPr sz="2600" b="1">
                 <a:solidFill>
-                  <a:srgbClr val="1F374E"/>
+                  <a:srgbClr val="202C3C"/>
                 </a:solidFill>
               </a:rPr>
-              <a:t>Warum HTTPS beide Welten kombiniert</a:t>
+              <a:t>RSA an kleinen Zahlen</a:t>
             </a:r>
           </a:p>
         </p:txBody>
@@ -5485,7 +4878,7 @@
         <p:spPr>
           <a:xfrm>
             <a:off x="685800" y="1234440"/>
-            <a:ext cx="5303520" cy="4937760"/>
+            <a:ext cx="5394960" cy="5029200"/>
           </a:xfrm>
           <a:prstGeom prst="rect">
             <a:avLst/>
@@ -5500,46 +4893,76 @@
           <a:p>
             <a:pPr>
               <a:spcAft>
-                <a:spcPts val="800"/>
+                <a:spcPts val="700"/>
               </a:spcAft>
               <a:defRPr sz="1900">
                 <a:solidFill>
-                  <a:srgbClr val="232323"/>
+                  <a:srgbClr val="1E1E1E"/>
                 </a:solidFill>
               </a:defRPr>
             </a:pPr>
             <a:r>
-              <a:t>Public-Key-/asymmetrische Kryptografie: Authentisierung und sichere Aushandlung von Schlüsselmaterial.</a:t>
+              <a:t>p = 5, q = 11</a:t>
             </a:r>
           </a:p>
           <a:p>
             <a:pPr>
               <a:spcAft>
-                <a:spcPts val="800"/>
+                <a:spcPts val="700"/>
               </a:spcAft>
               <a:defRPr sz="1900">
                 <a:solidFill>
-                  <a:srgbClr val="232323"/>
+                  <a:srgbClr val="1E1E1E"/>
                 </a:solidFill>
               </a:defRPr>
             </a:pPr>
             <a:r>
-              <a:t>Symmetrische Kryptografie: anschließend schneller und effizienter Schutz des laufenden Datenverkehrs.</a:t>
+              <a:t>n = 55</a:t>
             </a:r>
           </a:p>
           <a:p>
             <a:pPr>
               <a:spcAft>
-                <a:spcPts val="800"/>
+                <a:spcPts val="700"/>
               </a:spcAft>
               <a:defRPr sz="1900">
                 <a:solidFill>
-                  <a:srgbClr val="232323"/>
+                  <a:srgbClr val="1E1E1E"/>
                 </a:solidFill>
               </a:defRPr>
             </a:pPr>
             <a:r>
-              <a:t>Merksatz: asymmetrisch für den sicheren Aufbau – symmetrisch für den schnellen Datenverkehr.</a:t>
+              <a:t>φ(n) = 40</a:t>
+            </a:r>
+          </a:p>
+          <a:p>
+            <a:pPr>
+              <a:spcAft>
+                <a:spcPts val="700"/>
+              </a:spcAft>
+              <a:defRPr sz="1900">
+                <a:solidFill>
+                  <a:srgbClr val="1E1E1E"/>
+                </a:solidFill>
+              </a:defRPr>
+            </a:pPr>
+            <a:r>
+              <a:t>e = 3, d = 27</a:t>
+            </a:r>
+          </a:p>
+          <a:p>
+            <a:pPr>
+              <a:spcAft>
+                <a:spcPts val="700"/>
+              </a:spcAft>
+              <a:defRPr sz="1900">
+                <a:solidFill>
+                  <a:srgbClr val="1E1E1E"/>
+                </a:solidFill>
+              </a:defRPr>
+            </a:pPr>
+            <a:r>
+              <a:t>Beispiel ist didaktisch und unsicher.</a:t>
             </a:r>
           </a:p>
         </p:txBody>
@@ -5552,18 +4975,18 @@
         </p:nvSpPr>
         <p:spPr>
           <a:xfrm>
-            <a:off x="6217920" y="1188720"/>
-            <a:ext cx="5029200" cy="4023360"/>
+            <a:off x="6400800" y="1234440"/>
+            <a:ext cx="4754880" cy="3474720"/>
           </a:xfrm>
           <a:prstGeom prst="rect">
             <a:avLst/>
           </a:prstGeom>
           <a:solidFill>
-            <a:srgbClr val="FAFAFA"/>
+            <a:srgbClr val="FCFCFC"/>
           </a:solidFill>
           <a:ln>
             <a:solidFill>
-              <a:srgbClr val="646464"/>
+              <a:srgbClr val="6E6E6E"/>
             </a:solidFill>
           </a:ln>
         </p:spPr>
@@ -5587,19 +5010,17 @@
           <a:p>
             <a:pPr algn="ctr"/>
             <a:r>
-              <a:rPr sz="1500">
-                <a:solidFill>
-                  <a:srgbClr val="232323"/>
+              <a:rPr sz="1600">
+                <a:solidFill>
+                  <a:srgbClr val="1E1E1E"/>
                 </a:solidFill>
                 <a:latin typeface="Consolas"/>
               </a:rPr>
-              <a:t>1. Verbindungsaufbau
-   Zertifikat + Public-Key-Kryptografie
-        ↓
-2. gemeinsame Sitzungsschlüssel
-        ↓
-3. Datenverkehr symmetrisch
-   → effizient / schnell</a:t>
+              <a:t>p=5, q=11
+n=55
+φ(n)=40
+e=3
+d=27, denn 3·27 ≡ 1 mod 40</a:t>
             </a:r>
           </a:p>
         </p:txBody>
@@ -5612,8 +5033,8 @@
         </p:nvSpPr>
         <p:spPr>
           <a:xfrm>
-            <a:off x="502920" y="6510528"/>
-            <a:ext cx="11064240" cy="182880"/>
+            <a:off x="365760" y="6510528"/>
+            <a:ext cx="11430000" cy="228600"/>
           </a:xfrm>
           <a:prstGeom prst="rect">
             <a:avLst/>
@@ -5630,10 +5051,10 @@
             <a:r>
               <a:rPr sz="800">
                 <a:solidFill>
-                  <a:srgbClr val="646464"/>
+                  <a:srgbClr val="6E6E6E"/>
                 </a:solidFill>
               </a:rPr>
-              <a:t>Grafik: eigene Darstellung · TLS 1.3: https://www.rfc-editor.org/rfc/rfc8446</a:t>
+              <a:t>Grafik: eigene Darstellung</a:t>
             </a:r>
           </a:p>
         </p:txBody>
@@ -5646,7 +5067,7 @@
 </p:sld>
 </file>
 
-<file path=ppt/slides/slide14.xml><?xml version="1.0" encoding="utf-8"?>
+<file path=ppt/slides/slide6.xml><?xml version="1.0" encoding="utf-8"?>
 <p:sld xmlns:a="http://schemas.openxmlformats.org/drawingml/2006/main" xmlns:p="http://schemas.openxmlformats.org/presentationml/2006/main" xmlns:r="http://schemas.openxmlformats.org/officeDocument/2006/relationships">
   <p:cSld>
     <p:spTree>
@@ -5665,13 +5086,13 @@
         <p:spPr>
           <a:xfrm>
             <a:off x="0" y="0"/>
-            <a:ext cx="12191695" cy="100584"/>
+            <a:ext cx="12191695" cy="109728"/>
           </a:xfrm>
           <a:prstGeom prst="rect">
             <a:avLst/>
           </a:prstGeom>
           <a:solidFill>
-            <a:srgbClr val="4472C4"/>
+            <a:srgbClr val="305396"/>
           </a:solidFill>
           <a:ln>
             <a:noFill/>
@@ -5708,7 +5129,7 @@
         <p:spPr>
           <a:xfrm>
             <a:off x="594360" y="320040"/>
-            <a:ext cx="10972800" cy="502920"/>
+            <a:ext cx="10972800" cy="548640"/>
           </a:xfrm>
           <a:prstGeom prst="rect">
             <a:avLst/>
@@ -5724,10 +5145,10 @@
             <a:r>
               <a:rPr sz="2600" b="1">
                 <a:solidFill>
-                  <a:srgbClr val="1F374E"/>
+                  <a:srgbClr val="202C3C"/>
                 </a:solidFill>
               </a:rPr>
-              <a:t>Sicherung Kryptografie</a:t>
+              <a:t>RSA Beispiel</a:t>
             </a:r>
           </a:p>
         </p:txBody>
@@ -5741,7 +5162,7 @@
         <p:spPr>
           <a:xfrm>
             <a:off x="685800" y="1234440"/>
-            <a:ext cx="5303520" cy="4937760"/>
+            <a:ext cx="5394960" cy="5029200"/>
           </a:xfrm>
           <a:prstGeom prst="rect">
             <a:avLst/>
@@ -5756,75 +5177,131 @@
           <a:p>
             <a:pPr>
               <a:spcAft>
-                <a:spcPts val="800"/>
+                <a:spcPts val="700"/>
               </a:spcAft>
               <a:defRPr sz="1900">
                 <a:solidFill>
-                  <a:srgbClr val="232323"/>
+                  <a:srgbClr val="1E1E1E"/>
                 </a:solidFill>
               </a:defRPr>
             </a:pPr>
             <a:r>
-              <a:t>Klartext, Geheimtext und Schlüssel erklären</a:t>
+              <a:t>Nachricht m = 7</a:t>
             </a:r>
           </a:p>
           <a:p>
             <a:pPr>
               <a:spcAft>
-                <a:spcPts val="800"/>
+                <a:spcPts val="700"/>
               </a:spcAft>
               <a:defRPr sz="1900">
                 <a:solidFill>
-                  <a:srgbClr val="232323"/>
+                  <a:srgbClr val="1E1E1E"/>
                 </a:solidFill>
               </a:defRPr>
             </a:pPr>
             <a:r>
-              <a:t>symmetrisch und asymmetrisch unterscheiden</a:t>
+              <a:t>Verschlüsseln: c = 7³ mod 55 = 13</a:t>
             </a:r>
           </a:p>
           <a:p>
             <a:pPr>
               <a:spcAft>
-                <a:spcPts val="800"/>
+                <a:spcPts val="700"/>
               </a:spcAft>
               <a:defRPr sz="1900">
                 <a:solidFill>
-                  <a:srgbClr val="232323"/>
+                  <a:srgbClr val="1E1E1E"/>
                 </a:solidFill>
               </a:defRPr>
             </a:pPr>
             <a:r>
-              <a:t>RSA-Grundidee an kleinen Zahlen nachvollziehen</a:t>
+              <a:t>Entschlüsseln: m = 13²⁷ mod 55 = 7</a:t>
             </a:r>
           </a:p>
           <a:p>
             <a:pPr>
               <a:spcAft>
-                <a:spcPts val="800"/>
+                <a:spcPts val="700"/>
               </a:spcAft>
               <a:defRPr sz="1900">
                 <a:solidFill>
-                  <a:srgbClr val="232323"/>
+                  <a:srgbClr val="1E1E1E"/>
                 </a:solidFill>
               </a:defRPr>
             </a:pPr>
             <a:r>
-              <a:t>erklären, warum HTTPS/TLS für den Datenverkehr symmetrische Verfahren nutzt</a:t>
-            </a:r>
-          </a:p>
-        </p:txBody>
-      </p:sp>
-      <p:sp>
-        <p:nvSpPr>
-          <p:cNvPr id="5" name="TextBox 4"/>
+              <a:t>Prinzip statt Sicherheit.</a:t>
+            </a:r>
+          </a:p>
+        </p:txBody>
+      </p:sp>
+      <p:sp>
+        <p:nvSpPr>
+          <p:cNvPr id="5" name="Rectangle 4"/>
+          <p:cNvSpPr/>
+          <p:nvPr/>
+        </p:nvSpPr>
+        <p:spPr>
+          <a:xfrm>
+            <a:off x="6217920" y="1371600"/>
+            <a:ext cx="5120640" cy="2743200"/>
+          </a:xfrm>
+          <a:prstGeom prst="rect">
+            <a:avLst/>
+          </a:prstGeom>
+          <a:solidFill>
+            <a:srgbClr val="FCFCFC"/>
+          </a:solidFill>
+          <a:ln>
+            <a:solidFill>
+              <a:srgbClr val="6E6E6E"/>
+            </a:solidFill>
+          </a:ln>
+        </p:spPr>
+        <p:style>
+          <a:lnRef idx="1">
+            <a:schemeClr val="accent1"/>
+          </a:lnRef>
+          <a:fillRef idx="3">
+            <a:schemeClr val="accent1"/>
+          </a:fillRef>
+          <a:effectRef idx="2">
+            <a:schemeClr val="accent1"/>
+          </a:effectRef>
+          <a:fontRef idx="minor">
+            <a:schemeClr val="lt1"/>
+          </a:fontRef>
+        </p:style>
+        <p:txBody>
+          <a:bodyPr rtlCol="0" anchor="ctr" wrap="none"/>
+          <a:lstStyle/>
+          <a:p>
+            <a:pPr algn="ctr"/>
+            <a:r>
+              <a:rPr sz="1500">
+                <a:solidFill>
+                  <a:srgbClr val="1E1E1E"/>
+                </a:solidFill>
+                <a:latin typeface="Consolas"/>
+              </a:rPr>
+              <a:t>m = 7
+c = m^e mod n = 7^3 mod 55 = 13
+m = c^d mod n = 13^27 mod 55 = 7</a:t>
+            </a:r>
+          </a:p>
+        </p:txBody>
+      </p:sp>
+      <p:sp>
+        <p:nvSpPr>
+          <p:cNvPr id="6" name="TextBox 5"/>
           <p:cNvSpPr txBox="1"/>
           <p:nvPr/>
         </p:nvSpPr>
         <p:spPr>
           <a:xfrm>
-            <a:off x="502920" y="6510528"/>
-            <a:ext cx="11064240" cy="182880"/>
+            <a:off x="365760" y="6510528"/>
+            <a:ext cx="11430000" cy="228600"/>
           </a:xfrm>
           <a:prstGeom prst="rect">
             <a:avLst/>
@@ -5841,7 +5318,7 @@
             <a:r>
               <a:rPr sz="800">
                 <a:solidFill>
-                  <a:srgbClr val="646464"/>
+                  <a:srgbClr val="6E6E6E"/>
                 </a:solidFill>
               </a:rPr>
               <a:t>Grafik: eigene Darstellung</a:t>
@@ -5857,7 +5334,7 @@
 </p:sld>
 </file>
 
-<file path=ppt/slides/slide15.xml><?xml version="1.0" encoding="utf-8"?>
+<file path=ppt/slides/slide7.xml><?xml version="1.0" encoding="utf-8"?>
 <p:sld xmlns:a="http://schemas.openxmlformats.org/drawingml/2006/main" xmlns:p="http://schemas.openxmlformats.org/presentationml/2006/main" xmlns:r="http://schemas.openxmlformats.org/officeDocument/2006/relationships">
   <p:cSld>
     <p:spTree>
@@ -5876,13 +5353,13 @@
         <p:spPr>
           <a:xfrm>
             <a:off x="0" y="0"/>
-            <a:ext cx="12191695" cy="100584"/>
+            <a:ext cx="12191695" cy="109728"/>
           </a:xfrm>
           <a:prstGeom prst="rect">
             <a:avLst/>
           </a:prstGeom>
           <a:solidFill>
-            <a:srgbClr val="4472C4"/>
+            <a:srgbClr val="305396"/>
           </a:solidFill>
           <a:ln>
             <a:noFill/>
@@ -5919,7 +5396,7 @@
         <p:spPr>
           <a:xfrm>
             <a:off x="594360" y="320040"/>
-            <a:ext cx="10972800" cy="502920"/>
+            <a:ext cx="10972800" cy="548640"/>
           </a:xfrm>
           <a:prstGeom prst="rect">
             <a:avLst/>
@@ -5935,10 +5412,10 @@
             <a:r>
               <a:rPr sz="2600" b="1">
                 <a:solidFill>
-                  <a:srgbClr val="1F374E"/>
+                  <a:srgbClr val="202C3C"/>
                 </a:solidFill>
               </a:rPr>
-              <a:t>Quellen</a:t>
+              <a:t>HTTPS und TLS</a:t>
             </a:r>
           </a:p>
         </p:txBody>
@@ -5951,8 +5428,8 @@
         </p:nvSpPr>
         <p:spPr>
           <a:xfrm>
-            <a:off x="731520" y="1234440"/>
-            <a:ext cx="10698480" cy="5029200"/>
+            <a:off x="685800" y="1234440"/>
+            <a:ext cx="5394960" cy="5029200"/>
           </a:xfrm>
           <a:prstGeom prst="rect">
             <a:avLst/>
@@ -5967,75 +5444,131 @@
           <a:p>
             <a:pPr>
               <a:spcAft>
-                <a:spcPts val="800"/>
+                <a:spcPts val="700"/>
               </a:spcAft>
-              <a:defRPr sz="1500">
-                <a:solidFill>
-                  <a:srgbClr val="232323"/>
+              <a:defRPr sz="1900">
+                <a:solidFill>
+                  <a:srgbClr val="1E1E1E"/>
                 </a:solidFill>
               </a:defRPr>
             </a:pPr>
             <a:r>
-              <a:t>Bundesamt für Sicherheit in der Informationstechnik: https://www.bsi.bund.de</a:t>
+              <a:t>HTTPS = Hypertext Transfer Protocol Secure</a:t>
             </a:r>
           </a:p>
           <a:p>
             <a:pPr>
               <a:spcAft>
-                <a:spcPts val="800"/>
+                <a:spcPts val="700"/>
               </a:spcAft>
-              <a:defRPr sz="1500">
-                <a:solidFill>
-                  <a:srgbClr val="232323"/>
+              <a:defRPr sz="1900">
+                <a:solidFill>
+                  <a:srgbClr val="1E1E1E"/>
                 </a:solidFill>
               </a:defRPr>
             </a:pPr>
             <a:r>
-              <a:t>IETF RFC 8446 – The Transport Layer Security (TLS) Protocol Version 1.3: https://www.rfc-editor.org/rfc/rfc8446</a:t>
+              <a:t>TLS = Transport Layer Security</a:t>
             </a:r>
           </a:p>
           <a:p>
             <a:pPr>
               <a:spcAft>
-                <a:spcPts val="800"/>
+                <a:spcPts val="700"/>
               </a:spcAft>
-              <a:defRPr sz="1500">
-                <a:solidFill>
-                  <a:srgbClr val="232323"/>
+              <a:defRPr sz="1900">
+                <a:solidFill>
+                  <a:srgbClr val="1E1E1E"/>
                 </a:solidFill>
               </a:defRPr>
             </a:pPr>
             <a:r>
-              <a:t>Sächsischer Lehrplan Oberschule Informatik, Klassenstufe 8: https://www.schulportal.sachsen.de/lplandb/lehrplan/514</a:t>
+              <a:t>SSL ist ältere Technik/Bezeichnung.</a:t>
             </a:r>
           </a:p>
           <a:p>
             <a:pPr>
               <a:spcAft>
-                <a:spcPts val="800"/>
+                <a:spcPts val="700"/>
               </a:spcAft>
-              <a:defRPr sz="1500">
-                <a:solidFill>
-                  <a:srgbClr val="232323"/>
+              <a:defRPr sz="1900">
+                <a:solidFill>
+                  <a:srgbClr val="1E1E1E"/>
                 </a:solidFill>
               </a:defRPr>
             </a:pPr>
             <a:r>
-              <a:t>Grafiken und vereinfachte Unterrichtsbeispiele: eigene didaktische Darstellung.</a:t>
-            </a:r>
-          </a:p>
-        </p:txBody>
-      </p:sp>
-      <p:sp>
-        <p:nvSpPr>
-          <p:cNvPr id="5" name="TextBox 4"/>
+              <a:t>Asymmetrisch für sicheren Aufbau, symmetrisch für schnellen Datenverkehr.</a:t>
+            </a:r>
+          </a:p>
+        </p:txBody>
+      </p:sp>
+      <p:sp>
+        <p:nvSpPr>
+          <p:cNvPr id="5" name="Rectangle 4"/>
+          <p:cNvSpPr/>
+          <p:nvPr/>
+        </p:nvSpPr>
+        <p:spPr>
+          <a:xfrm>
+            <a:off x="6217920" y="1554480"/>
+            <a:ext cx="5120640" cy="2560320"/>
+          </a:xfrm>
+          <a:prstGeom prst="rect">
+            <a:avLst/>
+          </a:prstGeom>
+          <a:solidFill>
+            <a:srgbClr val="FCFCFC"/>
+          </a:solidFill>
+          <a:ln>
+            <a:solidFill>
+              <a:srgbClr val="6E6E6E"/>
+            </a:solidFill>
+          </a:ln>
+        </p:spPr>
+        <p:style>
+          <a:lnRef idx="1">
+            <a:schemeClr val="accent1"/>
+          </a:lnRef>
+          <a:fillRef idx="3">
+            <a:schemeClr val="accent1"/>
+          </a:fillRef>
+          <a:effectRef idx="2">
+            <a:schemeClr val="accent1"/>
+          </a:effectRef>
+          <a:fontRef idx="minor">
+            <a:schemeClr val="lt1"/>
+          </a:fontRef>
+        </p:style>
+        <p:txBody>
+          <a:bodyPr rtlCol="0" anchor="ctr" wrap="none"/>
+          <a:lstStyle/>
+          <a:p>
+            <a:pPr algn="ctr"/>
+            <a:r>
+              <a:rPr sz="1400">
+                <a:solidFill>
+                  <a:srgbClr val="1E1E1E"/>
+                </a:solidFill>
+                <a:latin typeface="Consolas"/>
+              </a:rPr>
+              <a:t>1. Zertifikat / Public-Key-Kryptografie
+2. Sitzungsschlüssel aushandeln
+3. Datenverkehr symmetrisch schützen</a:t>
+            </a:r>
+          </a:p>
+        </p:txBody>
+      </p:sp>
+      <p:sp>
+        <p:nvSpPr>
+          <p:cNvPr id="6" name="TextBox 5"/>
           <p:cNvSpPr txBox="1"/>
           <p:nvPr/>
         </p:nvSpPr>
         <p:spPr>
           <a:xfrm>
-            <a:off x="502920" y="6510528"/>
-            <a:ext cx="11064240" cy="182880"/>
+            <a:off x="365760" y="6510528"/>
+            <a:ext cx="11430000" cy="228600"/>
           </a:xfrm>
           <a:prstGeom prst="rect">
             <a:avLst/>
@@ -6052,10 +5585,10 @@
             <a:r>
               <a:rPr sz="800">
                 <a:solidFill>
-                  <a:srgbClr val="646464"/>
+                  <a:srgbClr val="6E6E6E"/>
                 </a:solidFill>
               </a:rPr>
-              <a:t>Quellenangaben · Grafiken: eigene Darstellung</a:t>
+              <a:t>Grafik: eigene Darstellung · TLS 1.3: https://www.rfc-editor.org/rfc/rfc8446</a:t>
             </a:r>
           </a:p>
         </p:txBody>
@@ -6068,7 +5601,7 @@
 </p:sld>
 </file>
 
-<file path=ppt/slides/slide2.xml><?xml version="1.0" encoding="utf-8"?>
+<file path=ppt/slides/slide8.xml><?xml version="1.0" encoding="utf-8"?>
 <p:sld xmlns:a="http://schemas.openxmlformats.org/drawingml/2006/main" xmlns:p="http://schemas.openxmlformats.org/presentationml/2006/main" xmlns:r="http://schemas.openxmlformats.org/officeDocument/2006/relationships">
   <p:cSld>
     <p:spTree>
@@ -6087,13 +5620,13 @@
         <p:spPr>
           <a:xfrm>
             <a:off x="0" y="0"/>
-            <a:ext cx="12191695" cy="100584"/>
+            <a:ext cx="12191695" cy="109728"/>
           </a:xfrm>
           <a:prstGeom prst="rect">
             <a:avLst/>
           </a:prstGeom>
           <a:solidFill>
-            <a:srgbClr val="4472C4"/>
+            <a:srgbClr val="305396"/>
           </a:solidFill>
           <a:ln>
             <a:noFill/>
@@ -6130,7 +5663,7 @@
         <p:spPr>
           <a:xfrm>
             <a:off x="594360" y="320040"/>
-            <a:ext cx="10972800" cy="502920"/>
+            <a:ext cx="10972800" cy="548640"/>
           </a:xfrm>
           <a:prstGeom prst="rect">
             <a:avLst/>
@@ -6146,418 +5679,24 @@
             <a:r>
               <a:rPr sz="2600" b="1">
                 <a:solidFill>
-                  <a:srgbClr val="1F374E"/>
+                  <a:srgbClr val="202C3C"/>
                 </a:solidFill>
               </a:rPr>
-              <a:t>Warum Kryptografie?</a:t>
-            </a:r>
-          </a:p>
-        </p:txBody>
-      </p:sp>
-      <p:sp>
-        <p:nvSpPr>
-          <p:cNvPr id="4" name="Rounded Rectangle 3"/>
-          <p:cNvSpPr/>
+              <a:t>Quellen</a:t>
+            </a:r>
+          </a:p>
+        </p:txBody>
+      </p:sp>
+      <p:sp>
+        <p:nvSpPr>
+          <p:cNvPr id="4" name="TextBox 3"/>
+          <p:cNvSpPr txBox="1"/>
           <p:nvPr/>
         </p:nvSpPr>
         <p:spPr>
           <a:xfrm>
-            <a:off x="822960" y="1325880"/>
-            <a:ext cx="10515600" cy="1417320"/>
-          </a:xfrm>
-          <a:prstGeom prst="roundRect">
-            <a:avLst/>
-          </a:prstGeom>
-          <a:solidFill>
-            <a:srgbClr val="DCE6F1"/>
-          </a:solidFill>
-          <a:ln>
-            <a:solidFill>
-              <a:srgbClr val="4472C4"/>
-            </a:solidFill>
-          </a:ln>
-        </p:spPr>
-        <p:style>
-          <a:lnRef idx="1">
-            <a:schemeClr val="accent1"/>
-          </a:lnRef>
-          <a:fillRef idx="3">
-            <a:schemeClr val="accent1"/>
-          </a:fillRef>
-          <a:effectRef idx="2">
-            <a:schemeClr val="accent1"/>
-          </a:effectRef>
-          <a:fontRef idx="minor">
-            <a:schemeClr val="lt1"/>
-          </a:fontRef>
-        </p:style>
-        <p:txBody>
-          <a:bodyPr rtlCol="0" anchor="ctr" wrap="square"/>
-          <a:lstStyle/>
-          <a:p>
-            <a:pPr algn="ctr"/>
-            <a:r>
-              <a:rPr sz="2400" b="1">
-                <a:solidFill>
-                  <a:srgbClr val="1F374E"/>
-                </a:solidFill>
-              </a:rPr>
-              <a:t>Wie können zwei Personen über ein Netzwerk kommunizieren, ohne dass Mitlesende den Inhalt verstehen?</a:t>
-            </a:r>
-          </a:p>
-        </p:txBody>
-      </p:sp>
-      <p:sp>
-        <p:nvSpPr>
-          <p:cNvPr id="5" name="Rounded Rectangle 4"/>
-          <p:cNvSpPr/>
-          <p:nvPr/>
-        </p:nvSpPr>
-        <p:spPr>
-          <a:xfrm>
-            <a:off x="6217920" y="3246120"/>
-            <a:ext cx="1143000" cy="731520"/>
-          </a:xfrm>
-          <a:prstGeom prst="roundRect">
-            <a:avLst/>
-          </a:prstGeom>
-          <a:solidFill>
-            <a:srgbClr val="F2F6FA"/>
-          </a:solidFill>
-          <a:ln>
-            <a:solidFill>
-              <a:srgbClr val="4472C4"/>
-            </a:solidFill>
-          </a:ln>
-        </p:spPr>
-        <p:style>
-          <a:lnRef idx="1">
-            <a:schemeClr val="accent1"/>
-          </a:lnRef>
-          <a:fillRef idx="3">
-            <a:schemeClr val="accent1"/>
-          </a:fillRef>
-          <a:effectRef idx="2">
-            <a:schemeClr val="accent1"/>
-          </a:effectRef>
-          <a:fontRef idx="minor">
-            <a:schemeClr val="lt1"/>
-          </a:fontRef>
-        </p:style>
-        <p:txBody>
-          <a:bodyPr rtlCol="0" anchor="ctr" wrap="square"/>
-          <a:lstStyle/>
-          <a:p>
-            <a:pPr algn="ctr"/>
-            <a:r>
-              <a:rPr sz="1100" b="1">
-                <a:solidFill>
-                  <a:srgbClr val="1F374E"/>
-                </a:solidFill>
-              </a:rPr>
-              <a:t>Endgerät</a:t>
-            </a:r>
-          </a:p>
-        </p:txBody>
-      </p:sp>
-      <p:sp>
-        <p:nvSpPr>
-          <p:cNvPr id="6" name="Right Arrow 5"/>
-          <p:cNvSpPr/>
-          <p:nvPr/>
-        </p:nvSpPr>
-        <p:spPr>
-          <a:xfrm>
-            <a:off x="7406640" y="3447288"/>
-            <a:ext cx="274320" cy="256032"/>
-          </a:xfrm>
-          <a:prstGeom prst="rightArrow">
-            <a:avLst/>
-          </a:prstGeom>
-          <a:solidFill>
-            <a:srgbClr val="4472C4"/>
-          </a:solidFill>
-          <a:ln>
-            <a:noFill/>
-          </a:ln>
-        </p:spPr>
-        <p:style>
-          <a:lnRef idx="1">
-            <a:schemeClr val="accent1"/>
-          </a:lnRef>
-          <a:fillRef idx="3">
-            <a:schemeClr val="accent1"/>
-          </a:fillRef>
-          <a:effectRef idx="2">
-            <a:schemeClr val="accent1"/>
-          </a:effectRef>
-          <a:fontRef idx="minor">
-            <a:schemeClr val="lt1"/>
-          </a:fontRef>
-        </p:style>
-        <p:txBody>
-          <a:bodyPr rtlCol="0" anchor="ctr"/>
-          <a:lstStyle/>
-          <a:p>
-            <a:pPr algn="ctr"/>
-          </a:p>
-        </p:txBody>
-      </p:sp>
-      <p:sp>
-        <p:nvSpPr>
-          <p:cNvPr id="7" name="Rounded Rectangle 6"/>
-          <p:cNvSpPr/>
-          <p:nvPr/>
-        </p:nvSpPr>
-        <p:spPr>
-          <a:xfrm>
-            <a:off x="7635240" y="3246120"/>
-            <a:ext cx="1508760" cy="731520"/>
-          </a:xfrm>
-          <a:prstGeom prst="roundRect">
-            <a:avLst/>
-          </a:prstGeom>
-          <a:solidFill>
-            <a:srgbClr val="DCE6F1"/>
-          </a:solidFill>
-          <a:ln>
-            <a:solidFill>
-              <a:srgbClr val="4472C4"/>
-            </a:solidFill>
-          </a:ln>
-        </p:spPr>
-        <p:style>
-          <a:lnRef idx="1">
-            <a:schemeClr val="accent1"/>
-          </a:lnRef>
-          <a:fillRef idx="3">
-            <a:schemeClr val="accent1"/>
-          </a:fillRef>
-          <a:effectRef idx="2">
-            <a:schemeClr val="accent1"/>
-          </a:effectRef>
-          <a:fontRef idx="minor">
-            <a:schemeClr val="lt1"/>
-          </a:fontRef>
-        </p:style>
-        <p:txBody>
-          <a:bodyPr rtlCol="0" anchor="ctr" wrap="square"/>
-          <a:lstStyle/>
-          <a:p>
-            <a:pPr algn="ctr"/>
-            <a:r>
-              <a:rPr sz="1100" b="1">
-                <a:solidFill>
-                  <a:srgbClr val="1F374E"/>
-                </a:solidFill>
-              </a:rPr>
-              <a:t>Switch / Access Point</a:t>
-            </a:r>
-          </a:p>
-        </p:txBody>
-      </p:sp>
-      <p:sp>
-        <p:nvSpPr>
-          <p:cNvPr id="8" name="Right Arrow 7"/>
-          <p:cNvSpPr/>
-          <p:nvPr/>
-        </p:nvSpPr>
-        <p:spPr>
-          <a:xfrm>
-            <a:off x="9189720" y="3447288"/>
-            <a:ext cx="274320" cy="256032"/>
-          </a:xfrm>
-          <a:prstGeom prst="rightArrow">
-            <a:avLst/>
-          </a:prstGeom>
-          <a:solidFill>
-            <a:srgbClr val="4472C4"/>
-          </a:solidFill>
-          <a:ln>
-            <a:noFill/>
-          </a:ln>
-        </p:spPr>
-        <p:style>
-          <a:lnRef idx="1">
-            <a:schemeClr val="accent1"/>
-          </a:lnRef>
-          <a:fillRef idx="3">
-            <a:schemeClr val="accent1"/>
-          </a:fillRef>
-          <a:effectRef idx="2">
-            <a:schemeClr val="accent1"/>
-          </a:effectRef>
-          <a:fontRef idx="minor">
-            <a:schemeClr val="lt1"/>
-          </a:fontRef>
-        </p:style>
-        <p:txBody>
-          <a:bodyPr rtlCol="0" anchor="ctr"/>
-          <a:lstStyle/>
-          <a:p>
-            <a:pPr algn="ctr"/>
-          </a:p>
-        </p:txBody>
-      </p:sp>
-      <p:sp>
-        <p:nvSpPr>
-          <p:cNvPr id="9" name="Rounded Rectangle 8"/>
-          <p:cNvSpPr/>
-          <p:nvPr/>
-        </p:nvSpPr>
-        <p:spPr>
-          <a:xfrm>
-            <a:off x="9372600" y="3246120"/>
-            <a:ext cx="1051560" cy="731520"/>
-          </a:xfrm>
-          <a:prstGeom prst="roundRect">
-            <a:avLst/>
-          </a:prstGeom>
-          <a:solidFill>
-            <a:srgbClr val="FFE699"/>
-          </a:solidFill>
-          <a:ln>
-            <a:solidFill>
-              <a:srgbClr val="4472C4"/>
-            </a:solidFill>
-          </a:ln>
-        </p:spPr>
-        <p:style>
-          <a:lnRef idx="1">
-            <a:schemeClr val="accent1"/>
-          </a:lnRef>
-          <a:fillRef idx="3">
-            <a:schemeClr val="accent1"/>
-          </a:fillRef>
-          <a:effectRef idx="2">
-            <a:schemeClr val="accent1"/>
-          </a:effectRef>
-          <a:fontRef idx="minor">
-            <a:schemeClr val="lt1"/>
-          </a:fontRef>
-        </p:style>
-        <p:txBody>
-          <a:bodyPr rtlCol="0" anchor="ctr" wrap="square"/>
-          <a:lstStyle/>
-          <a:p>
-            <a:pPr algn="ctr"/>
-            <a:r>
-              <a:rPr sz="1100" b="1">
-                <a:solidFill>
-                  <a:srgbClr val="1F374E"/>
-                </a:solidFill>
-              </a:rPr>
-              <a:t>Router</a:t>
-            </a:r>
-          </a:p>
-        </p:txBody>
-      </p:sp>
-      <p:sp>
-        <p:nvSpPr>
-          <p:cNvPr id="10" name="Right Arrow 9"/>
-          <p:cNvSpPr/>
-          <p:nvPr/>
-        </p:nvSpPr>
-        <p:spPr>
-          <a:xfrm>
-            <a:off x="10469880" y="3447288"/>
-            <a:ext cx="274320" cy="256032"/>
-          </a:xfrm>
-          <a:prstGeom prst="rightArrow">
-            <a:avLst/>
-          </a:prstGeom>
-          <a:solidFill>
-            <a:srgbClr val="4472C4"/>
-          </a:solidFill>
-          <a:ln>
-            <a:noFill/>
-          </a:ln>
-        </p:spPr>
-        <p:style>
-          <a:lnRef idx="1">
-            <a:schemeClr val="accent1"/>
-          </a:lnRef>
-          <a:fillRef idx="3">
-            <a:schemeClr val="accent1"/>
-          </a:fillRef>
-          <a:effectRef idx="2">
-            <a:schemeClr val="accent1"/>
-          </a:effectRef>
-          <a:fontRef idx="minor">
-            <a:schemeClr val="lt1"/>
-          </a:fontRef>
-        </p:style>
-        <p:txBody>
-          <a:bodyPr rtlCol="0" anchor="ctr"/>
-          <a:lstStyle/>
-          <a:p>
-            <a:pPr algn="ctr"/>
-          </a:p>
-        </p:txBody>
-      </p:sp>
-      <p:sp>
-        <p:nvSpPr>
-          <p:cNvPr id="11" name="Rounded Rectangle 10"/>
-          <p:cNvSpPr/>
-          <p:nvPr/>
-        </p:nvSpPr>
-        <p:spPr>
-          <a:xfrm>
-            <a:off x="10698480" y="3246120"/>
-            <a:ext cx="1005840" cy="731520"/>
-          </a:xfrm>
-          <a:prstGeom prst="roundRect">
-            <a:avLst/>
-          </a:prstGeom>
-          <a:solidFill>
-            <a:srgbClr val="E2EFDA"/>
-          </a:solidFill>
-          <a:ln>
-            <a:solidFill>
-              <a:srgbClr val="4472C4"/>
-            </a:solidFill>
-          </a:ln>
-        </p:spPr>
-        <p:style>
-          <a:lnRef idx="1">
-            <a:schemeClr val="accent1"/>
-          </a:lnRef>
-          <a:fillRef idx="3">
-            <a:schemeClr val="accent1"/>
-          </a:fillRef>
-          <a:effectRef idx="2">
-            <a:schemeClr val="accent1"/>
-          </a:effectRef>
-          <a:fontRef idx="minor">
-            <a:schemeClr val="lt1"/>
-          </a:fontRef>
-        </p:style>
-        <p:txBody>
-          <a:bodyPr rtlCol="0" anchor="ctr" wrap="square"/>
-          <a:lstStyle/>
-          <a:p>
-            <a:pPr algn="ctr"/>
-            <a:r>
-              <a:rPr sz="1100" b="1">
-                <a:solidFill>
-                  <a:srgbClr val="1F374E"/>
-                </a:solidFill>
-              </a:rPr>
-              <a:t>Server</a:t>
-            </a:r>
-          </a:p>
-        </p:txBody>
-      </p:sp>
-      <p:sp>
-        <p:nvSpPr>
-          <p:cNvPr id="12" name="TextBox 11"/>
-          <p:cNvSpPr txBox="1"/>
-          <p:nvPr/>
-        </p:nvSpPr>
-        <p:spPr>
-          <a:xfrm>
-            <a:off x="502920" y="6510528"/>
-            <a:ext cx="11064240" cy="182880"/>
+            <a:off x="685800" y="1234440"/>
+            <a:ext cx="5394960" cy="5029200"/>
           </a:xfrm>
           <a:prstGeom prst="rect">
             <a:avLst/>
@@ -6565,94 +5704,82 @@
           <a:noFill/>
         </p:spPr>
         <p:txBody>
-          <a:bodyPr wrap="none">
+          <a:bodyPr wrap="square">
             <a:spAutoFit/>
           </a:bodyPr>
           <a:lstStyle/>
           <a:p>
-            <a:pPr algn="r"/>
-            <a:r>
-              <a:rPr sz="800">
-                <a:solidFill>
-                  <a:srgbClr val="646464"/>
-                </a:solidFill>
-              </a:rPr>
-              <a:t>Grafik: eigene Darstellung</a:t>
-            </a:r>
-          </a:p>
-        </p:txBody>
-      </p:sp>
-    </p:spTree>
-  </p:cSld>
-  <p:clrMapOvr>
-    <a:masterClrMapping/>
-  </p:clrMapOvr>
-</p:sld>
-</file>
-
-<file path=ppt/slides/slide3.xml><?xml version="1.0" encoding="utf-8"?>
-<p:sld xmlns:a="http://schemas.openxmlformats.org/drawingml/2006/main" xmlns:p="http://schemas.openxmlformats.org/presentationml/2006/main" xmlns:r="http://schemas.openxmlformats.org/officeDocument/2006/relationships">
-  <p:cSld>
-    <p:spTree>
-      <p:nvGrpSpPr>
-        <p:cNvPr id="1" name=""/>
-        <p:cNvGrpSpPr/>
-        <p:nvPr/>
-      </p:nvGrpSpPr>
-      <p:grpSpPr/>
-      <p:sp>
-        <p:nvSpPr>
-          <p:cNvPr id="2" name="Rectangle 1"/>
-          <p:cNvSpPr/>
+            <a:pPr>
+              <a:spcAft>
+                <a:spcPts val="700"/>
+              </a:spcAft>
+              <a:defRPr sz="1900">
+                <a:solidFill>
+                  <a:srgbClr val="1E1E1E"/>
+                </a:solidFill>
+              </a:defRPr>
+            </a:pPr>
+            <a:r>
+              <a:t>BSI: https://www.bsi.bund.de</a:t>
+            </a:r>
+          </a:p>
+          <a:p>
+            <a:pPr>
+              <a:spcAft>
+                <a:spcPts val="700"/>
+              </a:spcAft>
+              <a:defRPr sz="1900">
+                <a:solidFill>
+                  <a:srgbClr val="1E1E1E"/>
+                </a:solidFill>
+              </a:defRPr>
+            </a:pPr>
+            <a:r>
+              <a:t>IETF RFC 8446 – TLS 1.3: https://www.rfc-editor.org/rfc/rfc8446</a:t>
+            </a:r>
+          </a:p>
+          <a:p>
+            <a:pPr>
+              <a:spcAft>
+                <a:spcPts val="700"/>
+              </a:spcAft>
+              <a:defRPr sz="1900">
+                <a:solidFill>
+                  <a:srgbClr val="1E1E1E"/>
+                </a:solidFill>
+              </a:defRPr>
+            </a:pPr>
+            <a:r>
+              <a:t>Sächsischer Lehrplan Oberschule Informatik, Klassenstufe 8: https://www.schulportal.sachsen.de/lplandb/lehrplan/514</a:t>
+            </a:r>
+          </a:p>
+          <a:p>
+            <a:pPr>
+              <a:spcAft>
+                <a:spcPts val="700"/>
+              </a:spcAft>
+              <a:defRPr sz="1900">
+                <a:solidFill>
+                  <a:srgbClr val="1E1E1E"/>
+                </a:solidFill>
+              </a:defRPr>
+            </a:pPr>
+            <a:r>
+              <a:t>Beispiele und Grafiken: eigene Darstellung.</a:t>
+            </a:r>
+          </a:p>
+        </p:txBody>
+      </p:sp>
+      <p:sp>
+        <p:nvSpPr>
+          <p:cNvPr id="5" name="TextBox 4"/>
+          <p:cNvSpPr txBox="1"/>
           <p:nvPr/>
         </p:nvSpPr>
         <p:spPr>
           <a:xfrm>
-            <a:off x="0" y="0"/>
-            <a:ext cx="12191695" cy="100584"/>
-          </a:xfrm>
-          <a:prstGeom prst="rect">
-            <a:avLst/>
-          </a:prstGeom>
-          <a:solidFill>
-            <a:srgbClr val="4472C4"/>
-          </a:solidFill>
-          <a:ln>
-            <a:noFill/>
-          </a:ln>
-        </p:spPr>
-        <p:style>
-          <a:lnRef idx="1">
-            <a:schemeClr val="accent1"/>
-          </a:lnRef>
-          <a:fillRef idx="3">
-            <a:schemeClr val="accent1"/>
-          </a:fillRef>
-          <a:effectRef idx="2">
-            <a:schemeClr val="accent1"/>
-          </a:effectRef>
-          <a:fontRef idx="minor">
-            <a:schemeClr val="lt1"/>
-          </a:fontRef>
-        </p:style>
-        <p:txBody>
-          <a:bodyPr rtlCol="0" anchor="ctr"/>
-          <a:lstStyle/>
-          <a:p>
-            <a:pPr algn="ctr"/>
-          </a:p>
-        </p:txBody>
-      </p:sp>
-      <p:sp>
-        <p:nvSpPr>
-          <p:cNvPr id="3" name="TextBox 2"/>
-          <p:cNvSpPr txBox="1"/>
-          <p:nvPr/>
-        </p:nvSpPr>
-        <p:spPr>
-          <a:xfrm>
-            <a:off x="594360" y="320040"/>
-            <a:ext cx="10972800" cy="502920"/>
+            <a:off x="365760" y="6510528"/>
+            <a:ext cx="11430000" cy="228600"/>
           </a:xfrm>
           <a:prstGeom prst="rect">
             <a:avLst/>
@@ -6665,1747 +5792,14 @@
           </a:bodyPr>
           <a:lstStyle/>
           <a:p>
-            <a:r>
-              <a:rPr sz="2600" b="1">
-                <a:solidFill>
-                  <a:srgbClr val="1F374E"/>
+            <a:pPr algn="r"/>
+            <a:r>
+              <a:rPr sz="800">
+                <a:solidFill>
+                  <a:srgbClr val="6E6E6E"/>
                 </a:solidFill>
               </a:rPr>
-              <a:t>Was ist Kryptografie?</a:t>
-            </a:r>
-          </a:p>
-        </p:txBody>
-      </p:sp>
-      <p:sp>
-        <p:nvSpPr>
-          <p:cNvPr id="4" name="TextBox 3"/>
-          <p:cNvSpPr txBox="1"/>
-          <p:nvPr/>
-        </p:nvSpPr>
-        <p:spPr>
-          <a:xfrm>
-            <a:off x="685800" y="1234440"/>
-            <a:ext cx="5303520" cy="4937760"/>
-          </a:xfrm>
-          <a:prstGeom prst="rect">
-            <a:avLst/>
-          </a:prstGeom>
-          <a:noFill/>
-        </p:spPr>
-        <p:txBody>
-          <a:bodyPr wrap="square">
-            <a:spAutoFit/>
-          </a:bodyPr>
-          <a:lstStyle/>
-          <a:p>
-            <a:pPr>
-              <a:spcAft>
-                <a:spcPts val="800"/>
-              </a:spcAft>
-              <a:defRPr sz="1900">
-                <a:solidFill>
-                  <a:srgbClr val="232323"/>
-                </a:solidFill>
-              </a:defRPr>
-            </a:pPr>
-            <a:r>
-              <a:t>Kryptografie beschäftigt sich mit Verfahren zum Schutz von Informationen.</a:t>
-            </a:r>
-          </a:p>
-          <a:p>
-            <a:pPr>
-              <a:spcAft>
-                <a:spcPts val="800"/>
-              </a:spcAft>
-              <a:defRPr sz="1900">
-                <a:solidFill>
-                  <a:srgbClr val="232323"/>
-                </a:solidFill>
-              </a:defRPr>
-            </a:pPr>
-            <a:r>
-              <a:t>Verschlüsselung macht lesbaren Klartext mit einem Schlüssel zu Geheimtext.</a:t>
-            </a:r>
-          </a:p>
-          <a:p>
-            <a:pPr>
-              <a:spcAft>
-                <a:spcPts val="800"/>
-              </a:spcAft>
-              <a:defRPr sz="1900">
-                <a:solidFill>
-                  <a:srgbClr val="232323"/>
-                </a:solidFill>
-              </a:defRPr>
-            </a:pPr>
-            <a:r>
-              <a:t>Entschlüsselung macht daraus wieder lesbaren Klartext.</a:t>
-            </a:r>
-          </a:p>
-        </p:txBody>
-      </p:sp>
-      <p:sp>
-        <p:nvSpPr>
-          <p:cNvPr id="5" name="Rectangle 4"/>
-          <p:cNvSpPr/>
-          <p:nvPr/>
-        </p:nvSpPr>
-        <p:spPr>
-          <a:xfrm>
-            <a:off x="6400800" y="1325880"/>
-            <a:ext cx="4754880" cy="3291840"/>
-          </a:xfrm>
-          <a:prstGeom prst="rect">
-            <a:avLst/>
-          </a:prstGeom>
-          <a:solidFill>
-            <a:srgbClr val="FAFAFA"/>
-          </a:solidFill>
-          <a:ln>
-            <a:solidFill>
-              <a:srgbClr val="646464"/>
-            </a:solidFill>
-          </a:ln>
-        </p:spPr>
-        <p:style>
-          <a:lnRef idx="1">
-            <a:schemeClr val="accent1"/>
-          </a:lnRef>
-          <a:fillRef idx="3">
-            <a:schemeClr val="accent1"/>
-          </a:fillRef>
-          <a:effectRef idx="2">
-            <a:schemeClr val="accent1"/>
-          </a:effectRef>
-          <a:fontRef idx="minor">
-            <a:schemeClr val="lt1"/>
-          </a:fontRef>
-        </p:style>
-        <p:txBody>
-          <a:bodyPr rtlCol="0" anchor="ctr" wrap="none"/>
-          <a:lstStyle/>
-          <a:p>
-            <a:pPr algn="ctr"/>
-            <a:r>
-              <a:rPr sz="1600">
-                <a:solidFill>
-                  <a:srgbClr val="232323"/>
-                </a:solidFill>
-                <a:latin typeface="Consolas"/>
-              </a:rPr>
-              <a:t>Klartext: HALLO
-      ↓ verschlüsseln
-Geheimtext: KDOOR
-      ↓ entschlüsseln
-Klartext: HALLO</a:t>
-            </a:r>
-          </a:p>
-        </p:txBody>
-      </p:sp>
-      <p:sp>
-        <p:nvSpPr>
-          <p:cNvPr id="6" name="TextBox 5"/>
-          <p:cNvSpPr txBox="1"/>
-          <p:nvPr/>
-        </p:nvSpPr>
-        <p:spPr>
-          <a:xfrm>
-            <a:off x="502920" y="6510528"/>
-            <a:ext cx="11064240" cy="182880"/>
-          </a:xfrm>
-          <a:prstGeom prst="rect">
-            <a:avLst/>
-          </a:prstGeom>
-          <a:noFill/>
-        </p:spPr>
-        <p:txBody>
-          <a:bodyPr wrap="none">
-            <a:spAutoFit/>
-          </a:bodyPr>
-          <a:lstStyle/>
-          <a:p>
-            <a:pPr algn="r"/>
-            <a:r>
-              <a:rPr sz="800">
-                <a:solidFill>
-                  <a:srgbClr val="646464"/>
-                </a:solidFill>
-              </a:rPr>
-              <a:t>Grafik: eigene Darstellung</a:t>
-            </a:r>
-          </a:p>
-        </p:txBody>
-      </p:sp>
-    </p:spTree>
-  </p:cSld>
-  <p:clrMapOvr>
-    <a:masterClrMapping/>
-  </p:clrMapOvr>
-</p:sld>
-</file>
-
-<file path=ppt/slides/slide4.xml><?xml version="1.0" encoding="utf-8"?>
-<p:sld xmlns:a="http://schemas.openxmlformats.org/drawingml/2006/main" xmlns:p="http://schemas.openxmlformats.org/presentationml/2006/main" xmlns:r="http://schemas.openxmlformats.org/officeDocument/2006/relationships">
-  <p:cSld>
-    <p:spTree>
-      <p:nvGrpSpPr>
-        <p:cNvPr id="1" name=""/>
-        <p:cNvGrpSpPr/>
-        <p:nvPr/>
-      </p:nvGrpSpPr>
-      <p:grpSpPr/>
-      <p:sp>
-        <p:nvSpPr>
-          <p:cNvPr id="2" name="Rectangle 1"/>
-          <p:cNvSpPr/>
-          <p:nvPr/>
-        </p:nvSpPr>
-        <p:spPr>
-          <a:xfrm>
-            <a:off x="0" y="0"/>
-            <a:ext cx="12191695" cy="100584"/>
-          </a:xfrm>
-          <a:prstGeom prst="rect">
-            <a:avLst/>
-          </a:prstGeom>
-          <a:solidFill>
-            <a:srgbClr val="4472C4"/>
-          </a:solidFill>
-          <a:ln>
-            <a:noFill/>
-          </a:ln>
-        </p:spPr>
-        <p:style>
-          <a:lnRef idx="1">
-            <a:schemeClr val="accent1"/>
-          </a:lnRef>
-          <a:fillRef idx="3">
-            <a:schemeClr val="accent1"/>
-          </a:fillRef>
-          <a:effectRef idx="2">
-            <a:schemeClr val="accent1"/>
-          </a:effectRef>
-          <a:fontRef idx="minor">
-            <a:schemeClr val="lt1"/>
-          </a:fontRef>
-        </p:style>
-        <p:txBody>
-          <a:bodyPr rtlCol="0" anchor="ctr"/>
-          <a:lstStyle/>
-          <a:p>
-            <a:pPr algn="ctr"/>
-          </a:p>
-        </p:txBody>
-      </p:sp>
-      <p:sp>
-        <p:nvSpPr>
-          <p:cNvPr id="3" name="TextBox 2"/>
-          <p:cNvSpPr txBox="1"/>
-          <p:nvPr/>
-        </p:nvSpPr>
-        <p:spPr>
-          <a:xfrm>
-            <a:off x="594360" y="320040"/>
-            <a:ext cx="10972800" cy="502920"/>
-          </a:xfrm>
-          <a:prstGeom prst="rect">
-            <a:avLst/>
-          </a:prstGeom>
-          <a:noFill/>
-        </p:spPr>
-        <p:txBody>
-          <a:bodyPr wrap="none">
-            <a:spAutoFit/>
-          </a:bodyPr>
-          <a:lstStyle/>
-          <a:p>
-            <a:r>
-              <a:rPr sz="2600" b="1">
-                <a:solidFill>
-                  <a:srgbClr val="1F374E"/>
-                </a:solidFill>
-              </a:rPr>
-              <a:t>Caesar-Verschlüsselung</a:t>
-            </a:r>
-          </a:p>
-        </p:txBody>
-      </p:sp>
-      <p:sp>
-        <p:nvSpPr>
-          <p:cNvPr id="4" name="TextBox 3"/>
-          <p:cNvSpPr txBox="1"/>
-          <p:nvPr/>
-        </p:nvSpPr>
-        <p:spPr>
-          <a:xfrm>
-            <a:off x="685800" y="1234440"/>
-            <a:ext cx="5303520" cy="4937760"/>
-          </a:xfrm>
-          <a:prstGeom prst="rect">
-            <a:avLst/>
-          </a:prstGeom>
-          <a:noFill/>
-        </p:spPr>
-        <p:txBody>
-          <a:bodyPr wrap="square">
-            <a:spAutoFit/>
-          </a:bodyPr>
-          <a:lstStyle/>
-          <a:p>
-            <a:pPr>
-              <a:spcAft>
-                <a:spcPts val="800"/>
-              </a:spcAft>
-              <a:defRPr sz="1900">
-                <a:solidFill>
-                  <a:srgbClr val="232323"/>
-                </a:solidFill>
-              </a:defRPr>
-            </a:pPr>
-            <a:r>
-              <a:t>Historisches Beispiel: Buchstaben werden um eine feste Zahl verschoben.</a:t>
-            </a:r>
-          </a:p>
-          <a:p>
-            <a:pPr>
-              <a:spcAft>
-                <a:spcPts val="800"/>
-              </a:spcAft>
-              <a:defRPr sz="1900">
-                <a:solidFill>
-                  <a:srgbClr val="232323"/>
-                </a:solidFill>
-              </a:defRPr>
-            </a:pPr>
-            <a:r>
-              <a:t>Schlüssel +3: A→D, B→E, C→F ...</a:t>
-            </a:r>
-          </a:p>
-          <a:p>
-            <a:pPr>
-              <a:spcAft>
-                <a:spcPts val="800"/>
-              </a:spcAft>
-              <a:defRPr sz="1900">
-                <a:solidFill>
-                  <a:srgbClr val="232323"/>
-                </a:solidFill>
-              </a:defRPr>
-            </a:pPr>
-            <a:r>
-              <a:t>HALLO → KDOOR</a:t>
-            </a:r>
-          </a:p>
-          <a:p>
-            <a:pPr>
-              <a:spcAft>
-                <a:spcPts val="800"/>
-              </a:spcAft>
-              <a:defRPr sz="1900">
-                <a:solidFill>
-                  <a:srgbClr val="232323"/>
-                </a:solidFill>
-              </a:defRPr>
-            </a:pPr>
-            <a:r>
-              <a:t>Heute nicht sicher – dient nur zum Verstehen der Grundidee.</a:t>
-            </a:r>
-          </a:p>
-        </p:txBody>
-      </p:sp>
-      <p:sp>
-        <p:nvSpPr>
-          <p:cNvPr id="5" name="Rectangle 4"/>
-          <p:cNvSpPr/>
-          <p:nvPr/>
-        </p:nvSpPr>
-        <p:spPr>
-          <a:xfrm>
-            <a:off x="6400800" y="1371600"/>
-            <a:ext cx="4754880" cy="3108960"/>
-          </a:xfrm>
-          <a:prstGeom prst="rect">
-            <a:avLst/>
-          </a:prstGeom>
-          <a:solidFill>
-            <a:srgbClr val="FAFAFA"/>
-          </a:solidFill>
-          <a:ln>
-            <a:solidFill>
-              <a:srgbClr val="646464"/>
-            </a:solidFill>
-          </a:ln>
-        </p:spPr>
-        <p:style>
-          <a:lnRef idx="1">
-            <a:schemeClr val="accent1"/>
-          </a:lnRef>
-          <a:fillRef idx="3">
-            <a:schemeClr val="accent1"/>
-          </a:fillRef>
-          <a:effectRef idx="2">
-            <a:schemeClr val="accent1"/>
-          </a:effectRef>
-          <a:fontRef idx="minor">
-            <a:schemeClr val="lt1"/>
-          </a:fontRef>
-        </p:style>
-        <p:txBody>
-          <a:bodyPr rtlCol="0" anchor="ctr" wrap="none"/>
-          <a:lstStyle/>
-          <a:p>
-            <a:pPr algn="ctr"/>
-            <a:r>
-              <a:rPr sz="1600">
-                <a:solidFill>
-                  <a:srgbClr val="232323"/>
-                </a:solidFill>
-                <a:latin typeface="Consolas"/>
-              </a:rPr>
-              <a:t>A B C D E F G ...
-D E F G H I J ...
-HALLO → KDOOR
-Schlüssel: +3</a:t>
-            </a:r>
-          </a:p>
-        </p:txBody>
-      </p:sp>
-      <p:sp>
-        <p:nvSpPr>
-          <p:cNvPr id="6" name="TextBox 5"/>
-          <p:cNvSpPr txBox="1"/>
-          <p:nvPr/>
-        </p:nvSpPr>
-        <p:spPr>
-          <a:xfrm>
-            <a:off x="502920" y="6510528"/>
-            <a:ext cx="11064240" cy="182880"/>
-          </a:xfrm>
-          <a:prstGeom prst="rect">
-            <a:avLst/>
-          </a:prstGeom>
-          <a:noFill/>
-        </p:spPr>
-        <p:txBody>
-          <a:bodyPr wrap="none">
-            <a:spAutoFit/>
-          </a:bodyPr>
-          <a:lstStyle/>
-          <a:p>
-            <a:pPr algn="r"/>
-            <a:r>
-              <a:rPr sz="800">
-                <a:solidFill>
-                  <a:srgbClr val="646464"/>
-                </a:solidFill>
-              </a:rPr>
-              <a:t>Grafik: eigene Darstellung</a:t>
-            </a:r>
-          </a:p>
-        </p:txBody>
-      </p:sp>
-    </p:spTree>
-  </p:cSld>
-  <p:clrMapOvr>
-    <a:masterClrMapping/>
-  </p:clrMapOvr>
-</p:sld>
-</file>
-
-<file path=ppt/slides/slide5.xml><?xml version="1.0" encoding="utf-8"?>
-<p:sld xmlns:a="http://schemas.openxmlformats.org/drawingml/2006/main" xmlns:p="http://schemas.openxmlformats.org/presentationml/2006/main" xmlns:r="http://schemas.openxmlformats.org/officeDocument/2006/relationships">
-  <p:cSld>
-    <p:spTree>
-      <p:nvGrpSpPr>
-        <p:cNvPr id="1" name=""/>
-        <p:cNvGrpSpPr/>
-        <p:nvPr/>
-      </p:nvGrpSpPr>
-      <p:grpSpPr/>
-      <p:sp>
-        <p:nvSpPr>
-          <p:cNvPr id="2" name="Rectangle 1"/>
-          <p:cNvSpPr/>
-          <p:nvPr/>
-        </p:nvSpPr>
-        <p:spPr>
-          <a:xfrm>
-            <a:off x="0" y="0"/>
-            <a:ext cx="12191695" cy="100584"/>
-          </a:xfrm>
-          <a:prstGeom prst="rect">
-            <a:avLst/>
-          </a:prstGeom>
-          <a:solidFill>
-            <a:srgbClr val="4472C4"/>
-          </a:solidFill>
-          <a:ln>
-            <a:noFill/>
-          </a:ln>
-        </p:spPr>
-        <p:style>
-          <a:lnRef idx="1">
-            <a:schemeClr val="accent1"/>
-          </a:lnRef>
-          <a:fillRef idx="3">
-            <a:schemeClr val="accent1"/>
-          </a:fillRef>
-          <a:effectRef idx="2">
-            <a:schemeClr val="accent1"/>
-          </a:effectRef>
-          <a:fontRef idx="minor">
-            <a:schemeClr val="lt1"/>
-          </a:fontRef>
-        </p:style>
-        <p:txBody>
-          <a:bodyPr rtlCol="0" anchor="ctr"/>
-          <a:lstStyle/>
-          <a:p>
-            <a:pPr algn="ctr"/>
-          </a:p>
-        </p:txBody>
-      </p:sp>
-      <p:sp>
-        <p:nvSpPr>
-          <p:cNvPr id="3" name="TextBox 2"/>
-          <p:cNvSpPr txBox="1"/>
-          <p:nvPr/>
-        </p:nvSpPr>
-        <p:spPr>
-          <a:xfrm>
-            <a:off x="594360" y="320040"/>
-            <a:ext cx="10972800" cy="502920"/>
-          </a:xfrm>
-          <a:prstGeom prst="rect">
-            <a:avLst/>
-          </a:prstGeom>
-          <a:noFill/>
-        </p:spPr>
-        <p:txBody>
-          <a:bodyPr wrap="none">
-            <a:spAutoFit/>
-          </a:bodyPr>
-          <a:lstStyle/>
-          <a:p>
-            <a:r>
-              <a:rPr sz="2600" b="1">
-                <a:solidFill>
-                  <a:srgbClr val="1F374E"/>
-                </a:solidFill>
-              </a:rPr>
-              <a:t>Symmetrische Verschlüsselung</a:t>
-            </a:r>
-          </a:p>
-        </p:txBody>
-      </p:sp>
-      <p:sp>
-        <p:nvSpPr>
-          <p:cNvPr id="4" name="TextBox 3"/>
-          <p:cNvSpPr txBox="1"/>
-          <p:nvPr/>
-        </p:nvSpPr>
-        <p:spPr>
-          <a:xfrm>
-            <a:off x="685800" y="1234440"/>
-            <a:ext cx="5303520" cy="4937760"/>
-          </a:xfrm>
-          <a:prstGeom prst="rect">
-            <a:avLst/>
-          </a:prstGeom>
-          <a:noFill/>
-        </p:spPr>
-        <p:txBody>
-          <a:bodyPr wrap="square">
-            <a:spAutoFit/>
-          </a:bodyPr>
-          <a:lstStyle/>
-          <a:p>
-            <a:pPr>
-              <a:spcAft>
-                <a:spcPts val="800"/>
-              </a:spcAft>
-              <a:defRPr sz="1900">
-                <a:solidFill>
-                  <a:srgbClr val="232323"/>
-                </a:solidFill>
-              </a:defRPr>
-            </a:pPr>
-            <a:r>
-              <a:t>Sender und Empfänger verwenden denselben geheimen Schlüssel.</a:t>
-            </a:r>
-          </a:p>
-          <a:p>
-            <a:pPr>
-              <a:spcAft>
-                <a:spcPts val="800"/>
-              </a:spcAft>
-              <a:defRPr sz="1900">
-                <a:solidFill>
-                  <a:srgbClr val="232323"/>
-                </a:solidFill>
-              </a:defRPr>
-            </a:pPr>
-            <a:r>
-              <a:t>Sie ist für große Datenmengen sehr effizient und schnell.</a:t>
-            </a:r>
-          </a:p>
-          <a:p>
-            <a:pPr>
-              <a:spcAft>
-                <a:spcPts val="800"/>
-              </a:spcAft>
-              <a:defRPr sz="1900">
-                <a:solidFill>
-                  <a:srgbClr val="232323"/>
-                </a:solidFill>
-              </a:defRPr>
-            </a:pPr>
-            <a:r>
-              <a:t>Problem: Wie gelangt der gemeinsame Schlüssel sicher zu beiden Seiten?</a:t>
-            </a:r>
-          </a:p>
-        </p:txBody>
-      </p:sp>
-      <p:sp>
-        <p:nvSpPr>
-          <p:cNvPr id="5" name="Rectangle 4"/>
-          <p:cNvSpPr/>
-          <p:nvPr/>
-        </p:nvSpPr>
-        <p:spPr>
-          <a:xfrm>
-            <a:off x="6400800" y="1463040"/>
-            <a:ext cx="4754880" cy="2560320"/>
-          </a:xfrm>
-          <a:prstGeom prst="rect">
-            <a:avLst/>
-          </a:prstGeom>
-          <a:solidFill>
-            <a:srgbClr val="FAFAFA"/>
-          </a:solidFill>
-          <a:ln>
-            <a:solidFill>
-              <a:srgbClr val="646464"/>
-            </a:solidFill>
-          </a:ln>
-        </p:spPr>
-        <p:style>
-          <a:lnRef idx="1">
-            <a:schemeClr val="accent1"/>
-          </a:lnRef>
-          <a:fillRef idx="3">
-            <a:schemeClr val="accent1"/>
-          </a:fillRef>
-          <a:effectRef idx="2">
-            <a:schemeClr val="accent1"/>
-          </a:effectRef>
-          <a:fontRef idx="minor">
-            <a:schemeClr val="lt1"/>
-          </a:fontRef>
-        </p:style>
-        <p:txBody>
-          <a:bodyPr rtlCol="0" anchor="ctr" wrap="none"/>
-          <a:lstStyle/>
-          <a:p>
-            <a:pPr algn="ctr"/>
-            <a:r>
-              <a:rPr sz="1600">
-                <a:solidFill>
-                  <a:srgbClr val="232323"/>
-                </a:solidFill>
-                <a:latin typeface="Consolas"/>
-              </a:rPr>
-              <a:t>Alice 🔑  ⇄  🔑 Bob
-gleicher geheimer Schlüssel
-→ schneller Datenverkehr</a:t>
-            </a:r>
-          </a:p>
-        </p:txBody>
-      </p:sp>
-      <p:sp>
-        <p:nvSpPr>
-          <p:cNvPr id="6" name="TextBox 5"/>
-          <p:cNvSpPr txBox="1"/>
-          <p:nvPr/>
-        </p:nvSpPr>
-        <p:spPr>
-          <a:xfrm>
-            <a:off x="502920" y="6510528"/>
-            <a:ext cx="11064240" cy="182880"/>
-          </a:xfrm>
-          <a:prstGeom prst="rect">
-            <a:avLst/>
-          </a:prstGeom>
-          <a:noFill/>
-        </p:spPr>
-        <p:txBody>
-          <a:bodyPr wrap="none">
-            <a:spAutoFit/>
-          </a:bodyPr>
-          <a:lstStyle/>
-          <a:p>
-            <a:pPr algn="r"/>
-            <a:r>
-              <a:rPr sz="800">
-                <a:solidFill>
-                  <a:srgbClr val="646464"/>
-                </a:solidFill>
-              </a:rPr>
-              <a:t>Grafik: eigene Darstellung</a:t>
-            </a:r>
-          </a:p>
-        </p:txBody>
-      </p:sp>
-    </p:spTree>
-  </p:cSld>
-  <p:clrMapOvr>
-    <a:masterClrMapping/>
-  </p:clrMapOvr>
-</p:sld>
-</file>
-
-<file path=ppt/slides/slide6.xml><?xml version="1.0" encoding="utf-8"?>
-<p:sld xmlns:a="http://schemas.openxmlformats.org/drawingml/2006/main" xmlns:p="http://schemas.openxmlformats.org/presentationml/2006/main" xmlns:r="http://schemas.openxmlformats.org/officeDocument/2006/relationships">
-  <p:cSld>
-    <p:spTree>
-      <p:nvGrpSpPr>
-        <p:cNvPr id="1" name=""/>
-        <p:cNvGrpSpPr/>
-        <p:nvPr/>
-      </p:nvGrpSpPr>
-      <p:grpSpPr/>
-      <p:sp>
-        <p:nvSpPr>
-          <p:cNvPr id="2" name="Rectangle 1"/>
-          <p:cNvSpPr/>
-          <p:nvPr/>
-        </p:nvSpPr>
-        <p:spPr>
-          <a:xfrm>
-            <a:off x="0" y="0"/>
-            <a:ext cx="12191695" cy="100584"/>
-          </a:xfrm>
-          <a:prstGeom prst="rect">
-            <a:avLst/>
-          </a:prstGeom>
-          <a:solidFill>
-            <a:srgbClr val="4472C4"/>
-          </a:solidFill>
-          <a:ln>
-            <a:noFill/>
-          </a:ln>
-        </p:spPr>
-        <p:style>
-          <a:lnRef idx="1">
-            <a:schemeClr val="accent1"/>
-          </a:lnRef>
-          <a:fillRef idx="3">
-            <a:schemeClr val="accent1"/>
-          </a:fillRef>
-          <a:effectRef idx="2">
-            <a:schemeClr val="accent1"/>
-          </a:effectRef>
-          <a:fontRef idx="minor">
-            <a:schemeClr val="lt1"/>
-          </a:fontRef>
-        </p:style>
-        <p:txBody>
-          <a:bodyPr rtlCol="0" anchor="ctr"/>
-          <a:lstStyle/>
-          <a:p>
-            <a:pPr algn="ctr"/>
-          </a:p>
-        </p:txBody>
-      </p:sp>
-      <p:sp>
-        <p:nvSpPr>
-          <p:cNvPr id="3" name="TextBox 2"/>
-          <p:cNvSpPr txBox="1"/>
-          <p:nvPr/>
-        </p:nvSpPr>
-        <p:spPr>
-          <a:xfrm>
-            <a:off x="594360" y="320040"/>
-            <a:ext cx="10972800" cy="502920"/>
-          </a:xfrm>
-          <a:prstGeom prst="rect">
-            <a:avLst/>
-          </a:prstGeom>
-          <a:noFill/>
-        </p:spPr>
-        <p:txBody>
-          <a:bodyPr wrap="none">
-            <a:spAutoFit/>
-          </a:bodyPr>
-          <a:lstStyle/>
-          <a:p>
-            <a:r>
-              <a:rPr sz="2600" b="1">
-                <a:solidFill>
-                  <a:srgbClr val="1F374E"/>
-                </a:solidFill>
-              </a:rPr>
-              <a:t>Asymmetrische Kryptografie</a:t>
-            </a:r>
-          </a:p>
-        </p:txBody>
-      </p:sp>
-      <p:sp>
-        <p:nvSpPr>
-          <p:cNvPr id="4" name="TextBox 3"/>
-          <p:cNvSpPr txBox="1"/>
-          <p:nvPr/>
-        </p:nvSpPr>
-        <p:spPr>
-          <a:xfrm>
-            <a:off x="685800" y="1234440"/>
-            <a:ext cx="5303520" cy="4937760"/>
-          </a:xfrm>
-          <a:prstGeom prst="rect">
-            <a:avLst/>
-          </a:prstGeom>
-          <a:noFill/>
-        </p:spPr>
-        <p:txBody>
-          <a:bodyPr wrap="square">
-            <a:spAutoFit/>
-          </a:bodyPr>
-          <a:lstStyle/>
-          <a:p>
-            <a:pPr>
-              <a:spcAft>
-                <a:spcPts val="800"/>
-              </a:spcAft>
-              <a:defRPr sz="1900">
-                <a:solidFill>
-                  <a:srgbClr val="232323"/>
-                </a:solidFill>
-              </a:defRPr>
-            </a:pPr>
-            <a:r>
-              <a:t>Es gibt zwei zusammengehörende Schlüssel.</a:t>
-            </a:r>
-          </a:p>
-          <a:p>
-            <a:pPr>
-              <a:spcAft>
-                <a:spcPts val="800"/>
-              </a:spcAft>
-              <a:defRPr sz="1900">
-                <a:solidFill>
-                  <a:srgbClr val="232323"/>
-                </a:solidFill>
-              </a:defRPr>
-            </a:pPr>
-            <a:r>
-              <a:t>Öffentlicher Schlüssel: darf bekannt sein.</a:t>
-            </a:r>
-          </a:p>
-          <a:p>
-            <a:pPr>
-              <a:spcAft>
-                <a:spcPts val="800"/>
-              </a:spcAft>
-              <a:defRPr sz="1900">
-                <a:solidFill>
-                  <a:srgbClr val="232323"/>
-                </a:solidFill>
-              </a:defRPr>
-            </a:pPr>
-            <a:r>
-              <a:t>Privater Schlüssel: bleibt geheim.</a:t>
-            </a:r>
-          </a:p>
-          <a:p>
-            <a:pPr>
-              <a:spcAft>
-                <a:spcPts val="800"/>
-              </a:spcAft>
-              <a:defRPr sz="1900">
-                <a:solidFill>
-                  <a:srgbClr val="232323"/>
-                </a:solidFill>
-              </a:defRPr>
-            </a:pPr>
-            <a:r>
-              <a:t>Damit lassen sich u. a. sichere Schlüsselaushandlung und digitale Signaturen ermöglichen.</a:t>
-            </a:r>
-          </a:p>
-        </p:txBody>
-      </p:sp>
-      <p:sp>
-        <p:nvSpPr>
-          <p:cNvPr id="5" name="Rectangle 4"/>
-          <p:cNvSpPr/>
-          <p:nvPr/>
-        </p:nvSpPr>
-        <p:spPr>
-          <a:xfrm>
-            <a:off x="6400800" y="1554480"/>
-            <a:ext cx="4754880" cy="2377440"/>
-          </a:xfrm>
-          <a:prstGeom prst="rect">
-            <a:avLst/>
-          </a:prstGeom>
-          <a:solidFill>
-            <a:srgbClr val="FAFAFA"/>
-          </a:solidFill>
-          <a:ln>
-            <a:solidFill>
-              <a:srgbClr val="646464"/>
-            </a:solidFill>
-          </a:ln>
-        </p:spPr>
-        <p:style>
-          <a:lnRef idx="1">
-            <a:schemeClr val="accent1"/>
-          </a:lnRef>
-          <a:fillRef idx="3">
-            <a:schemeClr val="accent1"/>
-          </a:fillRef>
-          <a:effectRef idx="2">
-            <a:schemeClr val="accent1"/>
-          </a:effectRef>
-          <a:fontRef idx="minor">
-            <a:schemeClr val="lt1"/>
-          </a:fontRef>
-        </p:style>
-        <p:txBody>
-          <a:bodyPr rtlCol="0" anchor="ctr" wrap="none"/>
-          <a:lstStyle/>
-          <a:p>
-            <a:pPr algn="ctr"/>
-            <a:r>
-              <a:rPr sz="1500">
-                <a:solidFill>
-                  <a:srgbClr val="232323"/>
-                </a:solidFill>
-                <a:latin typeface="Consolas"/>
-              </a:rPr>
-              <a:t>Öffentlicher Schlüssel → darf verteilt werden
-Privater Schlüssel    → bleibt geheim</a:t>
-            </a:r>
-          </a:p>
-        </p:txBody>
-      </p:sp>
-      <p:sp>
-        <p:nvSpPr>
-          <p:cNvPr id="6" name="TextBox 5"/>
-          <p:cNvSpPr txBox="1"/>
-          <p:nvPr/>
-        </p:nvSpPr>
-        <p:spPr>
-          <a:xfrm>
-            <a:off x="502920" y="6510528"/>
-            <a:ext cx="11064240" cy="182880"/>
-          </a:xfrm>
-          <a:prstGeom prst="rect">
-            <a:avLst/>
-          </a:prstGeom>
-          <a:noFill/>
-        </p:spPr>
-        <p:txBody>
-          <a:bodyPr wrap="none">
-            <a:spAutoFit/>
-          </a:bodyPr>
-          <a:lstStyle/>
-          <a:p>
-            <a:pPr algn="r"/>
-            <a:r>
-              <a:rPr sz="800">
-                <a:solidFill>
-                  <a:srgbClr val="646464"/>
-                </a:solidFill>
-              </a:rPr>
-              <a:t>Grafik: eigene Darstellung</a:t>
-            </a:r>
-          </a:p>
-        </p:txBody>
-      </p:sp>
-    </p:spTree>
-  </p:cSld>
-  <p:clrMapOvr>
-    <a:masterClrMapping/>
-  </p:clrMapOvr>
-</p:sld>
-</file>
-
-<file path=ppt/slides/slide7.xml><?xml version="1.0" encoding="utf-8"?>
-<p:sld xmlns:a="http://schemas.openxmlformats.org/drawingml/2006/main" xmlns:p="http://schemas.openxmlformats.org/presentationml/2006/main" xmlns:r="http://schemas.openxmlformats.org/officeDocument/2006/relationships">
-  <p:cSld>
-    <p:spTree>
-      <p:nvGrpSpPr>
-        <p:cNvPr id="1" name=""/>
-        <p:cNvGrpSpPr/>
-        <p:nvPr/>
-      </p:nvGrpSpPr>
-      <p:grpSpPr/>
-      <p:sp>
-        <p:nvSpPr>
-          <p:cNvPr id="2" name="Rectangle 1"/>
-          <p:cNvSpPr/>
-          <p:nvPr/>
-        </p:nvSpPr>
-        <p:spPr>
-          <a:xfrm>
-            <a:off x="0" y="0"/>
-            <a:ext cx="12191695" cy="100584"/>
-          </a:xfrm>
-          <a:prstGeom prst="rect">
-            <a:avLst/>
-          </a:prstGeom>
-          <a:solidFill>
-            <a:srgbClr val="4472C4"/>
-          </a:solidFill>
-          <a:ln>
-            <a:noFill/>
-          </a:ln>
-        </p:spPr>
-        <p:style>
-          <a:lnRef idx="1">
-            <a:schemeClr val="accent1"/>
-          </a:lnRef>
-          <a:fillRef idx="3">
-            <a:schemeClr val="accent1"/>
-          </a:fillRef>
-          <a:effectRef idx="2">
-            <a:schemeClr val="accent1"/>
-          </a:effectRef>
-          <a:fontRef idx="minor">
-            <a:schemeClr val="lt1"/>
-          </a:fontRef>
-        </p:style>
-        <p:txBody>
-          <a:bodyPr rtlCol="0" anchor="ctr"/>
-          <a:lstStyle/>
-          <a:p>
-            <a:pPr algn="ctr"/>
-          </a:p>
-        </p:txBody>
-      </p:sp>
-      <p:sp>
-        <p:nvSpPr>
-          <p:cNvPr id="3" name="TextBox 2"/>
-          <p:cNvSpPr txBox="1"/>
-          <p:nvPr/>
-        </p:nvSpPr>
-        <p:spPr>
-          <a:xfrm>
-            <a:off x="594360" y="320040"/>
-            <a:ext cx="10972800" cy="502920"/>
-          </a:xfrm>
-          <a:prstGeom prst="rect">
-            <a:avLst/>
-          </a:prstGeom>
-          <a:noFill/>
-        </p:spPr>
-        <p:txBody>
-          <a:bodyPr wrap="none">
-            <a:spAutoFit/>
-          </a:bodyPr>
-          <a:lstStyle/>
-          <a:p>
-            <a:r>
-              <a:rPr sz="2600" b="1">
-                <a:solidFill>
-                  <a:srgbClr val="1F374E"/>
-                </a:solidFill>
-              </a:rPr>
-              <a:t>RSA – Grundidee</a:t>
-            </a:r>
-          </a:p>
-        </p:txBody>
-      </p:sp>
-      <p:sp>
-        <p:nvSpPr>
-          <p:cNvPr id="4" name="TextBox 3"/>
-          <p:cNvSpPr txBox="1"/>
-          <p:nvPr/>
-        </p:nvSpPr>
-        <p:spPr>
-          <a:xfrm>
-            <a:off x="685800" y="1234440"/>
-            <a:ext cx="5303520" cy="4937760"/>
-          </a:xfrm>
-          <a:prstGeom prst="rect">
-            <a:avLst/>
-          </a:prstGeom>
-          <a:noFill/>
-        </p:spPr>
-        <p:txBody>
-          <a:bodyPr wrap="square">
-            <a:spAutoFit/>
-          </a:bodyPr>
-          <a:lstStyle/>
-          <a:p>
-            <a:pPr>
-              <a:spcAft>
-                <a:spcPts val="800"/>
-              </a:spcAft>
-              <a:defRPr sz="1900">
-                <a:solidFill>
-                  <a:srgbClr val="232323"/>
-                </a:solidFill>
-              </a:defRPr>
-            </a:pPr>
-            <a:r>
-              <a:t>RSA ist ein asymmetrisches Verfahren.</a:t>
-            </a:r>
-          </a:p>
-          <a:p>
-            <a:pPr>
-              <a:spcAft>
-                <a:spcPts val="800"/>
-              </a:spcAft>
-              <a:defRPr sz="1900">
-                <a:solidFill>
-                  <a:srgbClr val="232323"/>
-                </a:solidFill>
-              </a:defRPr>
-            </a:pPr>
-            <a:r>
-              <a:t>Es nutzt Eigenschaften großer Primzahlen und modularer Arithmetik.</a:t>
-            </a:r>
-          </a:p>
-          <a:p>
-            <a:pPr>
-              <a:spcAft>
-                <a:spcPts val="800"/>
-              </a:spcAft>
-              <a:defRPr sz="1900">
-                <a:solidFill>
-                  <a:srgbClr val="232323"/>
-                </a:solidFill>
-              </a:defRPr>
-            </a:pPr>
-            <a:r>
-              <a:t>Für den Unterricht rechnen wir absichtlich mit winzigen, unsicheren Zahlen.</a:t>
-            </a:r>
-          </a:p>
-        </p:txBody>
-      </p:sp>
-      <p:sp>
-        <p:nvSpPr>
-          <p:cNvPr id="5" name="Rectangle 4"/>
-          <p:cNvSpPr/>
-          <p:nvPr/>
-        </p:nvSpPr>
-        <p:spPr>
-          <a:xfrm>
-            <a:off x="6400800" y="1371600"/>
-            <a:ext cx="4754880" cy="2743200"/>
-          </a:xfrm>
-          <a:prstGeom prst="rect">
-            <a:avLst/>
-          </a:prstGeom>
-          <a:solidFill>
-            <a:srgbClr val="FAFAFA"/>
-          </a:solidFill>
-          <a:ln>
-            <a:solidFill>
-              <a:srgbClr val="646464"/>
-            </a:solidFill>
-          </a:ln>
-        </p:spPr>
-        <p:style>
-          <a:lnRef idx="1">
-            <a:schemeClr val="accent1"/>
-          </a:lnRef>
-          <a:fillRef idx="3">
-            <a:schemeClr val="accent1"/>
-          </a:fillRef>
-          <a:effectRef idx="2">
-            <a:schemeClr val="accent1"/>
-          </a:effectRef>
-          <a:fontRef idx="minor">
-            <a:schemeClr val="lt1"/>
-          </a:fontRef>
-        </p:style>
-        <p:txBody>
-          <a:bodyPr rtlCol="0" anchor="ctr" wrap="none"/>
-          <a:lstStyle/>
-          <a:p>
-            <a:pPr algn="ctr"/>
-            <a:r>
-              <a:rPr sz="1700">
-                <a:solidFill>
-                  <a:srgbClr val="232323"/>
-                </a:solidFill>
-                <a:latin typeface="Consolas"/>
-              </a:rPr>
-              <a:t>p = 5, q = 11
-n = p·q = 55
-φ(n) = (5−1)(11−1) = 40</a:t>
-            </a:r>
-          </a:p>
-        </p:txBody>
-      </p:sp>
-      <p:sp>
-        <p:nvSpPr>
-          <p:cNvPr id="6" name="TextBox 5"/>
-          <p:cNvSpPr txBox="1"/>
-          <p:nvPr/>
-        </p:nvSpPr>
-        <p:spPr>
-          <a:xfrm>
-            <a:off x="502920" y="6510528"/>
-            <a:ext cx="11064240" cy="182880"/>
-          </a:xfrm>
-          <a:prstGeom prst="rect">
-            <a:avLst/>
-          </a:prstGeom>
-          <a:noFill/>
-        </p:spPr>
-        <p:txBody>
-          <a:bodyPr wrap="none">
-            <a:spAutoFit/>
-          </a:bodyPr>
-          <a:lstStyle/>
-          <a:p>
-            <a:pPr algn="r"/>
-            <a:r>
-              <a:rPr sz="800">
-                <a:solidFill>
-                  <a:srgbClr val="646464"/>
-                </a:solidFill>
-              </a:rPr>
-              <a:t>Grafik: eigene Darstellung</a:t>
-            </a:r>
-          </a:p>
-        </p:txBody>
-      </p:sp>
-    </p:spTree>
-  </p:cSld>
-  <p:clrMapOvr>
-    <a:masterClrMapping/>
-  </p:clrMapOvr>
-</p:sld>
-</file>
-
-<file path=ppt/slides/slide8.xml><?xml version="1.0" encoding="utf-8"?>
-<p:sld xmlns:a="http://schemas.openxmlformats.org/drawingml/2006/main" xmlns:p="http://schemas.openxmlformats.org/presentationml/2006/main" xmlns:r="http://schemas.openxmlformats.org/officeDocument/2006/relationships">
-  <p:cSld>
-    <p:spTree>
-      <p:nvGrpSpPr>
-        <p:cNvPr id="1" name=""/>
-        <p:cNvGrpSpPr/>
-        <p:nvPr/>
-      </p:nvGrpSpPr>
-      <p:grpSpPr/>
-      <p:sp>
-        <p:nvSpPr>
-          <p:cNvPr id="2" name="Rectangle 1"/>
-          <p:cNvSpPr/>
-          <p:nvPr/>
-        </p:nvSpPr>
-        <p:spPr>
-          <a:xfrm>
-            <a:off x="0" y="0"/>
-            <a:ext cx="12191695" cy="100584"/>
-          </a:xfrm>
-          <a:prstGeom prst="rect">
-            <a:avLst/>
-          </a:prstGeom>
-          <a:solidFill>
-            <a:srgbClr val="4472C4"/>
-          </a:solidFill>
-          <a:ln>
-            <a:noFill/>
-          </a:ln>
-        </p:spPr>
-        <p:style>
-          <a:lnRef idx="1">
-            <a:schemeClr val="accent1"/>
-          </a:lnRef>
-          <a:fillRef idx="3">
-            <a:schemeClr val="accent1"/>
-          </a:fillRef>
-          <a:effectRef idx="2">
-            <a:schemeClr val="accent1"/>
-          </a:effectRef>
-          <a:fontRef idx="minor">
-            <a:schemeClr val="lt1"/>
-          </a:fontRef>
-        </p:style>
-        <p:txBody>
-          <a:bodyPr rtlCol="0" anchor="ctr"/>
-          <a:lstStyle/>
-          <a:p>
-            <a:pPr algn="ctr"/>
-          </a:p>
-        </p:txBody>
-      </p:sp>
-      <p:sp>
-        <p:nvSpPr>
-          <p:cNvPr id="3" name="TextBox 2"/>
-          <p:cNvSpPr txBox="1"/>
-          <p:nvPr/>
-        </p:nvSpPr>
-        <p:spPr>
-          <a:xfrm>
-            <a:off x="594360" y="320040"/>
-            <a:ext cx="10972800" cy="502920"/>
-          </a:xfrm>
-          <a:prstGeom prst="rect">
-            <a:avLst/>
-          </a:prstGeom>
-          <a:noFill/>
-        </p:spPr>
-        <p:txBody>
-          <a:bodyPr wrap="none">
-            <a:spAutoFit/>
-          </a:bodyPr>
-          <a:lstStyle/>
-          <a:p>
-            <a:r>
-              <a:rPr sz="2600" b="1">
-                <a:solidFill>
-                  <a:srgbClr val="1F374E"/>
-                </a:solidFill>
-              </a:rPr>
-              <a:t>RSA – Schlüssel berechnen</a:t>
-            </a:r>
-          </a:p>
-        </p:txBody>
-      </p:sp>
-      <p:sp>
-        <p:nvSpPr>
-          <p:cNvPr id="4" name="TextBox 3"/>
-          <p:cNvSpPr txBox="1"/>
-          <p:nvPr/>
-        </p:nvSpPr>
-        <p:spPr>
-          <a:xfrm>
-            <a:off x="685800" y="1234440"/>
-            <a:ext cx="5303520" cy="4937760"/>
-          </a:xfrm>
-          <a:prstGeom prst="rect">
-            <a:avLst/>
-          </a:prstGeom>
-          <a:noFill/>
-        </p:spPr>
-        <p:txBody>
-          <a:bodyPr wrap="square">
-            <a:spAutoFit/>
-          </a:bodyPr>
-          <a:lstStyle/>
-          <a:p>
-            <a:pPr>
-              <a:spcAft>
-                <a:spcPts val="800"/>
-              </a:spcAft>
-              <a:defRPr sz="1900">
-                <a:solidFill>
-                  <a:srgbClr val="232323"/>
-                </a:solidFill>
-              </a:defRPr>
-            </a:pPr>
-            <a:r>
-              <a:t>Wähle e so, dass e und φ(n) teilerfremd sind: e = 3.</a:t>
-            </a:r>
-          </a:p>
-          <a:p>
-            <a:pPr>
-              <a:spcAft>
-                <a:spcPts val="800"/>
-              </a:spcAft>
-              <a:defRPr sz="1900">
-                <a:solidFill>
-                  <a:srgbClr val="232323"/>
-                </a:solidFill>
-              </a:defRPr>
-            </a:pPr>
-            <a:r>
-              <a:t>Bestimme d mit e·d ≡ 1 (mod 40).</a:t>
-            </a:r>
-          </a:p>
-          <a:p>
-            <a:pPr>
-              <a:spcAft>
-                <a:spcPts val="800"/>
-              </a:spcAft>
-              <a:defRPr sz="1900">
-                <a:solidFill>
-                  <a:srgbClr val="232323"/>
-                </a:solidFill>
-              </a:defRPr>
-            </a:pPr>
-            <a:r>
-              <a:t>3·27 = 81 ≡ 1 (mod 40) → d = 27.</a:t>
-            </a:r>
-          </a:p>
-          <a:p>
-            <a:pPr>
-              <a:spcAft>
-                <a:spcPts val="800"/>
-              </a:spcAft>
-              <a:defRPr sz="1900">
-                <a:solidFill>
-                  <a:srgbClr val="232323"/>
-                </a:solidFill>
-              </a:defRPr>
-            </a:pPr>
-            <a:r>
-              <a:t>Öffentlich: (n=55, e=3) · Privat: d=27</a:t>
-            </a:r>
-          </a:p>
-        </p:txBody>
-      </p:sp>
-      <p:sp>
-        <p:nvSpPr>
-          <p:cNvPr id="5" name="Rectangle 4"/>
-          <p:cNvSpPr/>
-          <p:nvPr/>
-        </p:nvSpPr>
-        <p:spPr>
-          <a:xfrm>
-            <a:off x="6400800" y="1234440"/>
-            <a:ext cx="4846320" cy="3474720"/>
-          </a:xfrm>
-          <a:prstGeom prst="rect">
-            <a:avLst/>
-          </a:prstGeom>
-          <a:solidFill>
-            <a:srgbClr val="FAFAFA"/>
-          </a:solidFill>
-          <a:ln>
-            <a:solidFill>
-              <a:srgbClr val="646464"/>
-            </a:solidFill>
-          </a:ln>
-        </p:spPr>
-        <p:style>
-          <a:lnRef idx="1">
-            <a:schemeClr val="accent1"/>
-          </a:lnRef>
-          <a:fillRef idx="3">
-            <a:schemeClr val="accent1"/>
-          </a:fillRef>
-          <a:effectRef idx="2">
-            <a:schemeClr val="accent1"/>
-          </a:effectRef>
-          <a:fontRef idx="minor">
-            <a:schemeClr val="lt1"/>
-          </a:fontRef>
-        </p:style>
-        <p:txBody>
-          <a:bodyPr rtlCol="0" anchor="ctr" wrap="none"/>
-          <a:lstStyle/>
-          <a:p>
-            <a:pPr algn="ctr"/>
-            <a:r>
-              <a:rPr sz="1600">
-                <a:solidFill>
-                  <a:srgbClr val="232323"/>
-                </a:solidFill>
-                <a:latin typeface="Consolas"/>
-              </a:rPr>
-              <a:t>φ(n)=40
-e=3
-3·d ≡ 1 mod 40
-d=27, denn 3·27=81=2·40+1</a:t>
-            </a:r>
-          </a:p>
-        </p:txBody>
-      </p:sp>
-      <p:sp>
-        <p:nvSpPr>
-          <p:cNvPr id="6" name="TextBox 5"/>
-          <p:cNvSpPr txBox="1"/>
-          <p:nvPr/>
-        </p:nvSpPr>
-        <p:spPr>
-          <a:xfrm>
-            <a:off x="502920" y="6510528"/>
-            <a:ext cx="11064240" cy="182880"/>
-          </a:xfrm>
-          <a:prstGeom prst="rect">
-            <a:avLst/>
-          </a:prstGeom>
-          <a:noFill/>
-        </p:spPr>
-        <p:txBody>
-          <a:bodyPr wrap="none">
-            <a:spAutoFit/>
-          </a:bodyPr>
-          <a:lstStyle/>
-          <a:p>
-            <a:pPr algn="r"/>
-            <a:r>
-              <a:rPr sz="800">
-                <a:solidFill>
-                  <a:srgbClr val="646464"/>
-                </a:solidFill>
-              </a:rPr>
-              <a:t>Grafik: eigene Darstellung</a:t>
-            </a:r>
-          </a:p>
-        </p:txBody>
-      </p:sp>
-    </p:spTree>
-  </p:cSld>
-  <p:clrMapOvr>
-    <a:masterClrMapping/>
-  </p:clrMapOvr>
-</p:sld>
-</file>
-
-<file path=ppt/slides/slide9.xml><?xml version="1.0" encoding="utf-8"?>
-<p:sld xmlns:a="http://schemas.openxmlformats.org/drawingml/2006/main" xmlns:p="http://schemas.openxmlformats.org/presentationml/2006/main" xmlns:r="http://schemas.openxmlformats.org/officeDocument/2006/relationships">
-  <p:cSld>
-    <p:spTree>
-      <p:nvGrpSpPr>
-        <p:cNvPr id="1" name=""/>
-        <p:cNvGrpSpPr/>
-        <p:nvPr/>
-      </p:nvGrpSpPr>
-      <p:grpSpPr/>
-      <p:sp>
-        <p:nvSpPr>
-          <p:cNvPr id="2" name="Rectangle 1"/>
-          <p:cNvSpPr/>
-          <p:nvPr/>
-        </p:nvSpPr>
-        <p:spPr>
-          <a:xfrm>
-            <a:off x="0" y="0"/>
-            <a:ext cx="12191695" cy="100584"/>
-          </a:xfrm>
-          <a:prstGeom prst="rect">
-            <a:avLst/>
-          </a:prstGeom>
-          <a:solidFill>
-            <a:srgbClr val="4472C4"/>
-          </a:solidFill>
-          <a:ln>
-            <a:noFill/>
-          </a:ln>
-        </p:spPr>
-        <p:style>
-          <a:lnRef idx="1">
-            <a:schemeClr val="accent1"/>
-          </a:lnRef>
-          <a:fillRef idx="3">
-            <a:schemeClr val="accent1"/>
-          </a:fillRef>
-          <a:effectRef idx="2">
-            <a:schemeClr val="accent1"/>
-          </a:effectRef>
-          <a:fontRef idx="minor">
-            <a:schemeClr val="lt1"/>
-          </a:fontRef>
-        </p:style>
-        <p:txBody>
-          <a:bodyPr rtlCol="0" anchor="ctr"/>
-          <a:lstStyle/>
-          <a:p>
-            <a:pPr algn="ctr"/>
-          </a:p>
-        </p:txBody>
-      </p:sp>
-      <p:sp>
-        <p:nvSpPr>
-          <p:cNvPr id="3" name="TextBox 2"/>
-          <p:cNvSpPr txBox="1"/>
-          <p:nvPr/>
-        </p:nvSpPr>
-        <p:spPr>
-          <a:xfrm>
-            <a:off x="594360" y="320040"/>
-            <a:ext cx="10972800" cy="502920"/>
-          </a:xfrm>
-          <a:prstGeom prst="rect">
-            <a:avLst/>
-          </a:prstGeom>
-          <a:noFill/>
-        </p:spPr>
-        <p:txBody>
-          <a:bodyPr wrap="none">
-            <a:spAutoFit/>
-          </a:bodyPr>
-          <a:lstStyle/>
-          <a:p>
-            <a:r>
-              <a:rPr sz="2600" b="1">
-                <a:solidFill>
-                  <a:srgbClr val="1F374E"/>
-                </a:solidFill>
-              </a:rPr>
-              <a:t>RSA – Beispiel verschlüsseln</a:t>
-            </a:r>
-          </a:p>
-        </p:txBody>
-      </p:sp>
-      <p:sp>
-        <p:nvSpPr>
-          <p:cNvPr id="4" name="TextBox 3"/>
-          <p:cNvSpPr txBox="1"/>
-          <p:nvPr/>
-        </p:nvSpPr>
-        <p:spPr>
-          <a:xfrm>
-            <a:off x="685800" y="1234440"/>
-            <a:ext cx="5303520" cy="4937760"/>
-          </a:xfrm>
-          <a:prstGeom prst="rect">
-            <a:avLst/>
-          </a:prstGeom>
-          <a:noFill/>
-        </p:spPr>
-        <p:txBody>
-          <a:bodyPr wrap="square">
-            <a:spAutoFit/>
-          </a:bodyPr>
-          <a:lstStyle/>
-          <a:p>
-            <a:pPr>
-              <a:spcAft>
-                <a:spcPts val="800"/>
-              </a:spcAft>
-              <a:defRPr sz="1900">
-                <a:solidFill>
-                  <a:srgbClr val="232323"/>
-                </a:solidFill>
-              </a:defRPr>
-            </a:pPr>
-            <a:r>
-              <a:t>Nachricht als Zahl: m = 7</a:t>
-            </a:r>
-          </a:p>
-          <a:p>
-            <a:pPr>
-              <a:spcAft>
-                <a:spcPts val="800"/>
-              </a:spcAft>
-              <a:defRPr sz="1900">
-                <a:solidFill>
-                  <a:srgbClr val="232323"/>
-                </a:solidFill>
-              </a:defRPr>
-            </a:pPr>
-            <a:r>
-              <a:t>Verschlüsselung: c = m^e mod n</a:t>
-            </a:r>
-          </a:p>
-          <a:p>
-            <a:pPr>
-              <a:spcAft>
-                <a:spcPts val="800"/>
-              </a:spcAft>
-              <a:defRPr sz="1900">
-                <a:solidFill>
-                  <a:srgbClr val="232323"/>
-                </a:solidFill>
-              </a:defRPr>
-            </a:pPr>
-            <a:r>
-              <a:t>c = 7³ mod 55 = 343 mod 55 = 13</a:t>
-            </a:r>
-          </a:p>
-          <a:p>
-            <a:pPr>
-              <a:spcAft>
-                <a:spcPts val="800"/>
-              </a:spcAft>
-              <a:defRPr sz="1900">
-                <a:solidFill>
-                  <a:srgbClr val="232323"/>
-                </a:solidFill>
-              </a:defRPr>
-            </a:pPr>
-            <a:r>
-              <a:t>Geheimtext: c = 13</a:t>
-            </a:r>
-          </a:p>
-        </p:txBody>
-      </p:sp>
-      <p:sp>
-        <p:nvSpPr>
-          <p:cNvPr id="5" name="Rectangle 4"/>
-          <p:cNvSpPr/>
-          <p:nvPr/>
-        </p:nvSpPr>
-        <p:spPr>
-          <a:xfrm>
-            <a:off x="6400800" y="1371600"/>
-            <a:ext cx="4754880" cy="2926080"/>
-          </a:xfrm>
-          <a:prstGeom prst="rect">
-            <a:avLst/>
-          </a:prstGeom>
-          <a:solidFill>
-            <a:srgbClr val="FAFAFA"/>
-          </a:solidFill>
-          <a:ln>
-            <a:solidFill>
-              <a:srgbClr val="646464"/>
-            </a:solidFill>
-          </a:ln>
-        </p:spPr>
-        <p:style>
-          <a:lnRef idx="1">
-            <a:schemeClr val="accent1"/>
-          </a:lnRef>
-          <a:fillRef idx="3">
-            <a:schemeClr val="accent1"/>
-          </a:fillRef>
-          <a:effectRef idx="2">
-            <a:schemeClr val="accent1"/>
-          </a:effectRef>
-          <a:fontRef idx="minor">
-            <a:schemeClr val="lt1"/>
-          </a:fontRef>
-        </p:style>
-        <p:txBody>
-          <a:bodyPr rtlCol="0" anchor="ctr" wrap="none"/>
-          <a:lstStyle/>
-          <a:p>
-            <a:pPr algn="ctr"/>
-            <a:r>
-              <a:rPr sz="1800">
-                <a:solidFill>
-                  <a:srgbClr val="232323"/>
-                </a:solidFill>
-                <a:latin typeface="Consolas"/>
-              </a:rPr>
-              <a:t>m = 7
-c = 7³ mod 55
-c = 343 mod 55
-c = 13</a:t>
-            </a:r>
-          </a:p>
-        </p:txBody>
-      </p:sp>
-      <p:sp>
-        <p:nvSpPr>
-          <p:cNvPr id="6" name="TextBox 5"/>
-          <p:cNvSpPr txBox="1"/>
-          <p:nvPr/>
-        </p:nvSpPr>
-        <p:spPr>
-          <a:xfrm>
-            <a:off x="502920" y="6510528"/>
-            <a:ext cx="11064240" cy="182880"/>
-          </a:xfrm>
-          <a:prstGeom prst="rect">
-            <a:avLst/>
-          </a:prstGeom>
-          <a:noFill/>
-        </p:spPr>
-        <p:txBody>
-          <a:bodyPr wrap="none">
-            <a:spAutoFit/>
-          </a:bodyPr>
-          <a:lstStyle/>
-          <a:p>
-            <a:pPr algn="r"/>
-            <a:r>
-              <a:rPr sz="800">
-                <a:solidFill>
-                  <a:srgbClr val="646464"/>
-                </a:solidFill>
-              </a:rPr>
-              <a:t>Grafik: eigene Darstellung</a:t>
+              <a:t>Quellenangaben · Grafiken: eigene Darstellung</a:t>
             </a:r>
           </a:p>
         </p:txBody>

--- a/Ausgabe/Klasse_8/04_Netzwerke_in_der_Informatik/05_Praesentationen/Zusatz_Kryptografie.pptx
+++ b/Ausgabe/Klasse_8/04_Netzwerke_in_der_Informatik/05_Praesentationen/Zusatz_Kryptografie.pptx
@@ -13,6 +13,13 @@
     <p:sldId id="261" r:id="rId13"/>
     <p:sldId id="262" r:id="rId14"/>
     <p:sldId id="263" r:id="rId15"/>
+    <p:sldId id="264" r:id="rId16"/>
+    <p:sldId id="265" r:id="rId17"/>
+    <p:sldId id="266" r:id="rId18"/>
+    <p:sldId id="267" r:id="rId19"/>
+    <p:sldId id="268" r:id="rId20"/>
+    <p:sldId id="269" r:id="rId21"/>
+    <p:sldId id="270" r:id="rId22"/>
   </p:sldIdLst>
   <p:sldSz cx="12191695" cy="6858000" type="screen4x3"/>
   <p:notesSz cx="6858000" cy="9144000"/>
@@ -509,7 +516,427 @@
           <a:lstStyle/>
           <a:p>
             <a:r>
-              <a:t>Optionale Zusatzpräsentation. Quellen: https://www.bsi.bund.de · https://www.rfc-editor.org/rfc/rfc8446</a:t>
+              <a:t>Fachliche Orientierung: https://www.bsi.bund.de · TLS 1.3: https://www.rfc-editor.org/rfc/rfc8446</a:t>
+            </a:r>
+          </a:p>
+        </p:txBody>
+      </p:sp>
+      <p:sp>
+        <p:nvSpPr>
+          <p:cNvPr id="4" name="Slide Number Placeholder 3"/>
+          <p:cNvSpPr>
+            <a:spLocks noGrp="1"/>
+          </p:cNvSpPr>
+          <p:nvPr>
+            <p:ph type="sldNum" idx="5" sz="quarter"/>
+          </p:nvPr>
+        </p:nvSpPr>
+        <p:spPr/>
+      </p:sp>
+    </p:spTree>
+  </p:cSld>
+  <p:clrMapOvr>
+    <a:masterClrMapping/>
+  </p:clrMapOvr>
+</p:notes>
+</file>
+
+<file path=ppt/notesSlides/notesSlide10.xml><?xml version="1.0" encoding="utf-8"?>
+<p:notes xmlns:a="http://schemas.openxmlformats.org/drawingml/2006/main" xmlns:p="http://schemas.openxmlformats.org/presentationml/2006/main" xmlns:r="http://schemas.openxmlformats.org/officeDocument/2006/relationships">
+  <p:cSld>
+    <p:spTree>
+      <p:nvGrpSpPr>
+        <p:cNvPr id="1" name=""/>
+        <p:cNvGrpSpPr/>
+        <p:nvPr/>
+      </p:nvGrpSpPr>
+      <p:grpSpPr>
+        <a:xfrm>
+          <a:off x="0" y="0"/>
+          <a:ext cx="0" cy="0"/>
+          <a:chOff x="0" y="0"/>
+          <a:chExt cx="0" cy="0"/>
+        </a:xfrm>
+      </p:grpSpPr>
+      <p:sp>
+        <p:nvSpPr>
+          <p:cNvPr id="2" name="Slide Image Placeholder 1"/>
+          <p:cNvSpPr>
+            <a:spLocks noGrp="1"/>
+          </p:cNvSpPr>
+          <p:nvPr>
+            <p:ph type="sldImg" idx="2"/>
+          </p:nvPr>
+        </p:nvSpPr>
+        <p:spPr/>
+      </p:sp>
+      <p:sp>
+        <p:nvSpPr>
+          <p:cNvPr id="3" name="Notes Placeholder 2"/>
+          <p:cNvSpPr>
+            <a:spLocks noGrp="1"/>
+          </p:cNvSpPr>
+          <p:nvPr>
+            <p:ph type="body" idx="3" sz="quarter"/>
+          </p:nvPr>
+        </p:nvSpPr>
+        <p:spPr/>
+        <p:txBody>
+          <a:bodyPr/>
+          <a:lstStyle/>
+          <a:p>
+            <a:r>
+              <a:t>Die große Potenz nicht von Hand vollständig ausmultiplizieren; modulare Potenzierung erklären oder Rechner nutzen. Ziel ist das Prinzip.</a:t>
+            </a:r>
+          </a:p>
+        </p:txBody>
+      </p:sp>
+      <p:sp>
+        <p:nvSpPr>
+          <p:cNvPr id="4" name="Slide Number Placeholder 3"/>
+          <p:cNvSpPr>
+            <a:spLocks noGrp="1"/>
+          </p:cNvSpPr>
+          <p:nvPr>
+            <p:ph type="sldNum" idx="5" sz="quarter"/>
+          </p:nvPr>
+        </p:nvSpPr>
+        <p:spPr/>
+      </p:sp>
+    </p:spTree>
+  </p:cSld>
+  <p:clrMapOvr>
+    <a:masterClrMapping/>
+  </p:clrMapOvr>
+</p:notes>
+</file>
+
+<file path=ppt/notesSlides/notesSlide11.xml><?xml version="1.0" encoding="utf-8"?>
+<p:notes xmlns:a="http://schemas.openxmlformats.org/drawingml/2006/main" xmlns:p="http://schemas.openxmlformats.org/presentationml/2006/main" xmlns:r="http://schemas.openxmlformats.org/officeDocument/2006/relationships">
+  <p:cSld>
+    <p:spTree>
+      <p:nvGrpSpPr>
+        <p:cNvPr id="1" name=""/>
+        <p:cNvGrpSpPr/>
+        <p:nvPr/>
+      </p:nvGrpSpPr>
+      <p:grpSpPr>
+        <a:xfrm>
+          <a:off x="0" y="0"/>
+          <a:ext cx="0" cy="0"/>
+          <a:chOff x="0" y="0"/>
+          <a:chExt cx="0" cy="0"/>
+        </a:xfrm>
+      </p:grpSpPr>
+      <p:sp>
+        <p:nvSpPr>
+          <p:cNvPr id="2" name="Slide Image Placeholder 1"/>
+          <p:cNvSpPr>
+            <a:spLocks noGrp="1"/>
+          </p:cNvSpPr>
+          <p:nvPr>
+            <p:ph type="sldImg" idx="2"/>
+          </p:nvPr>
+        </p:nvSpPr>
+        <p:spPr/>
+      </p:sp>
+      <p:sp>
+        <p:nvSpPr>
+          <p:cNvPr id="3" name="Notes Placeholder 2"/>
+          <p:cNvSpPr>
+            <a:spLocks noGrp="1"/>
+          </p:cNvSpPr>
+          <p:nvPr>
+            <p:ph type="body" idx="3" sz="quarter"/>
+          </p:nvPr>
+        </p:nvSpPr>
+        <p:spPr/>
+        <p:txBody>
+          <a:bodyPr/>
+          <a:lstStyle/>
+          <a:p>
+            <a:r>
+              <a:t>Begriffe konzeptionell trennen. Keine unnötige mathematische Vertiefung.</a:t>
+            </a:r>
+          </a:p>
+        </p:txBody>
+      </p:sp>
+      <p:sp>
+        <p:nvSpPr>
+          <p:cNvPr id="4" name="Slide Number Placeholder 3"/>
+          <p:cNvSpPr>
+            <a:spLocks noGrp="1"/>
+          </p:cNvSpPr>
+          <p:nvPr>
+            <p:ph type="sldNum" idx="5" sz="quarter"/>
+          </p:nvPr>
+        </p:nvSpPr>
+        <p:spPr/>
+      </p:sp>
+    </p:spTree>
+  </p:cSld>
+  <p:clrMapOvr>
+    <a:masterClrMapping/>
+  </p:clrMapOvr>
+</p:notes>
+</file>
+
+<file path=ppt/notesSlides/notesSlide12.xml><?xml version="1.0" encoding="utf-8"?>
+<p:notes xmlns:a="http://schemas.openxmlformats.org/drawingml/2006/main" xmlns:p="http://schemas.openxmlformats.org/presentationml/2006/main" xmlns:r="http://schemas.openxmlformats.org/officeDocument/2006/relationships">
+  <p:cSld>
+    <p:spTree>
+      <p:nvGrpSpPr>
+        <p:cNvPr id="1" name=""/>
+        <p:cNvGrpSpPr/>
+        <p:nvPr/>
+      </p:nvGrpSpPr>
+      <p:grpSpPr>
+        <a:xfrm>
+          <a:off x="0" y="0"/>
+          <a:ext cx="0" cy="0"/>
+          <a:chOff x="0" y="0"/>
+          <a:chExt cx="0" cy="0"/>
+        </a:xfrm>
+      </p:grpSpPr>
+      <p:sp>
+        <p:nvSpPr>
+          <p:cNvPr id="2" name="Slide Image Placeholder 1"/>
+          <p:cNvSpPr>
+            <a:spLocks noGrp="1"/>
+          </p:cNvSpPr>
+          <p:nvPr>
+            <p:ph type="sldImg" idx="2"/>
+          </p:nvPr>
+        </p:nvSpPr>
+        <p:spPr/>
+      </p:sp>
+      <p:sp>
+        <p:nvSpPr>
+          <p:cNvPr id="3" name="Notes Placeholder 2"/>
+          <p:cNvSpPr>
+            <a:spLocks noGrp="1"/>
+          </p:cNvSpPr>
+          <p:nvPr>
+            <p:ph type="body" idx="3" sz="quarter"/>
+          </p:nvPr>
+        </p:nvSpPr>
+        <p:spPr/>
+        <p:txBody>
+          <a:bodyPr/>
+          <a:lstStyle/>
+          <a:p>
+            <a:r>
+              <a:t>Alltagsbezug Browser. Umgangssprachlich wird noch 'SSL' gesagt, technisch moderne HTTPS-Verbindungen verwenden TLS.</a:t>
+            </a:r>
+          </a:p>
+        </p:txBody>
+      </p:sp>
+      <p:sp>
+        <p:nvSpPr>
+          <p:cNvPr id="4" name="Slide Number Placeholder 3"/>
+          <p:cNvSpPr>
+            <a:spLocks noGrp="1"/>
+          </p:cNvSpPr>
+          <p:nvPr>
+            <p:ph type="sldNum" idx="5" sz="quarter"/>
+          </p:nvPr>
+        </p:nvSpPr>
+        <p:spPr/>
+      </p:sp>
+    </p:spTree>
+  </p:cSld>
+  <p:clrMapOvr>
+    <a:masterClrMapping/>
+  </p:clrMapOvr>
+</p:notes>
+</file>
+
+<file path=ppt/notesSlides/notesSlide13.xml><?xml version="1.0" encoding="utf-8"?>
+<p:notes xmlns:a="http://schemas.openxmlformats.org/drawingml/2006/main" xmlns:p="http://schemas.openxmlformats.org/presentationml/2006/main" xmlns:r="http://schemas.openxmlformats.org/officeDocument/2006/relationships">
+  <p:cSld>
+    <p:spTree>
+      <p:nvGrpSpPr>
+        <p:cNvPr id="1" name=""/>
+        <p:cNvGrpSpPr/>
+        <p:nvPr/>
+      </p:nvGrpSpPr>
+      <p:grpSpPr>
+        <a:xfrm>
+          <a:off x="0" y="0"/>
+          <a:ext cx="0" cy="0"/>
+          <a:chOff x="0" y="0"/>
+          <a:chExt cx="0" cy="0"/>
+        </a:xfrm>
+      </p:grpSpPr>
+      <p:sp>
+        <p:nvSpPr>
+          <p:cNvPr id="2" name="Slide Image Placeholder 1"/>
+          <p:cNvSpPr>
+            <a:spLocks noGrp="1"/>
+          </p:cNvSpPr>
+          <p:nvPr>
+            <p:ph type="sldImg" idx="2"/>
+          </p:nvPr>
+        </p:nvSpPr>
+        <p:spPr/>
+      </p:sp>
+      <p:sp>
+        <p:nvSpPr>
+          <p:cNvPr id="3" name="Notes Placeholder 2"/>
+          <p:cNvSpPr>
+            <a:spLocks noGrp="1"/>
+          </p:cNvSpPr>
+          <p:nvPr>
+            <p:ph type="body" idx="3" sz="quarter"/>
+          </p:nvPr>
+        </p:nvSpPr>
+        <p:spPr/>
+        <p:txBody>
+          <a:bodyPr/>
+          <a:lstStyle/>
+          <a:p>
+            <a:r>
+              <a:t>Fachliche Präzisierung: Modernes TLS 1.3 nutzt typischerweise (EC)DHE für Schlüsselaushandlung und Public-Key-Signaturen für Authentisierung; Nutzdaten werden anschließend symmetrisch geschützt. Nicht vereinfachend behaupten, RSA verschlüssele den gesamten HTTPS-Datenstrom.</a:t>
+            </a:r>
+          </a:p>
+        </p:txBody>
+      </p:sp>
+      <p:sp>
+        <p:nvSpPr>
+          <p:cNvPr id="4" name="Slide Number Placeholder 3"/>
+          <p:cNvSpPr>
+            <a:spLocks noGrp="1"/>
+          </p:cNvSpPr>
+          <p:nvPr>
+            <p:ph type="sldNum" idx="5" sz="quarter"/>
+          </p:nvPr>
+        </p:nvSpPr>
+        <p:spPr/>
+      </p:sp>
+    </p:spTree>
+  </p:cSld>
+  <p:clrMapOvr>
+    <a:masterClrMapping/>
+  </p:clrMapOvr>
+</p:notes>
+</file>
+
+<file path=ppt/notesSlides/notesSlide14.xml><?xml version="1.0" encoding="utf-8"?>
+<p:notes xmlns:a="http://schemas.openxmlformats.org/drawingml/2006/main" xmlns:p="http://schemas.openxmlformats.org/presentationml/2006/main" xmlns:r="http://schemas.openxmlformats.org/officeDocument/2006/relationships">
+  <p:cSld>
+    <p:spTree>
+      <p:nvGrpSpPr>
+        <p:cNvPr id="1" name=""/>
+        <p:cNvGrpSpPr/>
+        <p:nvPr/>
+      </p:nvGrpSpPr>
+      <p:grpSpPr>
+        <a:xfrm>
+          <a:off x="0" y="0"/>
+          <a:ext cx="0" cy="0"/>
+          <a:chOff x="0" y="0"/>
+          <a:chExt cx="0" cy="0"/>
+        </a:xfrm>
+      </p:grpSpPr>
+      <p:sp>
+        <p:nvSpPr>
+          <p:cNvPr id="2" name="Slide Image Placeholder 1"/>
+          <p:cNvSpPr>
+            <a:spLocks noGrp="1"/>
+          </p:cNvSpPr>
+          <p:nvPr>
+            <p:ph type="sldImg" idx="2"/>
+          </p:nvPr>
+        </p:nvSpPr>
+        <p:spPr/>
+      </p:sp>
+      <p:sp>
+        <p:nvSpPr>
+          <p:cNvPr id="3" name="Notes Placeholder 2"/>
+          <p:cNvSpPr>
+            <a:spLocks noGrp="1"/>
+          </p:cNvSpPr>
+          <p:nvPr>
+            <p:ph type="body" idx="3" sz="quarter"/>
+          </p:nvPr>
+        </p:nvSpPr>
+        <p:spPr/>
+        <p:txBody>
+          <a:bodyPr/>
+          <a:lstStyle/>
+          <a:p>
+            <a:r>
+              <a:t>Optionaler Kompetenzcheck. Je nach Lerngruppe RSA-Rechnung weglassen oder als mathematische Vertiefung nutzen.</a:t>
+            </a:r>
+          </a:p>
+        </p:txBody>
+      </p:sp>
+      <p:sp>
+        <p:nvSpPr>
+          <p:cNvPr id="4" name="Slide Number Placeholder 3"/>
+          <p:cNvSpPr>
+            <a:spLocks noGrp="1"/>
+          </p:cNvSpPr>
+          <p:nvPr>
+            <p:ph type="sldNum" idx="5" sz="quarter"/>
+          </p:nvPr>
+        </p:nvSpPr>
+        <p:spPr/>
+      </p:sp>
+    </p:spTree>
+  </p:cSld>
+  <p:clrMapOvr>
+    <a:masterClrMapping/>
+  </p:clrMapOvr>
+</p:notes>
+</file>
+
+<file path=ppt/notesSlides/notesSlide15.xml><?xml version="1.0" encoding="utf-8"?>
+<p:notes xmlns:a="http://schemas.openxmlformats.org/drawingml/2006/main" xmlns:p="http://schemas.openxmlformats.org/presentationml/2006/main" xmlns:r="http://schemas.openxmlformats.org/officeDocument/2006/relationships">
+  <p:cSld>
+    <p:spTree>
+      <p:nvGrpSpPr>
+        <p:cNvPr id="1" name=""/>
+        <p:cNvGrpSpPr/>
+        <p:nvPr/>
+      </p:nvGrpSpPr>
+      <p:grpSpPr>
+        <a:xfrm>
+          <a:off x="0" y="0"/>
+          <a:ext cx="0" cy="0"/>
+          <a:chOff x="0" y="0"/>
+          <a:chExt cx="0" cy="0"/>
+        </a:xfrm>
+      </p:grpSpPr>
+      <p:sp>
+        <p:nvSpPr>
+          <p:cNvPr id="2" name="Slide Image Placeholder 1"/>
+          <p:cNvSpPr>
+            <a:spLocks noGrp="1"/>
+          </p:cNvSpPr>
+          <p:nvPr>
+            <p:ph type="sldImg" idx="2"/>
+          </p:nvPr>
+        </p:nvSpPr>
+        <p:spPr/>
+      </p:sp>
+      <p:sp>
+        <p:nvSpPr>
+          <p:cNvPr id="3" name="Notes Placeholder 2"/>
+          <p:cNvSpPr>
+            <a:spLocks noGrp="1"/>
+          </p:cNvSpPr>
+          <p:nvPr>
+            <p:ph type="body" idx="3" sz="quarter"/>
+          </p:nvPr>
+        </p:nvSpPr>
+        <p:spPr/>
+        <p:txBody>
+          <a:bodyPr/>
+          <a:lstStyle/>
+          <a:p>
+            <a:r>
+              <a:t>Quellenfolie. Keine internen Repository-, Branch- oder Markdown-Verweise in der Schülerpräsentation.</a:t>
             </a:r>
           </a:p>
         </p:txBody>
@@ -579,7 +1006,7 @@
           <a:lstStyle/>
           <a:p>
             <a:r>
-              <a:t>Optionaler Zusatzblock. Erst Problem, dann Begriffe.</a:t>
+              <a:t>Optionaler Zusatzblock. Erst das Schutzproblem aufbauen, dann Fachbegriffe. Nicht voraussetzen, dass Schüler Verschlüsselung kennen.</a:t>
             </a:r>
           </a:p>
         </p:txBody>
@@ -649,7 +1076,7 @@
           <a:lstStyle/>
           <a:p>
             <a:r>
-              <a:t>Mit einfacher Nachricht demonstrieren.</a:t>
+              <a:t>Begriffe langsam einführen. Beispielnachricht verwenden.</a:t>
             </a:r>
           </a:p>
         </p:txBody>
@@ -719,7 +1146,7 @@
           <a:lstStyle/>
           <a:p>
             <a:r>
-              <a:t>Geschwindigkeitsargument für HTTPS vorbereiten.</a:t>
+              <a:t>Caesar als Lernmodell, ausdrücklich nicht als moderne Sicherheit darstellen.</a:t>
             </a:r>
           </a:p>
         </p:txBody>
@@ -789,7 +1216,7 @@
           <a:lstStyle/>
           <a:p>
             <a:r>
-              <a:t>Kleine Zahlen nur als Modell.</a:t>
+              <a:t>Geschwindigkeitsaspekt als zentrale Begründung herausarbeiten: symmetrische Verfahren eignen sich für laufenden Datenverkehr.</a:t>
             </a:r>
           </a:p>
         </p:txBody>
@@ -859,7 +1286,7 @@
           <a:lstStyle/>
           <a:p>
             <a:r>
-              <a:t>Modulare Potenzierung nicht vollständig ausmultiplizieren.</a:t>
+              <a:t>Vereinfachtes Modell. Nicht behaupten, dass moderne HTTPS-Nutzdaten komplett asymmetrisch verschlüsselt werden.</a:t>
             </a:r>
           </a:p>
         </p:txBody>
@@ -929,7 +1356,7 @@
           <a:lstStyle/>
           <a:p>
             <a:r>
-              <a:t>Nicht behaupten, RSA verschlüssele den gesamten HTTPS-Datenstrom.</a:t>
+              <a:t>RSA-Rechnung als mathematische Vertiefung. Kleine Zahlen sind ausschließlich didaktisch und kryptografisch völlig unsicher.</a:t>
             </a:r>
           </a:p>
         </p:txBody>
@@ -999,7 +1426,77 @@
           <a:lstStyle/>
           <a:p>
             <a:r>
-              <a:t>Quellenfolie. Quellenangaben sind für Lehrkraft/Weiterverwendung sichtbar.</a:t>
+              <a:t>Modulares Rechnen bei Bedarf vorher erklären. Rechenweg gemeinsam nachvollziehen.</a:t>
+            </a:r>
+          </a:p>
+        </p:txBody>
+      </p:sp>
+      <p:sp>
+        <p:nvSpPr>
+          <p:cNvPr id="4" name="Slide Number Placeholder 3"/>
+          <p:cNvSpPr>
+            <a:spLocks noGrp="1"/>
+          </p:cNvSpPr>
+          <p:nvPr>
+            <p:ph type="sldNum" idx="5" sz="quarter"/>
+          </p:nvPr>
+        </p:nvSpPr>
+        <p:spPr/>
+      </p:sp>
+    </p:spTree>
+  </p:cSld>
+  <p:clrMapOvr>
+    <a:masterClrMapping/>
+  </p:clrMapOvr>
+</p:notes>
+</file>
+
+<file path=ppt/notesSlides/notesSlide9.xml><?xml version="1.0" encoding="utf-8"?>
+<p:notes xmlns:a="http://schemas.openxmlformats.org/drawingml/2006/main" xmlns:p="http://schemas.openxmlformats.org/presentationml/2006/main" xmlns:r="http://schemas.openxmlformats.org/officeDocument/2006/relationships">
+  <p:cSld>
+    <p:spTree>
+      <p:nvGrpSpPr>
+        <p:cNvPr id="1" name=""/>
+        <p:cNvGrpSpPr/>
+        <p:nvPr/>
+      </p:nvGrpSpPr>
+      <p:grpSpPr>
+        <a:xfrm>
+          <a:off x="0" y="0"/>
+          <a:ext cx="0" cy="0"/>
+          <a:chOff x="0" y="0"/>
+          <a:chExt cx="0" cy="0"/>
+        </a:xfrm>
+      </p:grpSpPr>
+      <p:sp>
+        <p:nvSpPr>
+          <p:cNvPr id="2" name="Slide Image Placeholder 1"/>
+          <p:cNvSpPr>
+            <a:spLocks noGrp="1"/>
+          </p:cNvSpPr>
+          <p:nvPr>
+            <p:ph type="sldImg" idx="2"/>
+          </p:nvPr>
+        </p:nvSpPr>
+        <p:spPr/>
+      </p:sp>
+      <p:sp>
+        <p:nvSpPr>
+          <p:cNvPr id="3" name="Notes Placeholder 2"/>
+          <p:cNvSpPr>
+            <a:spLocks noGrp="1"/>
+          </p:cNvSpPr>
+          <p:nvPr>
+            <p:ph type="body" idx="3" sz="quarter"/>
+          </p:nvPr>
+        </p:nvSpPr>
+        <p:spPr/>
+        <p:txBody>
+          <a:bodyPr/>
+          <a:lstStyle/>
+          <a:p>
+            <a:r>
+              <a:t>Schrittweise rechnen. Potenzen und Restrechnung erklären.</a:t>
             </a:r>
           </a:p>
         </p:txBody>
@@ -4020,7 +4517,7 @@
             <a:avLst/>
           </a:prstGeom>
           <a:solidFill>
-            <a:srgbClr val="202C3C"/>
+            <a:srgbClr val="1F374E"/>
           </a:solidFill>
           <a:ln>
             <a:noFill/>
@@ -4056,8 +4553,8 @@
         </p:nvSpPr>
         <p:spPr>
           <a:xfrm>
-            <a:off x="731520" y="1554480"/>
-            <a:ext cx="10789920" cy="1097280"/>
+            <a:off x="731520" y="1417320"/>
+            <a:ext cx="10698480" cy="1188720"/>
           </a:xfrm>
           <a:prstGeom prst="rect">
             <a:avLst/>
@@ -4089,8 +4586,8 @@
         </p:nvSpPr>
         <p:spPr>
           <a:xfrm>
-            <a:off x="777240" y="3017520"/>
-            <a:ext cx="10515600" cy="640080"/>
+            <a:off x="777240" y="2971800"/>
+            <a:ext cx="10515600" cy="731520"/>
           </a:xfrm>
           <a:prstGeom prst="rect">
             <a:avLst/>
@@ -4110,6 +4607,1455 @@
                 </a:solidFill>
               </a:rPr>
               <a:t>Optionale Vertiefung · Klasse 8</a:t>
+            </a:r>
+          </a:p>
+        </p:txBody>
+      </p:sp>
+    </p:spTree>
+  </p:cSld>
+  <p:clrMapOvr>
+    <a:masterClrMapping/>
+  </p:clrMapOvr>
+</p:sld>
+</file>
+
+<file path=ppt/slides/slide10.xml><?xml version="1.0" encoding="utf-8"?>
+<p:sld xmlns:a="http://schemas.openxmlformats.org/drawingml/2006/main" xmlns:p="http://schemas.openxmlformats.org/presentationml/2006/main" xmlns:r="http://schemas.openxmlformats.org/officeDocument/2006/relationships">
+  <p:cSld>
+    <p:spTree>
+      <p:nvGrpSpPr>
+        <p:cNvPr id="1" name=""/>
+        <p:cNvGrpSpPr/>
+        <p:nvPr/>
+      </p:nvGrpSpPr>
+      <p:grpSpPr/>
+      <p:sp>
+        <p:nvSpPr>
+          <p:cNvPr id="2" name="Rectangle 1"/>
+          <p:cNvSpPr/>
+          <p:nvPr/>
+        </p:nvSpPr>
+        <p:spPr>
+          <a:xfrm>
+            <a:off x="0" y="0"/>
+            <a:ext cx="12191695" cy="100584"/>
+          </a:xfrm>
+          <a:prstGeom prst="rect">
+            <a:avLst/>
+          </a:prstGeom>
+          <a:solidFill>
+            <a:srgbClr val="4472C4"/>
+          </a:solidFill>
+          <a:ln>
+            <a:noFill/>
+          </a:ln>
+        </p:spPr>
+        <p:style>
+          <a:lnRef idx="1">
+            <a:schemeClr val="accent1"/>
+          </a:lnRef>
+          <a:fillRef idx="3">
+            <a:schemeClr val="accent1"/>
+          </a:fillRef>
+          <a:effectRef idx="2">
+            <a:schemeClr val="accent1"/>
+          </a:effectRef>
+          <a:fontRef idx="minor">
+            <a:schemeClr val="lt1"/>
+          </a:fontRef>
+        </p:style>
+        <p:txBody>
+          <a:bodyPr rtlCol="0" anchor="ctr"/>
+          <a:lstStyle/>
+          <a:p>
+            <a:pPr algn="ctr"/>
+          </a:p>
+        </p:txBody>
+      </p:sp>
+      <p:sp>
+        <p:nvSpPr>
+          <p:cNvPr id="3" name="TextBox 2"/>
+          <p:cNvSpPr txBox="1"/>
+          <p:nvPr/>
+        </p:nvSpPr>
+        <p:spPr>
+          <a:xfrm>
+            <a:off x="594360" y="320040"/>
+            <a:ext cx="10972800" cy="502920"/>
+          </a:xfrm>
+          <a:prstGeom prst="rect">
+            <a:avLst/>
+          </a:prstGeom>
+          <a:noFill/>
+        </p:spPr>
+        <p:txBody>
+          <a:bodyPr wrap="none">
+            <a:spAutoFit/>
+          </a:bodyPr>
+          <a:lstStyle/>
+          <a:p>
+            <a:r>
+              <a:rPr sz="2600" b="1">
+                <a:solidFill>
+                  <a:srgbClr val="1F374E"/>
+                </a:solidFill>
+              </a:rPr>
+              <a:t>RSA – wieder entschlüsseln</a:t>
+            </a:r>
+          </a:p>
+        </p:txBody>
+      </p:sp>
+      <p:sp>
+        <p:nvSpPr>
+          <p:cNvPr id="4" name="TextBox 3"/>
+          <p:cNvSpPr txBox="1"/>
+          <p:nvPr/>
+        </p:nvSpPr>
+        <p:spPr>
+          <a:xfrm>
+            <a:off x="685800" y="1234440"/>
+            <a:ext cx="5303520" cy="4937760"/>
+          </a:xfrm>
+          <a:prstGeom prst="rect">
+            <a:avLst/>
+          </a:prstGeom>
+          <a:noFill/>
+        </p:spPr>
+        <p:txBody>
+          <a:bodyPr wrap="square">
+            <a:spAutoFit/>
+          </a:bodyPr>
+          <a:lstStyle/>
+          <a:p>
+            <a:pPr>
+              <a:spcAft>
+                <a:spcPts val="800"/>
+              </a:spcAft>
+              <a:defRPr sz="1900">
+                <a:solidFill>
+                  <a:srgbClr val="232323"/>
+                </a:solidFill>
+              </a:defRPr>
+            </a:pPr>
+            <a:r>
+              <a:t>Entschlüsselung: m = c^d mod n</a:t>
+            </a:r>
+          </a:p>
+          <a:p>
+            <a:pPr>
+              <a:spcAft>
+                <a:spcPts val="800"/>
+              </a:spcAft>
+              <a:defRPr sz="1900">
+                <a:solidFill>
+                  <a:srgbClr val="232323"/>
+                </a:solidFill>
+              </a:defRPr>
+            </a:pPr>
+            <a:r>
+              <a:t>m = 13²⁷ mod 55</a:t>
+            </a:r>
+          </a:p>
+          <a:p>
+            <a:pPr>
+              <a:spcAft>
+                <a:spcPts val="800"/>
+              </a:spcAft>
+              <a:defRPr sz="1900">
+                <a:solidFill>
+                  <a:srgbClr val="232323"/>
+                </a:solidFill>
+              </a:defRPr>
+            </a:pPr>
+            <a:r>
+              <a:t>Das Ergebnis ist wieder m = 7.</a:t>
+            </a:r>
+          </a:p>
+          <a:p>
+            <a:pPr>
+              <a:spcAft>
+                <a:spcPts val="800"/>
+              </a:spcAft>
+              <a:defRPr sz="1900">
+                <a:solidFill>
+                  <a:srgbClr val="232323"/>
+                </a:solidFill>
+              </a:defRPr>
+            </a:pPr>
+            <a:r>
+              <a:t>In echten Systemen werden sehr viel größere Zahlen und sichere Verfahren/Parameter verwendet.</a:t>
+            </a:r>
+          </a:p>
+        </p:txBody>
+      </p:sp>
+      <p:sp>
+        <p:nvSpPr>
+          <p:cNvPr id="5" name="Rectangle 4"/>
+          <p:cNvSpPr/>
+          <p:nvPr/>
+        </p:nvSpPr>
+        <p:spPr>
+          <a:xfrm>
+            <a:off x="6400800" y="1463040"/>
+            <a:ext cx="4754880" cy="2560320"/>
+          </a:xfrm>
+          <a:prstGeom prst="rect">
+            <a:avLst/>
+          </a:prstGeom>
+          <a:solidFill>
+            <a:srgbClr val="FAFAFA"/>
+          </a:solidFill>
+          <a:ln>
+            <a:solidFill>
+              <a:srgbClr val="646464"/>
+            </a:solidFill>
+          </a:ln>
+        </p:spPr>
+        <p:style>
+          <a:lnRef idx="1">
+            <a:schemeClr val="accent1"/>
+          </a:lnRef>
+          <a:fillRef idx="3">
+            <a:schemeClr val="accent1"/>
+          </a:fillRef>
+          <a:effectRef idx="2">
+            <a:schemeClr val="accent1"/>
+          </a:effectRef>
+          <a:fontRef idx="minor">
+            <a:schemeClr val="lt1"/>
+          </a:fontRef>
+        </p:style>
+        <p:txBody>
+          <a:bodyPr rtlCol="0" anchor="ctr" wrap="none"/>
+          <a:lstStyle/>
+          <a:p>
+            <a:pPr algn="ctr"/>
+            <a:r>
+              <a:rPr sz="1800">
+                <a:solidFill>
+                  <a:srgbClr val="232323"/>
+                </a:solidFill>
+                <a:latin typeface="Consolas"/>
+              </a:rPr>
+              <a:t>m = 13²⁷ mod 55
+m = 7
+→ ursprüngliche Nachricht</a:t>
+            </a:r>
+          </a:p>
+        </p:txBody>
+      </p:sp>
+      <p:sp>
+        <p:nvSpPr>
+          <p:cNvPr id="6" name="TextBox 5"/>
+          <p:cNvSpPr txBox="1"/>
+          <p:nvPr/>
+        </p:nvSpPr>
+        <p:spPr>
+          <a:xfrm>
+            <a:off x="502920" y="6510528"/>
+            <a:ext cx="11064240" cy="182880"/>
+          </a:xfrm>
+          <a:prstGeom prst="rect">
+            <a:avLst/>
+          </a:prstGeom>
+          <a:noFill/>
+        </p:spPr>
+        <p:txBody>
+          <a:bodyPr wrap="none">
+            <a:spAutoFit/>
+          </a:bodyPr>
+          <a:lstStyle/>
+          <a:p>
+            <a:pPr algn="r"/>
+            <a:r>
+              <a:rPr sz="800">
+                <a:solidFill>
+                  <a:srgbClr val="646464"/>
+                </a:solidFill>
+              </a:rPr>
+              <a:t>Grafik: eigene Darstellung</a:t>
+            </a:r>
+          </a:p>
+        </p:txBody>
+      </p:sp>
+    </p:spTree>
+  </p:cSld>
+  <p:clrMapOvr>
+    <a:masterClrMapping/>
+  </p:clrMapOvr>
+</p:sld>
+</file>
+
+<file path=ppt/slides/slide11.xml><?xml version="1.0" encoding="utf-8"?>
+<p:sld xmlns:a="http://schemas.openxmlformats.org/drawingml/2006/main" xmlns:p="http://schemas.openxmlformats.org/presentationml/2006/main" xmlns:r="http://schemas.openxmlformats.org/officeDocument/2006/relationships">
+  <p:cSld>
+    <p:spTree>
+      <p:nvGrpSpPr>
+        <p:cNvPr id="1" name=""/>
+        <p:cNvGrpSpPr/>
+        <p:nvPr/>
+      </p:nvGrpSpPr>
+      <p:grpSpPr/>
+      <p:sp>
+        <p:nvSpPr>
+          <p:cNvPr id="2" name="Rectangle 1"/>
+          <p:cNvSpPr/>
+          <p:nvPr/>
+        </p:nvSpPr>
+        <p:spPr>
+          <a:xfrm>
+            <a:off x="0" y="0"/>
+            <a:ext cx="12191695" cy="100584"/>
+          </a:xfrm>
+          <a:prstGeom prst="rect">
+            <a:avLst/>
+          </a:prstGeom>
+          <a:solidFill>
+            <a:srgbClr val="4472C4"/>
+          </a:solidFill>
+          <a:ln>
+            <a:noFill/>
+          </a:ln>
+        </p:spPr>
+        <p:style>
+          <a:lnRef idx="1">
+            <a:schemeClr val="accent1"/>
+          </a:lnRef>
+          <a:fillRef idx="3">
+            <a:schemeClr val="accent1"/>
+          </a:fillRef>
+          <a:effectRef idx="2">
+            <a:schemeClr val="accent1"/>
+          </a:effectRef>
+          <a:fontRef idx="minor">
+            <a:schemeClr val="lt1"/>
+          </a:fontRef>
+        </p:style>
+        <p:txBody>
+          <a:bodyPr rtlCol="0" anchor="ctr"/>
+          <a:lstStyle/>
+          <a:p>
+            <a:pPr algn="ctr"/>
+          </a:p>
+        </p:txBody>
+      </p:sp>
+      <p:sp>
+        <p:nvSpPr>
+          <p:cNvPr id="3" name="TextBox 2"/>
+          <p:cNvSpPr txBox="1"/>
+          <p:nvPr/>
+        </p:nvSpPr>
+        <p:spPr>
+          <a:xfrm>
+            <a:off x="594360" y="320040"/>
+            <a:ext cx="10972800" cy="502920"/>
+          </a:xfrm>
+          <a:prstGeom prst="rect">
+            <a:avLst/>
+          </a:prstGeom>
+          <a:noFill/>
+        </p:spPr>
+        <p:txBody>
+          <a:bodyPr wrap="none">
+            <a:spAutoFit/>
+          </a:bodyPr>
+          <a:lstStyle/>
+          <a:p>
+            <a:r>
+              <a:rPr sz="2600" b="1">
+                <a:solidFill>
+                  <a:srgbClr val="1F374E"/>
+                </a:solidFill>
+              </a:rPr>
+              <a:t>Digitale Signaturen und Hashwerte</a:t>
+            </a:r>
+          </a:p>
+        </p:txBody>
+      </p:sp>
+      <p:sp>
+        <p:nvSpPr>
+          <p:cNvPr id="4" name="TextBox 3"/>
+          <p:cNvSpPr txBox="1"/>
+          <p:nvPr/>
+        </p:nvSpPr>
+        <p:spPr>
+          <a:xfrm>
+            <a:off x="685800" y="1234440"/>
+            <a:ext cx="5303520" cy="4937760"/>
+          </a:xfrm>
+          <a:prstGeom prst="rect">
+            <a:avLst/>
+          </a:prstGeom>
+          <a:noFill/>
+        </p:spPr>
+        <p:txBody>
+          <a:bodyPr wrap="square">
+            <a:spAutoFit/>
+          </a:bodyPr>
+          <a:lstStyle/>
+          <a:p>
+            <a:pPr>
+              <a:spcAft>
+                <a:spcPts val="800"/>
+              </a:spcAft>
+              <a:defRPr sz="1900">
+                <a:solidFill>
+                  <a:srgbClr val="232323"/>
+                </a:solidFill>
+              </a:defRPr>
+            </a:pPr>
+            <a:r>
+              <a:t>Hashwert: kurzer digitaler Fingerabdruck von Daten.</a:t>
+            </a:r>
+          </a:p>
+          <a:p>
+            <a:pPr>
+              <a:spcAft>
+                <a:spcPts val="800"/>
+              </a:spcAft>
+              <a:defRPr sz="1900">
+                <a:solidFill>
+                  <a:srgbClr val="232323"/>
+                </a:solidFill>
+              </a:defRPr>
+            </a:pPr>
+            <a:r>
+              <a:t>Digitale Signatur: hilft, Herkunft und Unverändertheit zu prüfen.</a:t>
+            </a:r>
+          </a:p>
+          <a:p>
+            <a:pPr>
+              <a:spcAft>
+                <a:spcPts val="800"/>
+              </a:spcAft>
+              <a:defRPr sz="1900">
+                <a:solidFill>
+                  <a:srgbClr val="232323"/>
+                </a:solidFill>
+              </a:defRPr>
+            </a:pPr>
+            <a:r>
+              <a:t>Signieren ist nicht dasselbe wie Verschlüsseln.</a:t>
+            </a:r>
+          </a:p>
+        </p:txBody>
+      </p:sp>
+      <p:sp>
+        <p:nvSpPr>
+          <p:cNvPr id="5" name="Rectangle 4"/>
+          <p:cNvSpPr/>
+          <p:nvPr/>
+        </p:nvSpPr>
+        <p:spPr>
+          <a:xfrm>
+            <a:off x="6400800" y="1417320"/>
+            <a:ext cx="4754880" cy="2743200"/>
+          </a:xfrm>
+          <a:prstGeom prst="rect">
+            <a:avLst/>
+          </a:prstGeom>
+          <a:solidFill>
+            <a:srgbClr val="FAFAFA"/>
+          </a:solidFill>
+          <a:ln>
+            <a:solidFill>
+              <a:srgbClr val="646464"/>
+            </a:solidFill>
+          </a:ln>
+        </p:spPr>
+        <p:style>
+          <a:lnRef idx="1">
+            <a:schemeClr val="accent1"/>
+          </a:lnRef>
+          <a:fillRef idx="3">
+            <a:schemeClr val="accent1"/>
+          </a:fillRef>
+          <a:effectRef idx="2">
+            <a:schemeClr val="accent1"/>
+          </a:effectRef>
+          <a:fontRef idx="minor">
+            <a:schemeClr val="lt1"/>
+          </a:fontRef>
+        </p:style>
+        <p:txBody>
+          <a:bodyPr rtlCol="0" anchor="ctr" wrap="none"/>
+          <a:lstStyle/>
+          <a:p>
+            <a:pPr algn="ctr"/>
+            <a:r>
+              <a:rPr sz="1500">
+                <a:solidFill>
+                  <a:srgbClr val="232323"/>
+                </a:solidFill>
+                <a:latin typeface="Consolas"/>
+              </a:rPr>
+              <a:t>Dokument → Hashwert
+Hashwert + privater Schlüssel → Signatur
+Prüfung mit öffentlichem Schlüssel</a:t>
+            </a:r>
+          </a:p>
+        </p:txBody>
+      </p:sp>
+      <p:sp>
+        <p:nvSpPr>
+          <p:cNvPr id="6" name="TextBox 5"/>
+          <p:cNvSpPr txBox="1"/>
+          <p:nvPr/>
+        </p:nvSpPr>
+        <p:spPr>
+          <a:xfrm>
+            <a:off x="502920" y="6510528"/>
+            <a:ext cx="11064240" cy="182880"/>
+          </a:xfrm>
+          <a:prstGeom prst="rect">
+            <a:avLst/>
+          </a:prstGeom>
+          <a:noFill/>
+        </p:spPr>
+        <p:txBody>
+          <a:bodyPr wrap="none">
+            <a:spAutoFit/>
+          </a:bodyPr>
+          <a:lstStyle/>
+          <a:p>
+            <a:pPr algn="r"/>
+            <a:r>
+              <a:rPr sz="800">
+                <a:solidFill>
+                  <a:srgbClr val="646464"/>
+                </a:solidFill>
+              </a:rPr>
+              <a:t>Grafik: eigene Darstellung</a:t>
+            </a:r>
+          </a:p>
+        </p:txBody>
+      </p:sp>
+    </p:spTree>
+  </p:cSld>
+  <p:clrMapOvr>
+    <a:masterClrMapping/>
+  </p:clrMapOvr>
+</p:sld>
+</file>
+
+<file path=ppt/slides/slide12.xml><?xml version="1.0" encoding="utf-8"?>
+<p:sld xmlns:a="http://schemas.openxmlformats.org/drawingml/2006/main" xmlns:p="http://schemas.openxmlformats.org/presentationml/2006/main" xmlns:r="http://schemas.openxmlformats.org/officeDocument/2006/relationships">
+  <p:cSld>
+    <p:spTree>
+      <p:nvGrpSpPr>
+        <p:cNvPr id="1" name=""/>
+        <p:cNvGrpSpPr/>
+        <p:nvPr/>
+      </p:nvGrpSpPr>
+      <p:grpSpPr/>
+      <p:sp>
+        <p:nvSpPr>
+          <p:cNvPr id="2" name="Rectangle 1"/>
+          <p:cNvSpPr/>
+          <p:nvPr/>
+        </p:nvSpPr>
+        <p:spPr>
+          <a:xfrm>
+            <a:off x="0" y="0"/>
+            <a:ext cx="12191695" cy="100584"/>
+          </a:xfrm>
+          <a:prstGeom prst="rect">
+            <a:avLst/>
+          </a:prstGeom>
+          <a:solidFill>
+            <a:srgbClr val="4472C4"/>
+          </a:solidFill>
+          <a:ln>
+            <a:noFill/>
+          </a:ln>
+        </p:spPr>
+        <p:style>
+          <a:lnRef idx="1">
+            <a:schemeClr val="accent1"/>
+          </a:lnRef>
+          <a:fillRef idx="3">
+            <a:schemeClr val="accent1"/>
+          </a:fillRef>
+          <a:effectRef idx="2">
+            <a:schemeClr val="accent1"/>
+          </a:effectRef>
+          <a:fontRef idx="minor">
+            <a:schemeClr val="lt1"/>
+          </a:fontRef>
+        </p:style>
+        <p:txBody>
+          <a:bodyPr rtlCol="0" anchor="ctr"/>
+          <a:lstStyle/>
+          <a:p>
+            <a:pPr algn="ctr"/>
+          </a:p>
+        </p:txBody>
+      </p:sp>
+      <p:sp>
+        <p:nvSpPr>
+          <p:cNvPr id="3" name="TextBox 2"/>
+          <p:cNvSpPr txBox="1"/>
+          <p:nvPr/>
+        </p:nvSpPr>
+        <p:spPr>
+          <a:xfrm>
+            <a:off x="594360" y="320040"/>
+            <a:ext cx="10972800" cy="502920"/>
+          </a:xfrm>
+          <a:prstGeom prst="rect">
+            <a:avLst/>
+          </a:prstGeom>
+          <a:noFill/>
+        </p:spPr>
+        <p:txBody>
+          <a:bodyPr wrap="none">
+            <a:spAutoFit/>
+          </a:bodyPr>
+          <a:lstStyle/>
+          <a:p>
+            <a:r>
+              <a:rPr sz="2600" b="1">
+                <a:solidFill>
+                  <a:srgbClr val="1F374E"/>
+                </a:solidFill>
+              </a:rPr>
+              <a:t>HTTPS und TLS</a:t>
+            </a:r>
+          </a:p>
+        </p:txBody>
+      </p:sp>
+      <p:sp>
+        <p:nvSpPr>
+          <p:cNvPr id="4" name="TextBox 3"/>
+          <p:cNvSpPr txBox="1"/>
+          <p:nvPr/>
+        </p:nvSpPr>
+        <p:spPr>
+          <a:xfrm>
+            <a:off x="685800" y="1234440"/>
+            <a:ext cx="5303520" cy="4937760"/>
+          </a:xfrm>
+          <a:prstGeom prst="rect">
+            <a:avLst/>
+          </a:prstGeom>
+          <a:noFill/>
+        </p:spPr>
+        <p:txBody>
+          <a:bodyPr wrap="square">
+            <a:spAutoFit/>
+          </a:bodyPr>
+          <a:lstStyle/>
+          <a:p>
+            <a:pPr>
+              <a:spcAft>
+                <a:spcPts val="800"/>
+              </a:spcAft>
+              <a:defRPr sz="1900">
+                <a:solidFill>
+                  <a:srgbClr val="232323"/>
+                </a:solidFill>
+              </a:defRPr>
+            </a:pPr>
+            <a:r>
+              <a:t>HTTPS = Hypertext Transfer Protocol Secure.</a:t>
+            </a:r>
+          </a:p>
+          <a:p>
+            <a:pPr>
+              <a:spcAft>
+                <a:spcPts val="800"/>
+              </a:spcAft>
+              <a:defRPr sz="1900">
+                <a:solidFill>
+                  <a:srgbClr val="232323"/>
+                </a:solidFill>
+              </a:defRPr>
+            </a:pPr>
+            <a:r>
+              <a:t>TLS = Transport Layer Security schützt die Verbindung.</a:t>
+            </a:r>
+          </a:p>
+          <a:p>
+            <a:pPr>
+              <a:spcAft>
+                <a:spcPts val="800"/>
+              </a:spcAft>
+              <a:defRPr sz="1900">
+                <a:solidFill>
+                  <a:srgbClr val="232323"/>
+                </a:solidFill>
+              </a:defRPr>
+            </a:pPr>
+            <a:r>
+              <a:t>SSL = Secure Sockets Layer ist die ältere Technik/Bezeichnung; heute wird TLS verwendet.</a:t>
+            </a:r>
+          </a:p>
+        </p:txBody>
+      </p:sp>
+      <p:sp>
+        <p:nvSpPr>
+          <p:cNvPr id="5" name="Rectangle 4"/>
+          <p:cNvSpPr/>
+          <p:nvPr/>
+        </p:nvSpPr>
+        <p:spPr>
+          <a:xfrm>
+            <a:off x="6400800" y="1463040"/>
+            <a:ext cx="4754880" cy="2560320"/>
+          </a:xfrm>
+          <a:prstGeom prst="rect">
+            <a:avLst/>
+          </a:prstGeom>
+          <a:solidFill>
+            <a:srgbClr val="FAFAFA"/>
+          </a:solidFill>
+          <a:ln>
+            <a:solidFill>
+              <a:srgbClr val="646464"/>
+            </a:solidFill>
+          </a:ln>
+        </p:spPr>
+        <p:style>
+          <a:lnRef idx="1">
+            <a:schemeClr val="accent1"/>
+          </a:lnRef>
+          <a:fillRef idx="3">
+            <a:schemeClr val="accent1"/>
+          </a:fillRef>
+          <a:effectRef idx="2">
+            <a:schemeClr val="accent1"/>
+          </a:effectRef>
+          <a:fontRef idx="minor">
+            <a:schemeClr val="lt1"/>
+          </a:fontRef>
+        </p:style>
+        <p:txBody>
+          <a:bodyPr rtlCol="0" anchor="ctr" wrap="none"/>
+          <a:lstStyle/>
+          <a:p>
+            <a:pPr algn="ctr"/>
+            <a:r>
+              <a:rPr sz="1500">
+                <a:solidFill>
+                  <a:srgbClr val="232323"/>
+                </a:solidFill>
+                <a:latin typeface="Consolas"/>
+              </a:rPr>
+              <a:t>Browser  ⇄  HTTPS/TLS  ⇄  Server
+SSL: ältere Bezeichnung/Technik
+TLS: heute verwendet</a:t>
+            </a:r>
+          </a:p>
+        </p:txBody>
+      </p:sp>
+      <p:sp>
+        <p:nvSpPr>
+          <p:cNvPr id="6" name="TextBox 5"/>
+          <p:cNvSpPr txBox="1"/>
+          <p:nvPr/>
+        </p:nvSpPr>
+        <p:spPr>
+          <a:xfrm>
+            <a:off x="502920" y="6510528"/>
+            <a:ext cx="11064240" cy="182880"/>
+          </a:xfrm>
+          <a:prstGeom prst="rect">
+            <a:avLst/>
+          </a:prstGeom>
+          <a:noFill/>
+        </p:spPr>
+        <p:txBody>
+          <a:bodyPr wrap="none">
+            <a:spAutoFit/>
+          </a:bodyPr>
+          <a:lstStyle/>
+          <a:p>
+            <a:pPr algn="r"/>
+            <a:r>
+              <a:rPr sz="800">
+                <a:solidFill>
+                  <a:srgbClr val="646464"/>
+                </a:solidFill>
+              </a:rPr>
+              <a:t>Grafik: eigene Darstellung · TLS 1.3: https://www.rfc-editor.org/rfc/rfc8446</a:t>
+            </a:r>
+          </a:p>
+        </p:txBody>
+      </p:sp>
+    </p:spTree>
+  </p:cSld>
+  <p:clrMapOvr>
+    <a:masterClrMapping/>
+  </p:clrMapOvr>
+</p:sld>
+</file>
+
+<file path=ppt/slides/slide13.xml><?xml version="1.0" encoding="utf-8"?>
+<p:sld xmlns:a="http://schemas.openxmlformats.org/drawingml/2006/main" xmlns:p="http://schemas.openxmlformats.org/presentationml/2006/main" xmlns:r="http://schemas.openxmlformats.org/officeDocument/2006/relationships">
+  <p:cSld>
+    <p:spTree>
+      <p:nvGrpSpPr>
+        <p:cNvPr id="1" name=""/>
+        <p:cNvGrpSpPr/>
+        <p:nvPr/>
+      </p:nvGrpSpPr>
+      <p:grpSpPr/>
+      <p:sp>
+        <p:nvSpPr>
+          <p:cNvPr id="2" name="Rectangle 1"/>
+          <p:cNvSpPr/>
+          <p:nvPr/>
+        </p:nvSpPr>
+        <p:spPr>
+          <a:xfrm>
+            <a:off x="0" y="0"/>
+            <a:ext cx="12191695" cy="100584"/>
+          </a:xfrm>
+          <a:prstGeom prst="rect">
+            <a:avLst/>
+          </a:prstGeom>
+          <a:solidFill>
+            <a:srgbClr val="4472C4"/>
+          </a:solidFill>
+          <a:ln>
+            <a:noFill/>
+          </a:ln>
+        </p:spPr>
+        <p:style>
+          <a:lnRef idx="1">
+            <a:schemeClr val="accent1"/>
+          </a:lnRef>
+          <a:fillRef idx="3">
+            <a:schemeClr val="accent1"/>
+          </a:fillRef>
+          <a:effectRef idx="2">
+            <a:schemeClr val="accent1"/>
+          </a:effectRef>
+          <a:fontRef idx="minor">
+            <a:schemeClr val="lt1"/>
+          </a:fontRef>
+        </p:style>
+        <p:txBody>
+          <a:bodyPr rtlCol="0" anchor="ctr"/>
+          <a:lstStyle/>
+          <a:p>
+            <a:pPr algn="ctr"/>
+          </a:p>
+        </p:txBody>
+      </p:sp>
+      <p:sp>
+        <p:nvSpPr>
+          <p:cNvPr id="3" name="TextBox 2"/>
+          <p:cNvSpPr txBox="1"/>
+          <p:nvPr/>
+        </p:nvSpPr>
+        <p:spPr>
+          <a:xfrm>
+            <a:off x="594360" y="320040"/>
+            <a:ext cx="10972800" cy="502920"/>
+          </a:xfrm>
+          <a:prstGeom prst="rect">
+            <a:avLst/>
+          </a:prstGeom>
+          <a:noFill/>
+        </p:spPr>
+        <p:txBody>
+          <a:bodyPr wrap="none">
+            <a:spAutoFit/>
+          </a:bodyPr>
+          <a:lstStyle/>
+          <a:p>
+            <a:r>
+              <a:rPr sz="2600" b="1">
+                <a:solidFill>
+                  <a:srgbClr val="1F374E"/>
+                </a:solidFill>
+              </a:rPr>
+              <a:t>Warum HTTPS beide Welten kombiniert</a:t>
+            </a:r>
+          </a:p>
+        </p:txBody>
+      </p:sp>
+      <p:sp>
+        <p:nvSpPr>
+          <p:cNvPr id="4" name="TextBox 3"/>
+          <p:cNvSpPr txBox="1"/>
+          <p:nvPr/>
+        </p:nvSpPr>
+        <p:spPr>
+          <a:xfrm>
+            <a:off x="685800" y="1234440"/>
+            <a:ext cx="5303520" cy="4937760"/>
+          </a:xfrm>
+          <a:prstGeom prst="rect">
+            <a:avLst/>
+          </a:prstGeom>
+          <a:noFill/>
+        </p:spPr>
+        <p:txBody>
+          <a:bodyPr wrap="square">
+            <a:spAutoFit/>
+          </a:bodyPr>
+          <a:lstStyle/>
+          <a:p>
+            <a:pPr>
+              <a:spcAft>
+                <a:spcPts val="800"/>
+              </a:spcAft>
+              <a:defRPr sz="1900">
+                <a:solidFill>
+                  <a:srgbClr val="232323"/>
+                </a:solidFill>
+              </a:defRPr>
+            </a:pPr>
+            <a:r>
+              <a:t>Public-Key-/asymmetrische Kryptografie: Authentisierung und sichere Aushandlung von Schlüsselmaterial.</a:t>
+            </a:r>
+          </a:p>
+          <a:p>
+            <a:pPr>
+              <a:spcAft>
+                <a:spcPts val="800"/>
+              </a:spcAft>
+              <a:defRPr sz="1900">
+                <a:solidFill>
+                  <a:srgbClr val="232323"/>
+                </a:solidFill>
+              </a:defRPr>
+            </a:pPr>
+            <a:r>
+              <a:t>Symmetrische Kryptografie: anschließend schneller und effizienter Schutz des laufenden Datenverkehrs.</a:t>
+            </a:r>
+          </a:p>
+          <a:p>
+            <a:pPr>
+              <a:spcAft>
+                <a:spcPts val="800"/>
+              </a:spcAft>
+              <a:defRPr sz="1900">
+                <a:solidFill>
+                  <a:srgbClr val="232323"/>
+                </a:solidFill>
+              </a:defRPr>
+            </a:pPr>
+            <a:r>
+              <a:t>Merksatz: asymmetrisch für den sicheren Aufbau – symmetrisch für den schnellen Datenverkehr.</a:t>
+            </a:r>
+          </a:p>
+        </p:txBody>
+      </p:sp>
+      <p:sp>
+        <p:nvSpPr>
+          <p:cNvPr id="5" name="Rectangle 4"/>
+          <p:cNvSpPr/>
+          <p:nvPr/>
+        </p:nvSpPr>
+        <p:spPr>
+          <a:xfrm>
+            <a:off x="6217920" y="1188720"/>
+            <a:ext cx="5029200" cy="4023360"/>
+          </a:xfrm>
+          <a:prstGeom prst="rect">
+            <a:avLst/>
+          </a:prstGeom>
+          <a:solidFill>
+            <a:srgbClr val="FAFAFA"/>
+          </a:solidFill>
+          <a:ln>
+            <a:solidFill>
+              <a:srgbClr val="646464"/>
+            </a:solidFill>
+          </a:ln>
+        </p:spPr>
+        <p:style>
+          <a:lnRef idx="1">
+            <a:schemeClr val="accent1"/>
+          </a:lnRef>
+          <a:fillRef idx="3">
+            <a:schemeClr val="accent1"/>
+          </a:fillRef>
+          <a:effectRef idx="2">
+            <a:schemeClr val="accent1"/>
+          </a:effectRef>
+          <a:fontRef idx="minor">
+            <a:schemeClr val="lt1"/>
+          </a:fontRef>
+        </p:style>
+        <p:txBody>
+          <a:bodyPr rtlCol="0" anchor="ctr" wrap="none"/>
+          <a:lstStyle/>
+          <a:p>
+            <a:pPr algn="ctr"/>
+            <a:r>
+              <a:rPr sz="1500">
+                <a:solidFill>
+                  <a:srgbClr val="232323"/>
+                </a:solidFill>
+                <a:latin typeface="Consolas"/>
+              </a:rPr>
+              <a:t>1. Verbindungsaufbau
+   Zertifikat + Public-Key-Kryptografie
+        ↓
+2. gemeinsame Sitzungsschlüssel
+        ↓
+3. Datenverkehr symmetrisch
+   → effizient / schnell</a:t>
+            </a:r>
+          </a:p>
+        </p:txBody>
+      </p:sp>
+      <p:sp>
+        <p:nvSpPr>
+          <p:cNvPr id="6" name="TextBox 5"/>
+          <p:cNvSpPr txBox="1"/>
+          <p:nvPr/>
+        </p:nvSpPr>
+        <p:spPr>
+          <a:xfrm>
+            <a:off x="502920" y="6510528"/>
+            <a:ext cx="11064240" cy="182880"/>
+          </a:xfrm>
+          <a:prstGeom prst="rect">
+            <a:avLst/>
+          </a:prstGeom>
+          <a:noFill/>
+        </p:spPr>
+        <p:txBody>
+          <a:bodyPr wrap="none">
+            <a:spAutoFit/>
+          </a:bodyPr>
+          <a:lstStyle/>
+          <a:p>
+            <a:pPr algn="r"/>
+            <a:r>
+              <a:rPr sz="800">
+                <a:solidFill>
+                  <a:srgbClr val="646464"/>
+                </a:solidFill>
+              </a:rPr>
+              <a:t>Grafik: eigene Darstellung · TLS 1.3: https://www.rfc-editor.org/rfc/rfc8446</a:t>
+            </a:r>
+          </a:p>
+        </p:txBody>
+      </p:sp>
+    </p:spTree>
+  </p:cSld>
+  <p:clrMapOvr>
+    <a:masterClrMapping/>
+  </p:clrMapOvr>
+</p:sld>
+</file>
+
+<file path=ppt/slides/slide14.xml><?xml version="1.0" encoding="utf-8"?>
+<p:sld xmlns:a="http://schemas.openxmlformats.org/drawingml/2006/main" xmlns:p="http://schemas.openxmlformats.org/presentationml/2006/main" xmlns:r="http://schemas.openxmlformats.org/officeDocument/2006/relationships">
+  <p:cSld>
+    <p:spTree>
+      <p:nvGrpSpPr>
+        <p:cNvPr id="1" name=""/>
+        <p:cNvGrpSpPr/>
+        <p:nvPr/>
+      </p:nvGrpSpPr>
+      <p:grpSpPr/>
+      <p:sp>
+        <p:nvSpPr>
+          <p:cNvPr id="2" name="Rectangle 1"/>
+          <p:cNvSpPr/>
+          <p:nvPr/>
+        </p:nvSpPr>
+        <p:spPr>
+          <a:xfrm>
+            <a:off x="0" y="0"/>
+            <a:ext cx="12191695" cy="100584"/>
+          </a:xfrm>
+          <a:prstGeom prst="rect">
+            <a:avLst/>
+          </a:prstGeom>
+          <a:solidFill>
+            <a:srgbClr val="4472C4"/>
+          </a:solidFill>
+          <a:ln>
+            <a:noFill/>
+          </a:ln>
+        </p:spPr>
+        <p:style>
+          <a:lnRef idx="1">
+            <a:schemeClr val="accent1"/>
+          </a:lnRef>
+          <a:fillRef idx="3">
+            <a:schemeClr val="accent1"/>
+          </a:fillRef>
+          <a:effectRef idx="2">
+            <a:schemeClr val="accent1"/>
+          </a:effectRef>
+          <a:fontRef idx="minor">
+            <a:schemeClr val="lt1"/>
+          </a:fontRef>
+        </p:style>
+        <p:txBody>
+          <a:bodyPr rtlCol="0" anchor="ctr"/>
+          <a:lstStyle/>
+          <a:p>
+            <a:pPr algn="ctr"/>
+          </a:p>
+        </p:txBody>
+      </p:sp>
+      <p:sp>
+        <p:nvSpPr>
+          <p:cNvPr id="3" name="TextBox 2"/>
+          <p:cNvSpPr txBox="1"/>
+          <p:nvPr/>
+        </p:nvSpPr>
+        <p:spPr>
+          <a:xfrm>
+            <a:off x="594360" y="320040"/>
+            <a:ext cx="10972800" cy="502920"/>
+          </a:xfrm>
+          <a:prstGeom prst="rect">
+            <a:avLst/>
+          </a:prstGeom>
+          <a:noFill/>
+        </p:spPr>
+        <p:txBody>
+          <a:bodyPr wrap="none">
+            <a:spAutoFit/>
+          </a:bodyPr>
+          <a:lstStyle/>
+          <a:p>
+            <a:r>
+              <a:rPr sz="2600" b="1">
+                <a:solidFill>
+                  <a:srgbClr val="1F374E"/>
+                </a:solidFill>
+              </a:rPr>
+              <a:t>Sicherung Kryptografie</a:t>
+            </a:r>
+          </a:p>
+        </p:txBody>
+      </p:sp>
+      <p:sp>
+        <p:nvSpPr>
+          <p:cNvPr id="4" name="TextBox 3"/>
+          <p:cNvSpPr txBox="1"/>
+          <p:nvPr/>
+        </p:nvSpPr>
+        <p:spPr>
+          <a:xfrm>
+            <a:off x="685800" y="1234440"/>
+            <a:ext cx="5303520" cy="4937760"/>
+          </a:xfrm>
+          <a:prstGeom prst="rect">
+            <a:avLst/>
+          </a:prstGeom>
+          <a:noFill/>
+        </p:spPr>
+        <p:txBody>
+          <a:bodyPr wrap="square">
+            <a:spAutoFit/>
+          </a:bodyPr>
+          <a:lstStyle/>
+          <a:p>
+            <a:pPr>
+              <a:spcAft>
+                <a:spcPts val="800"/>
+              </a:spcAft>
+              <a:defRPr sz="1900">
+                <a:solidFill>
+                  <a:srgbClr val="232323"/>
+                </a:solidFill>
+              </a:defRPr>
+            </a:pPr>
+            <a:r>
+              <a:t>Klartext, Geheimtext und Schlüssel erklären</a:t>
+            </a:r>
+          </a:p>
+          <a:p>
+            <a:pPr>
+              <a:spcAft>
+                <a:spcPts val="800"/>
+              </a:spcAft>
+              <a:defRPr sz="1900">
+                <a:solidFill>
+                  <a:srgbClr val="232323"/>
+                </a:solidFill>
+              </a:defRPr>
+            </a:pPr>
+            <a:r>
+              <a:t>symmetrisch und asymmetrisch unterscheiden</a:t>
+            </a:r>
+          </a:p>
+          <a:p>
+            <a:pPr>
+              <a:spcAft>
+                <a:spcPts val="800"/>
+              </a:spcAft>
+              <a:defRPr sz="1900">
+                <a:solidFill>
+                  <a:srgbClr val="232323"/>
+                </a:solidFill>
+              </a:defRPr>
+            </a:pPr>
+            <a:r>
+              <a:t>RSA-Grundidee an kleinen Zahlen nachvollziehen</a:t>
+            </a:r>
+          </a:p>
+          <a:p>
+            <a:pPr>
+              <a:spcAft>
+                <a:spcPts val="800"/>
+              </a:spcAft>
+              <a:defRPr sz="1900">
+                <a:solidFill>
+                  <a:srgbClr val="232323"/>
+                </a:solidFill>
+              </a:defRPr>
+            </a:pPr>
+            <a:r>
+              <a:t>erklären, warum HTTPS/TLS für den Datenverkehr symmetrische Verfahren nutzt</a:t>
+            </a:r>
+          </a:p>
+        </p:txBody>
+      </p:sp>
+      <p:sp>
+        <p:nvSpPr>
+          <p:cNvPr id="5" name="TextBox 4"/>
+          <p:cNvSpPr txBox="1"/>
+          <p:nvPr/>
+        </p:nvSpPr>
+        <p:spPr>
+          <a:xfrm>
+            <a:off x="502920" y="6510528"/>
+            <a:ext cx="11064240" cy="182880"/>
+          </a:xfrm>
+          <a:prstGeom prst="rect">
+            <a:avLst/>
+          </a:prstGeom>
+          <a:noFill/>
+        </p:spPr>
+        <p:txBody>
+          <a:bodyPr wrap="none">
+            <a:spAutoFit/>
+          </a:bodyPr>
+          <a:lstStyle/>
+          <a:p>
+            <a:pPr algn="r"/>
+            <a:r>
+              <a:rPr sz="800">
+                <a:solidFill>
+                  <a:srgbClr val="646464"/>
+                </a:solidFill>
+              </a:rPr>
+              <a:t>Grafik: eigene Darstellung</a:t>
+            </a:r>
+          </a:p>
+        </p:txBody>
+      </p:sp>
+    </p:spTree>
+  </p:cSld>
+  <p:clrMapOvr>
+    <a:masterClrMapping/>
+  </p:clrMapOvr>
+</p:sld>
+</file>
+
+<file path=ppt/slides/slide15.xml><?xml version="1.0" encoding="utf-8"?>
+<p:sld xmlns:a="http://schemas.openxmlformats.org/drawingml/2006/main" xmlns:p="http://schemas.openxmlformats.org/presentationml/2006/main" xmlns:r="http://schemas.openxmlformats.org/officeDocument/2006/relationships">
+  <p:cSld>
+    <p:spTree>
+      <p:nvGrpSpPr>
+        <p:cNvPr id="1" name=""/>
+        <p:cNvGrpSpPr/>
+        <p:nvPr/>
+      </p:nvGrpSpPr>
+      <p:grpSpPr/>
+      <p:sp>
+        <p:nvSpPr>
+          <p:cNvPr id="2" name="Rectangle 1"/>
+          <p:cNvSpPr/>
+          <p:nvPr/>
+        </p:nvSpPr>
+        <p:spPr>
+          <a:xfrm>
+            <a:off x="0" y="0"/>
+            <a:ext cx="12191695" cy="100584"/>
+          </a:xfrm>
+          <a:prstGeom prst="rect">
+            <a:avLst/>
+          </a:prstGeom>
+          <a:solidFill>
+            <a:srgbClr val="4472C4"/>
+          </a:solidFill>
+          <a:ln>
+            <a:noFill/>
+          </a:ln>
+        </p:spPr>
+        <p:style>
+          <a:lnRef idx="1">
+            <a:schemeClr val="accent1"/>
+          </a:lnRef>
+          <a:fillRef idx="3">
+            <a:schemeClr val="accent1"/>
+          </a:fillRef>
+          <a:effectRef idx="2">
+            <a:schemeClr val="accent1"/>
+          </a:effectRef>
+          <a:fontRef idx="minor">
+            <a:schemeClr val="lt1"/>
+          </a:fontRef>
+        </p:style>
+        <p:txBody>
+          <a:bodyPr rtlCol="0" anchor="ctr"/>
+          <a:lstStyle/>
+          <a:p>
+            <a:pPr algn="ctr"/>
+          </a:p>
+        </p:txBody>
+      </p:sp>
+      <p:sp>
+        <p:nvSpPr>
+          <p:cNvPr id="3" name="TextBox 2"/>
+          <p:cNvSpPr txBox="1"/>
+          <p:nvPr/>
+        </p:nvSpPr>
+        <p:spPr>
+          <a:xfrm>
+            <a:off x="594360" y="320040"/>
+            <a:ext cx="10972800" cy="502920"/>
+          </a:xfrm>
+          <a:prstGeom prst="rect">
+            <a:avLst/>
+          </a:prstGeom>
+          <a:noFill/>
+        </p:spPr>
+        <p:txBody>
+          <a:bodyPr wrap="none">
+            <a:spAutoFit/>
+          </a:bodyPr>
+          <a:lstStyle/>
+          <a:p>
+            <a:r>
+              <a:rPr sz="2600" b="1">
+                <a:solidFill>
+                  <a:srgbClr val="1F374E"/>
+                </a:solidFill>
+              </a:rPr>
+              <a:t>Quellen</a:t>
+            </a:r>
+          </a:p>
+        </p:txBody>
+      </p:sp>
+      <p:sp>
+        <p:nvSpPr>
+          <p:cNvPr id="4" name="TextBox 3"/>
+          <p:cNvSpPr txBox="1"/>
+          <p:nvPr/>
+        </p:nvSpPr>
+        <p:spPr>
+          <a:xfrm>
+            <a:off x="731520" y="1234440"/>
+            <a:ext cx="10698480" cy="5029200"/>
+          </a:xfrm>
+          <a:prstGeom prst="rect">
+            <a:avLst/>
+          </a:prstGeom>
+          <a:noFill/>
+        </p:spPr>
+        <p:txBody>
+          <a:bodyPr wrap="square">
+            <a:spAutoFit/>
+          </a:bodyPr>
+          <a:lstStyle/>
+          <a:p>
+            <a:pPr>
+              <a:spcAft>
+                <a:spcPts val="800"/>
+              </a:spcAft>
+              <a:defRPr sz="1500">
+                <a:solidFill>
+                  <a:srgbClr val="232323"/>
+                </a:solidFill>
+              </a:defRPr>
+            </a:pPr>
+            <a:r>
+              <a:t>Bundesamt für Sicherheit in der Informationstechnik: https://www.bsi.bund.de</a:t>
+            </a:r>
+          </a:p>
+          <a:p>
+            <a:pPr>
+              <a:spcAft>
+                <a:spcPts val="800"/>
+              </a:spcAft>
+              <a:defRPr sz="1500">
+                <a:solidFill>
+                  <a:srgbClr val="232323"/>
+                </a:solidFill>
+              </a:defRPr>
+            </a:pPr>
+            <a:r>
+              <a:t>IETF RFC 8446 – The Transport Layer Security (TLS) Protocol Version 1.3: https://www.rfc-editor.org/rfc/rfc8446</a:t>
+            </a:r>
+          </a:p>
+          <a:p>
+            <a:pPr>
+              <a:spcAft>
+                <a:spcPts val="800"/>
+              </a:spcAft>
+              <a:defRPr sz="1500">
+                <a:solidFill>
+                  <a:srgbClr val="232323"/>
+                </a:solidFill>
+              </a:defRPr>
+            </a:pPr>
+            <a:r>
+              <a:t>Sächsischer Lehrplan Oberschule Informatik, Klassenstufe 8: https://www.schulportal.sachsen.de/lplandb/lehrplan/514</a:t>
+            </a:r>
+          </a:p>
+          <a:p>
+            <a:pPr>
+              <a:spcAft>
+                <a:spcPts val="800"/>
+              </a:spcAft>
+              <a:defRPr sz="1500">
+                <a:solidFill>
+                  <a:srgbClr val="232323"/>
+                </a:solidFill>
+              </a:defRPr>
+            </a:pPr>
+            <a:r>
+              <a:t>Grafiken und vereinfachte Unterrichtsbeispiele: eigene didaktische Darstellung.</a:t>
+            </a:r>
+          </a:p>
+        </p:txBody>
+      </p:sp>
+      <p:sp>
+        <p:nvSpPr>
+          <p:cNvPr id="5" name="TextBox 4"/>
+          <p:cNvSpPr txBox="1"/>
+          <p:nvPr/>
+        </p:nvSpPr>
+        <p:spPr>
+          <a:xfrm>
+            <a:off x="502920" y="6510528"/>
+            <a:ext cx="11064240" cy="182880"/>
+          </a:xfrm>
+          <a:prstGeom prst="rect">
+            <a:avLst/>
+          </a:prstGeom>
+          <a:noFill/>
+        </p:spPr>
+        <p:txBody>
+          <a:bodyPr wrap="none">
+            <a:spAutoFit/>
+          </a:bodyPr>
+          <a:lstStyle/>
+          <a:p>
+            <a:pPr algn="r"/>
+            <a:r>
+              <a:rPr sz="800">
+                <a:solidFill>
+                  <a:srgbClr val="646464"/>
+                </a:solidFill>
+              </a:rPr>
+              <a:t>Quellenangaben · Grafiken: eigene Darstellung</a:t>
             </a:r>
           </a:p>
         </p:txBody>
@@ -4141,13 +6087,13 @@
         <p:spPr>
           <a:xfrm>
             <a:off x="0" y="0"/>
-            <a:ext cx="12191695" cy="109728"/>
+            <a:ext cx="12191695" cy="100584"/>
           </a:xfrm>
           <a:prstGeom prst="rect">
             <a:avLst/>
           </a:prstGeom>
           <a:solidFill>
-            <a:srgbClr val="305396"/>
+            <a:srgbClr val="4472C4"/>
           </a:solidFill>
           <a:ln>
             <a:noFill/>
@@ -4184,7 +6130,7 @@
         <p:spPr>
           <a:xfrm>
             <a:off x="594360" y="320040"/>
-            <a:ext cx="10972800" cy="548640"/>
+            <a:ext cx="10972800" cy="502920"/>
           </a:xfrm>
           <a:prstGeom prst="rect">
             <a:avLst/>
@@ -4200,10 +6146,10 @@
             <a:r>
               <a:rPr sz="2600" b="1">
                 <a:solidFill>
-                  <a:srgbClr val="202C3C"/>
+                  <a:srgbClr val="1F374E"/>
                 </a:solidFill>
               </a:rPr>
-              <a:t>Leitfrage</a:t>
+              <a:t>Warum Kryptografie?</a:t>
             </a:r>
           </a:p>
         </p:txBody>
@@ -4216,18 +6162,18 @@
         </p:nvSpPr>
         <p:spPr>
           <a:xfrm>
-            <a:off x="777240" y="1234440"/>
-            <a:ext cx="10789920" cy="1234440"/>
+            <a:off x="822960" y="1325880"/>
+            <a:ext cx="10515600" cy="1417320"/>
           </a:xfrm>
           <a:prstGeom prst="roundRect">
             <a:avLst/>
           </a:prstGeom>
           <a:solidFill>
-            <a:srgbClr val="E5ECF6"/>
+            <a:srgbClr val="DCE6F1"/>
           </a:solidFill>
           <a:ln>
             <a:solidFill>
-              <a:srgbClr val="305396"/>
+              <a:srgbClr val="4472C4"/>
             </a:solidFill>
           </a:ln>
         </p:spPr>
@@ -4251,26 +6197,367 @@
           <a:p>
             <a:pPr algn="ctr"/>
             <a:r>
-              <a:rPr sz="2200" b="1">
-                <a:solidFill>
-                  <a:srgbClr val="202C3C"/>
+              <a:rPr sz="2400" b="1">
+                <a:solidFill>
+                  <a:srgbClr val="1F374E"/>
                 </a:solidFill>
               </a:rPr>
-              <a:t>Wie können Daten geschützt werden, wenn andere mitlesen könnten?</a:t>
-            </a:r>
-          </a:p>
-        </p:txBody>
-      </p:sp>
-      <p:sp>
-        <p:nvSpPr>
-          <p:cNvPr id="5" name="TextBox 4"/>
+              <a:t>Wie können zwei Personen über ein Netzwerk kommunizieren, ohne dass Mitlesende den Inhalt verstehen?</a:t>
+            </a:r>
+          </a:p>
+        </p:txBody>
+      </p:sp>
+      <p:sp>
+        <p:nvSpPr>
+          <p:cNvPr id="5" name="Rounded Rectangle 4"/>
+          <p:cNvSpPr/>
+          <p:nvPr/>
+        </p:nvSpPr>
+        <p:spPr>
+          <a:xfrm>
+            <a:off x="6217920" y="3246120"/>
+            <a:ext cx="1143000" cy="731520"/>
+          </a:xfrm>
+          <a:prstGeom prst="roundRect">
+            <a:avLst/>
+          </a:prstGeom>
+          <a:solidFill>
+            <a:srgbClr val="F2F6FA"/>
+          </a:solidFill>
+          <a:ln>
+            <a:solidFill>
+              <a:srgbClr val="4472C4"/>
+            </a:solidFill>
+          </a:ln>
+        </p:spPr>
+        <p:style>
+          <a:lnRef idx="1">
+            <a:schemeClr val="accent1"/>
+          </a:lnRef>
+          <a:fillRef idx="3">
+            <a:schemeClr val="accent1"/>
+          </a:fillRef>
+          <a:effectRef idx="2">
+            <a:schemeClr val="accent1"/>
+          </a:effectRef>
+          <a:fontRef idx="minor">
+            <a:schemeClr val="lt1"/>
+          </a:fontRef>
+        </p:style>
+        <p:txBody>
+          <a:bodyPr rtlCol="0" anchor="ctr" wrap="square"/>
+          <a:lstStyle/>
+          <a:p>
+            <a:pPr algn="ctr"/>
+            <a:r>
+              <a:rPr sz="1100" b="1">
+                <a:solidFill>
+                  <a:srgbClr val="1F374E"/>
+                </a:solidFill>
+              </a:rPr>
+              <a:t>Endgerät</a:t>
+            </a:r>
+          </a:p>
+        </p:txBody>
+      </p:sp>
+      <p:sp>
+        <p:nvSpPr>
+          <p:cNvPr id="6" name="Right Arrow 5"/>
+          <p:cNvSpPr/>
+          <p:nvPr/>
+        </p:nvSpPr>
+        <p:spPr>
+          <a:xfrm>
+            <a:off x="7406640" y="3447288"/>
+            <a:ext cx="274320" cy="256032"/>
+          </a:xfrm>
+          <a:prstGeom prst="rightArrow">
+            <a:avLst/>
+          </a:prstGeom>
+          <a:solidFill>
+            <a:srgbClr val="4472C4"/>
+          </a:solidFill>
+          <a:ln>
+            <a:noFill/>
+          </a:ln>
+        </p:spPr>
+        <p:style>
+          <a:lnRef idx="1">
+            <a:schemeClr val="accent1"/>
+          </a:lnRef>
+          <a:fillRef idx="3">
+            <a:schemeClr val="accent1"/>
+          </a:fillRef>
+          <a:effectRef idx="2">
+            <a:schemeClr val="accent1"/>
+          </a:effectRef>
+          <a:fontRef idx="minor">
+            <a:schemeClr val="lt1"/>
+          </a:fontRef>
+        </p:style>
+        <p:txBody>
+          <a:bodyPr rtlCol="0" anchor="ctr"/>
+          <a:lstStyle/>
+          <a:p>
+            <a:pPr algn="ctr"/>
+          </a:p>
+        </p:txBody>
+      </p:sp>
+      <p:sp>
+        <p:nvSpPr>
+          <p:cNvPr id="7" name="Rounded Rectangle 6"/>
+          <p:cNvSpPr/>
+          <p:nvPr/>
+        </p:nvSpPr>
+        <p:spPr>
+          <a:xfrm>
+            <a:off x="7635240" y="3246120"/>
+            <a:ext cx="1508760" cy="731520"/>
+          </a:xfrm>
+          <a:prstGeom prst="roundRect">
+            <a:avLst/>
+          </a:prstGeom>
+          <a:solidFill>
+            <a:srgbClr val="DCE6F1"/>
+          </a:solidFill>
+          <a:ln>
+            <a:solidFill>
+              <a:srgbClr val="4472C4"/>
+            </a:solidFill>
+          </a:ln>
+        </p:spPr>
+        <p:style>
+          <a:lnRef idx="1">
+            <a:schemeClr val="accent1"/>
+          </a:lnRef>
+          <a:fillRef idx="3">
+            <a:schemeClr val="accent1"/>
+          </a:fillRef>
+          <a:effectRef idx="2">
+            <a:schemeClr val="accent1"/>
+          </a:effectRef>
+          <a:fontRef idx="minor">
+            <a:schemeClr val="lt1"/>
+          </a:fontRef>
+        </p:style>
+        <p:txBody>
+          <a:bodyPr rtlCol="0" anchor="ctr" wrap="square"/>
+          <a:lstStyle/>
+          <a:p>
+            <a:pPr algn="ctr"/>
+            <a:r>
+              <a:rPr sz="1100" b="1">
+                <a:solidFill>
+                  <a:srgbClr val="1F374E"/>
+                </a:solidFill>
+              </a:rPr>
+              <a:t>Switch / Access Point</a:t>
+            </a:r>
+          </a:p>
+        </p:txBody>
+      </p:sp>
+      <p:sp>
+        <p:nvSpPr>
+          <p:cNvPr id="8" name="Right Arrow 7"/>
+          <p:cNvSpPr/>
+          <p:nvPr/>
+        </p:nvSpPr>
+        <p:spPr>
+          <a:xfrm>
+            <a:off x="9189720" y="3447288"/>
+            <a:ext cx="274320" cy="256032"/>
+          </a:xfrm>
+          <a:prstGeom prst="rightArrow">
+            <a:avLst/>
+          </a:prstGeom>
+          <a:solidFill>
+            <a:srgbClr val="4472C4"/>
+          </a:solidFill>
+          <a:ln>
+            <a:noFill/>
+          </a:ln>
+        </p:spPr>
+        <p:style>
+          <a:lnRef idx="1">
+            <a:schemeClr val="accent1"/>
+          </a:lnRef>
+          <a:fillRef idx="3">
+            <a:schemeClr val="accent1"/>
+          </a:fillRef>
+          <a:effectRef idx="2">
+            <a:schemeClr val="accent1"/>
+          </a:effectRef>
+          <a:fontRef idx="minor">
+            <a:schemeClr val="lt1"/>
+          </a:fontRef>
+        </p:style>
+        <p:txBody>
+          <a:bodyPr rtlCol="0" anchor="ctr"/>
+          <a:lstStyle/>
+          <a:p>
+            <a:pPr algn="ctr"/>
+          </a:p>
+        </p:txBody>
+      </p:sp>
+      <p:sp>
+        <p:nvSpPr>
+          <p:cNvPr id="9" name="Rounded Rectangle 8"/>
+          <p:cNvSpPr/>
+          <p:nvPr/>
+        </p:nvSpPr>
+        <p:spPr>
+          <a:xfrm>
+            <a:off x="9372600" y="3246120"/>
+            <a:ext cx="1051560" cy="731520"/>
+          </a:xfrm>
+          <a:prstGeom prst="roundRect">
+            <a:avLst/>
+          </a:prstGeom>
+          <a:solidFill>
+            <a:srgbClr val="FFE699"/>
+          </a:solidFill>
+          <a:ln>
+            <a:solidFill>
+              <a:srgbClr val="4472C4"/>
+            </a:solidFill>
+          </a:ln>
+        </p:spPr>
+        <p:style>
+          <a:lnRef idx="1">
+            <a:schemeClr val="accent1"/>
+          </a:lnRef>
+          <a:fillRef idx="3">
+            <a:schemeClr val="accent1"/>
+          </a:fillRef>
+          <a:effectRef idx="2">
+            <a:schemeClr val="accent1"/>
+          </a:effectRef>
+          <a:fontRef idx="minor">
+            <a:schemeClr val="lt1"/>
+          </a:fontRef>
+        </p:style>
+        <p:txBody>
+          <a:bodyPr rtlCol="0" anchor="ctr" wrap="square"/>
+          <a:lstStyle/>
+          <a:p>
+            <a:pPr algn="ctr"/>
+            <a:r>
+              <a:rPr sz="1100" b="1">
+                <a:solidFill>
+                  <a:srgbClr val="1F374E"/>
+                </a:solidFill>
+              </a:rPr>
+              <a:t>Router</a:t>
+            </a:r>
+          </a:p>
+        </p:txBody>
+      </p:sp>
+      <p:sp>
+        <p:nvSpPr>
+          <p:cNvPr id="10" name="Right Arrow 9"/>
+          <p:cNvSpPr/>
+          <p:nvPr/>
+        </p:nvSpPr>
+        <p:spPr>
+          <a:xfrm>
+            <a:off x="10469880" y="3447288"/>
+            <a:ext cx="274320" cy="256032"/>
+          </a:xfrm>
+          <a:prstGeom prst="rightArrow">
+            <a:avLst/>
+          </a:prstGeom>
+          <a:solidFill>
+            <a:srgbClr val="4472C4"/>
+          </a:solidFill>
+          <a:ln>
+            <a:noFill/>
+          </a:ln>
+        </p:spPr>
+        <p:style>
+          <a:lnRef idx="1">
+            <a:schemeClr val="accent1"/>
+          </a:lnRef>
+          <a:fillRef idx="3">
+            <a:schemeClr val="accent1"/>
+          </a:fillRef>
+          <a:effectRef idx="2">
+            <a:schemeClr val="accent1"/>
+          </a:effectRef>
+          <a:fontRef idx="minor">
+            <a:schemeClr val="lt1"/>
+          </a:fontRef>
+        </p:style>
+        <p:txBody>
+          <a:bodyPr rtlCol="0" anchor="ctr"/>
+          <a:lstStyle/>
+          <a:p>
+            <a:pPr algn="ctr"/>
+          </a:p>
+        </p:txBody>
+      </p:sp>
+      <p:sp>
+        <p:nvSpPr>
+          <p:cNvPr id="11" name="Rounded Rectangle 10"/>
+          <p:cNvSpPr/>
+          <p:nvPr/>
+        </p:nvSpPr>
+        <p:spPr>
+          <a:xfrm>
+            <a:off x="10698480" y="3246120"/>
+            <a:ext cx="1005840" cy="731520"/>
+          </a:xfrm>
+          <a:prstGeom prst="roundRect">
+            <a:avLst/>
+          </a:prstGeom>
+          <a:solidFill>
+            <a:srgbClr val="E2EFDA"/>
+          </a:solidFill>
+          <a:ln>
+            <a:solidFill>
+              <a:srgbClr val="4472C4"/>
+            </a:solidFill>
+          </a:ln>
+        </p:spPr>
+        <p:style>
+          <a:lnRef idx="1">
+            <a:schemeClr val="accent1"/>
+          </a:lnRef>
+          <a:fillRef idx="3">
+            <a:schemeClr val="accent1"/>
+          </a:fillRef>
+          <a:effectRef idx="2">
+            <a:schemeClr val="accent1"/>
+          </a:effectRef>
+          <a:fontRef idx="minor">
+            <a:schemeClr val="lt1"/>
+          </a:fontRef>
+        </p:style>
+        <p:txBody>
+          <a:bodyPr rtlCol="0" anchor="ctr" wrap="square"/>
+          <a:lstStyle/>
+          <a:p>
+            <a:pPr algn="ctr"/>
+            <a:r>
+              <a:rPr sz="1100" b="1">
+                <a:solidFill>
+                  <a:srgbClr val="1F374E"/>
+                </a:solidFill>
+              </a:rPr>
+              <a:t>Server</a:t>
+            </a:r>
+          </a:p>
+        </p:txBody>
+      </p:sp>
+      <p:sp>
+        <p:nvSpPr>
+          <p:cNvPr id="12" name="TextBox 11"/>
           <p:cNvSpPr txBox="1"/>
           <p:nvPr/>
         </p:nvSpPr>
         <p:spPr>
           <a:xfrm>
-            <a:off x="365760" y="6510528"/>
-            <a:ext cx="11430000" cy="228600"/>
+            <a:off x="502920" y="6510528"/>
+            <a:ext cx="11064240" cy="182880"/>
           </a:xfrm>
           <a:prstGeom prst="rect">
             <a:avLst/>
@@ -4287,7 +6574,7 @@
             <a:r>
               <a:rPr sz="800">
                 <a:solidFill>
-                  <a:srgbClr val="6E6E6E"/>
+                  <a:srgbClr val="646464"/>
                 </a:solidFill>
               </a:rPr>
               <a:t>Grafik: eigene Darstellung</a:t>
@@ -4322,13 +6609,13 @@
         <p:spPr>
           <a:xfrm>
             <a:off x="0" y="0"/>
-            <a:ext cx="12191695" cy="109728"/>
+            <a:ext cx="12191695" cy="100584"/>
           </a:xfrm>
           <a:prstGeom prst="rect">
             <a:avLst/>
           </a:prstGeom>
           <a:solidFill>
-            <a:srgbClr val="305396"/>
+            <a:srgbClr val="4472C4"/>
           </a:solidFill>
           <a:ln>
             <a:noFill/>
@@ -4365,7 +6652,7 @@
         <p:spPr>
           <a:xfrm>
             <a:off x="594360" y="320040"/>
-            <a:ext cx="10972800" cy="548640"/>
+            <a:ext cx="10972800" cy="502920"/>
           </a:xfrm>
           <a:prstGeom prst="rect">
             <a:avLst/>
@@ -4381,10 +6668,10 @@
             <a:r>
               <a:rPr sz="2600" b="1">
                 <a:solidFill>
-                  <a:srgbClr val="202C3C"/>
+                  <a:srgbClr val="1F374E"/>
                 </a:solidFill>
               </a:rPr>
-              <a:t>Grundbegriffe</a:t>
+              <a:t>Was ist Kryptografie?</a:t>
             </a:r>
           </a:p>
         </p:txBody>
@@ -4398,7 +6685,7 @@
         <p:spPr>
           <a:xfrm>
             <a:off x="685800" y="1234440"/>
-            <a:ext cx="5394960" cy="5029200"/>
+            <a:ext cx="5303520" cy="4937760"/>
           </a:xfrm>
           <a:prstGeom prst="rect">
             <a:avLst/>
@@ -4413,61 +6700,46 @@
           <a:p>
             <a:pPr>
               <a:spcAft>
-                <a:spcPts val="700"/>
+                <a:spcPts val="800"/>
               </a:spcAft>
               <a:defRPr sz="1900">
                 <a:solidFill>
-                  <a:srgbClr val="1E1E1E"/>
+                  <a:srgbClr val="232323"/>
                 </a:solidFill>
               </a:defRPr>
             </a:pPr>
             <a:r>
-              <a:t>Klartext ist lesbar.</a:t>
+              <a:t>Kryptografie beschäftigt sich mit Verfahren zum Schutz von Informationen.</a:t>
             </a:r>
           </a:p>
           <a:p>
             <a:pPr>
               <a:spcAft>
-                <a:spcPts val="700"/>
+                <a:spcPts val="800"/>
               </a:spcAft>
               <a:defRPr sz="1900">
                 <a:solidFill>
-                  <a:srgbClr val="1E1E1E"/>
+                  <a:srgbClr val="232323"/>
                 </a:solidFill>
               </a:defRPr>
             </a:pPr>
             <a:r>
-              <a:t>Verschlüsselung erzeugt Geheimtext.</a:t>
+              <a:t>Verschlüsselung macht lesbaren Klartext mit einem Schlüssel zu Geheimtext.</a:t>
             </a:r>
           </a:p>
           <a:p>
             <a:pPr>
               <a:spcAft>
-                <a:spcPts val="700"/>
+                <a:spcPts val="800"/>
               </a:spcAft>
               <a:defRPr sz="1900">
                 <a:solidFill>
-                  <a:srgbClr val="1E1E1E"/>
+                  <a:srgbClr val="232323"/>
                 </a:solidFill>
               </a:defRPr>
             </a:pPr>
             <a:r>
-              <a:t>Entschlüsselung macht ihn wieder lesbar.</a:t>
-            </a:r>
-          </a:p>
-          <a:p>
-            <a:pPr>
-              <a:spcAft>
-                <a:spcPts val="700"/>
-              </a:spcAft>
-              <a:defRPr sz="1900">
-                <a:solidFill>
-                  <a:srgbClr val="1E1E1E"/>
-                </a:solidFill>
-              </a:defRPr>
-            </a:pPr>
-            <a:r>
-              <a:t>Ein Schlüssel steuert das Verfahren.</a:t>
+              <a:t>Entschlüsselung macht daraus wieder lesbaren Klartext.</a:t>
             </a:r>
           </a:p>
         </p:txBody>
@@ -4480,18 +6752,18 @@
         </p:nvSpPr>
         <p:spPr>
           <a:xfrm>
-            <a:off x="6400800" y="1280160"/>
+            <a:off x="6400800" y="1325880"/>
             <a:ext cx="4754880" cy="3291840"/>
           </a:xfrm>
           <a:prstGeom prst="rect">
             <a:avLst/>
           </a:prstGeom>
           <a:solidFill>
-            <a:srgbClr val="FCFCFC"/>
+            <a:srgbClr val="FAFAFA"/>
           </a:solidFill>
           <a:ln>
             <a:solidFill>
-              <a:srgbClr val="6E6E6E"/>
+              <a:srgbClr val="646464"/>
             </a:solidFill>
           </a:ln>
         </p:spPr>
@@ -4517,14 +6789,14 @@
             <a:r>
               <a:rPr sz="1600">
                 <a:solidFill>
-                  <a:srgbClr val="1E1E1E"/>
+                  <a:srgbClr val="232323"/>
                 </a:solidFill>
                 <a:latin typeface="Consolas"/>
               </a:rPr>
               <a:t>Klartext: HALLO
-   ↓ verschlüsseln
+      ↓ verschlüsseln
 Geheimtext: KDOOR
-   ↓ entschlüsseln
+      ↓ entschlüsseln
 Klartext: HALLO</a:t>
             </a:r>
           </a:p>
@@ -4538,8 +6810,8 @@
         </p:nvSpPr>
         <p:spPr>
           <a:xfrm>
-            <a:off x="365760" y="6510528"/>
-            <a:ext cx="11430000" cy="228600"/>
+            <a:off x="502920" y="6510528"/>
+            <a:ext cx="11064240" cy="182880"/>
           </a:xfrm>
           <a:prstGeom prst="rect">
             <a:avLst/>
@@ -4556,7 +6828,7 @@
             <a:r>
               <a:rPr sz="800">
                 <a:solidFill>
-                  <a:srgbClr val="6E6E6E"/>
+                  <a:srgbClr val="646464"/>
                 </a:solidFill>
               </a:rPr>
               <a:t>Grafik: eigene Darstellung</a:t>
@@ -4591,13 +6863,13 @@
         <p:spPr>
           <a:xfrm>
             <a:off x="0" y="0"/>
-            <a:ext cx="12191695" cy="109728"/>
+            <a:ext cx="12191695" cy="100584"/>
           </a:xfrm>
           <a:prstGeom prst="rect">
             <a:avLst/>
           </a:prstGeom>
           <a:solidFill>
-            <a:srgbClr val="305396"/>
+            <a:srgbClr val="4472C4"/>
           </a:solidFill>
           <a:ln>
             <a:noFill/>
@@ -4634,7 +6906,7 @@
         <p:spPr>
           <a:xfrm>
             <a:off x="594360" y="320040"/>
-            <a:ext cx="10972800" cy="548640"/>
+            <a:ext cx="10972800" cy="502920"/>
           </a:xfrm>
           <a:prstGeom prst="rect">
             <a:avLst/>
@@ -4650,10 +6922,10 @@
             <a:r>
               <a:rPr sz="2600" b="1">
                 <a:solidFill>
-                  <a:srgbClr val="202C3C"/>
+                  <a:srgbClr val="1F374E"/>
                 </a:solidFill>
               </a:rPr>
-              <a:t>Symmetrisch und asymmetrisch</a:t>
+              <a:t>Caesar-Verschlüsselung</a:t>
             </a:r>
           </a:p>
         </p:txBody>
@@ -4667,7 +6939,7 @@
         <p:spPr>
           <a:xfrm>
             <a:off x="685800" y="1234440"/>
-            <a:ext cx="5394960" cy="5029200"/>
+            <a:ext cx="5303520" cy="4937760"/>
           </a:xfrm>
           <a:prstGeom prst="rect">
             <a:avLst/>
@@ -4682,75 +6954,132 @@
           <a:p>
             <a:pPr>
               <a:spcAft>
-                <a:spcPts val="700"/>
+                <a:spcPts val="800"/>
               </a:spcAft>
               <a:defRPr sz="1900">
                 <a:solidFill>
-                  <a:srgbClr val="1E1E1E"/>
+                  <a:srgbClr val="232323"/>
                 </a:solidFill>
               </a:defRPr>
             </a:pPr>
             <a:r>
-              <a:t>symmetrisch: ein gemeinsamer geheimer Schlüssel</a:t>
+              <a:t>Historisches Beispiel: Buchstaben werden um eine feste Zahl verschoben.</a:t>
             </a:r>
           </a:p>
           <a:p>
             <a:pPr>
               <a:spcAft>
-                <a:spcPts val="700"/>
+                <a:spcPts val="800"/>
               </a:spcAft>
               <a:defRPr sz="1900">
                 <a:solidFill>
-                  <a:srgbClr val="1E1E1E"/>
+                  <a:srgbClr val="232323"/>
                 </a:solidFill>
               </a:defRPr>
             </a:pPr>
             <a:r>
-              <a:t>schnell und geeignet für Datenverkehr</a:t>
+              <a:t>Schlüssel +3: A→D, B→E, C→F ...</a:t>
             </a:r>
           </a:p>
           <a:p>
             <a:pPr>
               <a:spcAft>
-                <a:spcPts val="700"/>
+                <a:spcPts val="800"/>
               </a:spcAft>
               <a:defRPr sz="1900">
                 <a:solidFill>
-                  <a:srgbClr val="1E1E1E"/>
+                  <a:srgbClr val="232323"/>
                 </a:solidFill>
               </a:defRPr>
             </a:pPr>
             <a:r>
-              <a:t>asymmetrisch: öffentlicher und privater Schlüssel</a:t>
+              <a:t>HALLO → KDOOR</a:t>
             </a:r>
           </a:p>
           <a:p>
             <a:pPr>
               <a:spcAft>
-                <a:spcPts val="700"/>
+                <a:spcPts val="800"/>
               </a:spcAft>
               <a:defRPr sz="1900">
                 <a:solidFill>
-                  <a:srgbClr val="1E1E1E"/>
+                  <a:srgbClr val="232323"/>
                 </a:solidFill>
               </a:defRPr>
             </a:pPr>
             <a:r>
-              <a:t>geeignet für Authentisierung und Schlüsselaushandlung</a:t>
-            </a:r>
-          </a:p>
-        </p:txBody>
-      </p:sp>
-      <p:sp>
-        <p:nvSpPr>
-          <p:cNvPr id="5" name="TextBox 4"/>
+              <a:t>Heute nicht sicher – dient nur zum Verstehen der Grundidee.</a:t>
+            </a:r>
+          </a:p>
+        </p:txBody>
+      </p:sp>
+      <p:sp>
+        <p:nvSpPr>
+          <p:cNvPr id="5" name="Rectangle 4"/>
+          <p:cNvSpPr/>
+          <p:nvPr/>
+        </p:nvSpPr>
+        <p:spPr>
+          <a:xfrm>
+            <a:off x="6400800" y="1371600"/>
+            <a:ext cx="4754880" cy="3108960"/>
+          </a:xfrm>
+          <a:prstGeom prst="rect">
+            <a:avLst/>
+          </a:prstGeom>
+          <a:solidFill>
+            <a:srgbClr val="FAFAFA"/>
+          </a:solidFill>
+          <a:ln>
+            <a:solidFill>
+              <a:srgbClr val="646464"/>
+            </a:solidFill>
+          </a:ln>
+        </p:spPr>
+        <p:style>
+          <a:lnRef idx="1">
+            <a:schemeClr val="accent1"/>
+          </a:lnRef>
+          <a:fillRef idx="3">
+            <a:schemeClr val="accent1"/>
+          </a:fillRef>
+          <a:effectRef idx="2">
+            <a:schemeClr val="accent1"/>
+          </a:effectRef>
+          <a:fontRef idx="minor">
+            <a:schemeClr val="lt1"/>
+          </a:fontRef>
+        </p:style>
+        <p:txBody>
+          <a:bodyPr rtlCol="0" anchor="ctr" wrap="none"/>
+          <a:lstStyle/>
+          <a:p>
+            <a:pPr algn="ctr"/>
+            <a:r>
+              <a:rPr sz="1600">
+                <a:solidFill>
+                  <a:srgbClr val="232323"/>
+                </a:solidFill>
+                <a:latin typeface="Consolas"/>
+              </a:rPr>
+              <a:t>A B C D E F G ...
+D E F G H I J ...
+HALLO → KDOOR
+Schlüssel: +3</a:t>
+            </a:r>
+          </a:p>
+        </p:txBody>
+      </p:sp>
+      <p:sp>
+        <p:nvSpPr>
+          <p:cNvPr id="6" name="TextBox 5"/>
           <p:cNvSpPr txBox="1"/>
           <p:nvPr/>
         </p:nvSpPr>
         <p:spPr>
           <a:xfrm>
-            <a:off x="365760" y="6510528"/>
-            <a:ext cx="11430000" cy="228600"/>
+            <a:off x="502920" y="6510528"/>
+            <a:ext cx="11064240" cy="182880"/>
           </a:xfrm>
           <a:prstGeom prst="rect">
             <a:avLst/>
@@ -4767,7 +7096,7 @@
             <a:r>
               <a:rPr sz="800">
                 <a:solidFill>
-                  <a:srgbClr val="6E6E6E"/>
+                  <a:srgbClr val="646464"/>
                 </a:solidFill>
               </a:rPr>
               <a:t>Grafik: eigene Darstellung</a:t>
@@ -4802,13 +7131,13 @@
         <p:spPr>
           <a:xfrm>
             <a:off x="0" y="0"/>
-            <a:ext cx="12191695" cy="109728"/>
+            <a:ext cx="12191695" cy="100584"/>
           </a:xfrm>
           <a:prstGeom prst="rect">
             <a:avLst/>
           </a:prstGeom>
           <a:solidFill>
-            <a:srgbClr val="305396"/>
+            <a:srgbClr val="4472C4"/>
           </a:solidFill>
           <a:ln>
             <a:noFill/>
@@ -4845,7 +7174,7 @@
         <p:spPr>
           <a:xfrm>
             <a:off x="594360" y="320040"/>
-            <a:ext cx="10972800" cy="548640"/>
+            <a:ext cx="10972800" cy="502920"/>
           </a:xfrm>
           <a:prstGeom prst="rect">
             <a:avLst/>
@@ -4861,10 +7190,10 @@
             <a:r>
               <a:rPr sz="2600" b="1">
                 <a:solidFill>
-                  <a:srgbClr val="202C3C"/>
+                  <a:srgbClr val="1F374E"/>
                 </a:solidFill>
               </a:rPr>
-              <a:t>RSA an kleinen Zahlen</a:t>
+              <a:t>Symmetrische Verschlüsselung</a:t>
             </a:r>
           </a:p>
         </p:txBody>
@@ -4878,7 +7207,7 @@
         <p:spPr>
           <a:xfrm>
             <a:off x="685800" y="1234440"/>
-            <a:ext cx="5394960" cy="5029200"/>
+            <a:ext cx="5303520" cy="4937760"/>
           </a:xfrm>
           <a:prstGeom prst="rect">
             <a:avLst/>
@@ -4893,76 +7222,46 @@
           <a:p>
             <a:pPr>
               <a:spcAft>
-                <a:spcPts val="700"/>
+                <a:spcPts val="800"/>
               </a:spcAft>
               <a:defRPr sz="1900">
                 <a:solidFill>
-                  <a:srgbClr val="1E1E1E"/>
+                  <a:srgbClr val="232323"/>
                 </a:solidFill>
               </a:defRPr>
             </a:pPr>
             <a:r>
-              <a:t>p = 5, q = 11</a:t>
+              <a:t>Sender und Empfänger verwenden denselben geheimen Schlüssel.</a:t>
             </a:r>
           </a:p>
           <a:p>
             <a:pPr>
               <a:spcAft>
-                <a:spcPts val="700"/>
+                <a:spcPts val="800"/>
               </a:spcAft>
               <a:defRPr sz="1900">
                 <a:solidFill>
-                  <a:srgbClr val="1E1E1E"/>
+                  <a:srgbClr val="232323"/>
                 </a:solidFill>
               </a:defRPr>
             </a:pPr>
             <a:r>
-              <a:t>n = 55</a:t>
+              <a:t>Sie ist für große Datenmengen sehr effizient und schnell.</a:t>
             </a:r>
           </a:p>
           <a:p>
             <a:pPr>
               <a:spcAft>
-                <a:spcPts val="700"/>
+                <a:spcPts val="800"/>
               </a:spcAft>
               <a:defRPr sz="1900">
                 <a:solidFill>
-                  <a:srgbClr val="1E1E1E"/>
+                  <a:srgbClr val="232323"/>
                 </a:solidFill>
               </a:defRPr>
             </a:pPr>
             <a:r>
-              <a:t>φ(n) = 40</a:t>
-            </a:r>
-          </a:p>
-          <a:p>
-            <a:pPr>
-              <a:spcAft>
-                <a:spcPts val="700"/>
-              </a:spcAft>
-              <a:defRPr sz="1900">
-                <a:solidFill>
-                  <a:srgbClr val="1E1E1E"/>
-                </a:solidFill>
-              </a:defRPr>
-            </a:pPr>
-            <a:r>
-              <a:t>e = 3, d = 27</a:t>
-            </a:r>
-          </a:p>
-          <a:p>
-            <a:pPr>
-              <a:spcAft>
-                <a:spcPts val="700"/>
-              </a:spcAft>
-              <a:defRPr sz="1900">
-                <a:solidFill>
-                  <a:srgbClr val="1E1E1E"/>
-                </a:solidFill>
-              </a:defRPr>
-            </a:pPr>
-            <a:r>
-              <a:t>Beispiel ist didaktisch und unsicher.</a:t>
+              <a:t>Problem: Wie gelangt der gemeinsame Schlüssel sicher zu beiden Seiten?</a:t>
             </a:r>
           </a:p>
         </p:txBody>
@@ -4975,18 +7274,18 @@
         </p:nvSpPr>
         <p:spPr>
           <a:xfrm>
-            <a:off x="6400800" y="1234440"/>
-            <a:ext cx="4754880" cy="3474720"/>
+            <a:off x="6400800" y="1463040"/>
+            <a:ext cx="4754880" cy="2560320"/>
           </a:xfrm>
           <a:prstGeom prst="rect">
             <a:avLst/>
           </a:prstGeom>
           <a:solidFill>
-            <a:srgbClr val="FCFCFC"/>
+            <a:srgbClr val="FAFAFA"/>
           </a:solidFill>
           <a:ln>
             <a:solidFill>
-              <a:srgbClr val="6E6E6E"/>
+              <a:srgbClr val="646464"/>
             </a:solidFill>
           </a:ln>
         </p:spPr>
@@ -5012,15 +7311,13 @@
             <a:r>
               <a:rPr sz="1600">
                 <a:solidFill>
-                  <a:srgbClr val="1E1E1E"/>
+                  <a:srgbClr val="232323"/>
                 </a:solidFill>
                 <a:latin typeface="Consolas"/>
               </a:rPr>
-              <a:t>p=5, q=11
-n=55
-φ(n)=40
-e=3
-d=27, denn 3·27 ≡ 1 mod 40</a:t>
+              <a:t>Alice 🔑  ⇄  🔑 Bob
+gleicher geheimer Schlüssel
+→ schneller Datenverkehr</a:t>
             </a:r>
           </a:p>
         </p:txBody>
@@ -5033,8 +7330,8 @@
         </p:nvSpPr>
         <p:spPr>
           <a:xfrm>
-            <a:off x="365760" y="6510528"/>
-            <a:ext cx="11430000" cy="228600"/>
+            <a:off x="502920" y="6510528"/>
+            <a:ext cx="11064240" cy="182880"/>
           </a:xfrm>
           <a:prstGeom prst="rect">
             <a:avLst/>
@@ -5051,7 +7348,7 @@
             <a:r>
               <a:rPr sz="800">
                 <a:solidFill>
-                  <a:srgbClr val="6E6E6E"/>
+                  <a:srgbClr val="646464"/>
                 </a:solidFill>
               </a:rPr>
               <a:t>Grafik: eigene Darstellung</a:t>
@@ -5086,13 +7383,13 @@
         <p:spPr>
           <a:xfrm>
             <a:off x="0" y="0"/>
-            <a:ext cx="12191695" cy="109728"/>
+            <a:ext cx="12191695" cy="100584"/>
           </a:xfrm>
           <a:prstGeom prst="rect">
             <a:avLst/>
           </a:prstGeom>
           <a:solidFill>
-            <a:srgbClr val="305396"/>
+            <a:srgbClr val="4472C4"/>
           </a:solidFill>
           <a:ln>
             <a:noFill/>
@@ -5129,7 +7426,7 @@
         <p:spPr>
           <a:xfrm>
             <a:off x="594360" y="320040"/>
-            <a:ext cx="10972800" cy="548640"/>
+            <a:ext cx="10972800" cy="502920"/>
           </a:xfrm>
           <a:prstGeom prst="rect">
             <a:avLst/>
@@ -5145,10 +7442,10 @@
             <a:r>
               <a:rPr sz="2600" b="1">
                 <a:solidFill>
-                  <a:srgbClr val="202C3C"/>
+                  <a:srgbClr val="1F374E"/>
                 </a:solidFill>
               </a:rPr>
-              <a:t>RSA Beispiel</a:t>
+              <a:t>Asymmetrische Kryptografie</a:t>
             </a:r>
           </a:p>
         </p:txBody>
@@ -5162,7 +7459,7 @@
         <p:spPr>
           <a:xfrm>
             <a:off x="685800" y="1234440"/>
-            <a:ext cx="5394960" cy="5029200"/>
+            <a:ext cx="5303520" cy="4937760"/>
           </a:xfrm>
           <a:prstGeom prst="rect">
             <a:avLst/>
@@ -5177,61 +7474,61 @@
           <a:p>
             <a:pPr>
               <a:spcAft>
-                <a:spcPts val="700"/>
+                <a:spcPts val="800"/>
               </a:spcAft>
               <a:defRPr sz="1900">
                 <a:solidFill>
-                  <a:srgbClr val="1E1E1E"/>
+                  <a:srgbClr val="232323"/>
                 </a:solidFill>
               </a:defRPr>
             </a:pPr>
             <a:r>
-              <a:t>Nachricht m = 7</a:t>
+              <a:t>Es gibt zwei zusammengehörende Schlüssel.</a:t>
             </a:r>
           </a:p>
           <a:p>
             <a:pPr>
               <a:spcAft>
-                <a:spcPts val="700"/>
+                <a:spcPts val="800"/>
               </a:spcAft>
               <a:defRPr sz="1900">
                 <a:solidFill>
-                  <a:srgbClr val="1E1E1E"/>
+                  <a:srgbClr val="232323"/>
                 </a:solidFill>
               </a:defRPr>
             </a:pPr>
             <a:r>
-              <a:t>Verschlüsseln: c = 7³ mod 55 = 13</a:t>
+              <a:t>Öffentlicher Schlüssel: darf bekannt sein.</a:t>
             </a:r>
           </a:p>
           <a:p>
             <a:pPr>
               <a:spcAft>
-                <a:spcPts val="700"/>
+                <a:spcPts val="800"/>
               </a:spcAft>
               <a:defRPr sz="1900">
                 <a:solidFill>
-                  <a:srgbClr val="1E1E1E"/>
+                  <a:srgbClr val="232323"/>
                 </a:solidFill>
               </a:defRPr>
             </a:pPr>
             <a:r>
-              <a:t>Entschlüsseln: m = 13²⁷ mod 55 = 7</a:t>
+              <a:t>Privater Schlüssel: bleibt geheim.</a:t>
             </a:r>
           </a:p>
           <a:p>
             <a:pPr>
               <a:spcAft>
-                <a:spcPts val="700"/>
+                <a:spcPts val="800"/>
               </a:spcAft>
               <a:defRPr sz="1900">
                 <a:solidFill>
-                  <a:srgbClr val="1E1E1E"/>
+                  <a:srgbClr val="232323"/>
                 </a:solidFill>
               </a:defRPr>
             </a:pPr>
             <a:r>
-              <a:t>Prinzip statt Sicherheit.</a:t>
+              <a:t>Damit lassen sich u. a. sichere Schlüsselaushandlung und digitale Signaturen ermöglichen.</a:t>
             </a:r>
           </a:p>
         </p:txBody>
@@ -5244,18 +7541,18 @@
         </p:nvSpPr>
         <p:spPr>
           <a:xfrm>
-            <a:off x="6217920" y="1371600"/>
-            <a:ext cx="5120640" cy="2743200"/>
+            <a:off x="6400800" y="1554480"/>
+            <a:ext cx="4754880" cy="2377440"/>
           </a:xfrm>
           <a:prstGeom prst="rect">
             <a:avLst/>
           </a:prstGeom>
           <a:solidFill>
-            <a:srgbClr val="FCFCFC"/>
+            <a:srgbClr val="FAFAFA"/>
           </a:solidFill>
           <a:ln>
             <a:solidFill>
-              <a:srgbClr val="6E6E6E"/>
+              <a:srgbClr val="646464"/>
             </a:solidFill>
           </a:ln>
         </p:spPr>
@@ -5281,13 +7578,12 @@
             <a:r>
               <a:rPr sz="1500">
                 <a:solidFill>
-                  <a:srgbClr val="1E1E1E"/>
+                  <a:srgbClr val="232323"/>
                 </a:solidFill>
                 <a:latin typeface="Consolas"/>
               </a:rPr>
-              <a:t>m = 7
-c = m^e mod n = 7^3 mod 55 = 13
-m = c^d mod n = 13^27 mod 55 = 7</a:t>
+              <a:t>Öffentlicher Schlüssel → darf verteilt werden
+Privater Schlüssel    → bleibt geheim</a:t>
             </a:r>
           </a:p>
         </p:txBody>
@@ -5300,8 +7596,8 @@
         </p:nvSpPr>
         <p:spPr>
           <a:xfrm>
-            <a:off x="365760" y="6510528"/>
-            <a:ext cx="11430000" cy="228600"/>
+            <a:off x="502920" y="6510528"/>
+            <a:ext cx="11064240" cy="182880"/>
           </a:xfrm>
           <a:prstGeom prst="rect">
             <a:avLst/>
@@ -5318,7 +7614,7 @@
             <a:r>
               <a:rPr sz="800">
                 <a:solidFill>
-                  <a:srgbClr val="6E6E6E"/>
+                  <a:srgbClr val="646464"/>
                 </a:solidFill>
               </a:rPr>
               <a:t>Grafik: eigene Darstellung</a:t>
@@ -5353,13 +7649,13 @@
         <p:spPr>
           <a:xfrm>
             <a:off x="0" y="0"/>
-            <a:ext cx="12191695" cy="109728"/>
+            <a:ext cx="12191695" cy="100584"/>
           </a:xfrm>
           <a:prstGeom prst="rect">
             <a:avLst/>
           </a:prstGeom>
           <a:solidFill>
-            <a:srgbClr val="305396"/>
+            <a:srgbClr val="4472C4"/>
           </a:solidFill>
           <a:ln>
             <a:noFill/>
@@ -5396,7 +7692,7 @@
         <p:spPr>
           <a:xfrm>
             <a:off x="594360" y="320040"/>
-            <a:ext cx="10972800" cy="548640"/>
+            <a:ext cx="10972800" cy="502920"/>
           </a:xfrm>
           <a:prstGeom prst="rect">
             <a:avLst/>
@@ -5412,10 +7708,10 @@
             <a:r>
               <a:rPr sz="2600" b="1">
                 <a:solidFill>
-                  <a:srgbClr val="202C3C"/>
+                  <a:srgbClr val="1F374E"/>
                 </a:solidFill>
               </a:rPr>
-              <a:t>HTTPS und TLS</a:t>
+              <a:t>RSA – Grundidee</a:t>
             </a:r>
           </a:p>
         </p:txBody>
@@ -5429,7 +7725,7 @@
         <p:spPr>
           <a:xfrm>
             <a:off x="685800" y="1234440"/>
-            <a:ext cx="5394960" cy="5029200"/>
+            <a:ext cx="5303520" cy="4937760"/>
           </a:xfrm>
           <a:prstGeom prst="rect">
             <a:avLst/>
@@ -5444,61 +7740,46 @@
           <a:p>
             <a:pPr>
               <a:spcAft>
-                <a:spcPts val="700"/>
+                <a:spcPts val="800"/>
               </a:spcAft>
               <a:defRPr sz="1900">
                 <a:solidFill>
-                  <a:srgbClr val="1E1E1E"/>
+                  <a:srgbClr val="232323"/>
                 </a:solidFill>
               </a:defRPr>
             </a:pPr>
             <a:r>
-              <a:t>HTTPS = Hypertext Transfer Protocol Secure</a:t>
+              <a:t>RSA ist ein asymmetrisches Verfahren.</a:t>
             </a:r>
           </a:p>
           <a:p>
             <a:pPr>
               <a:spcAft>
-                <a:spcPts val="700"/>
+                <a:spcPts val="800"/>
               </a:spcAft>
               <a:defRPr sz="1900">
                 <a:solidFill>
-                  <a:srgbClr val="1E1E1E"/>
+                  <a:srgbClr val="232323"/>
                 </a:solidFill>
               </a:defRPr>
             </a:pPr>
             <a:r>
-              <a:t>TLS = Transport Layer Security</a:t>
+              <a:t>Es nutzt Eigenschaften großer Primzahlen und modularer Arithmetik.</a:t>
             </a:r>
           </a:p>
           <a:p>
             <a:pPr>
               <a:spcAft>
-                <a:spcPts val="700"/>
+                <a:spcPts val="800"/>
               </a:spcAft>
               <a:defRPr sz="1900">
                 <a:solidFill>
-                  <a:srgbClr val="1E1E1E"/>
+                  <a:srgbClr val="232323"/>
                 </a:solidFill>
               </a:defRPr>
             </a:pPr>
             <a:r>
-              <a:t>SSL ist ältere Technik/Bezeichnung.</a:t>
-            </a:r>
-          </a:p>
-          <a:p>
-            <a:pPr>
-              <a:spcAft>
-                <a:spcPts val="700"/>
-              </a:spcAft>
-              <a:defRPr sz="1900">
-                <a:solidFill>
-                  <a:srgbClr val="1E1E1E"/>
-                </a:solidFill>
-              </a:defRPr>
-            </a:pPr>
-            <a:r>
-              <a:t>Asymmetrisch für sicheren Aufbau, symmetrisch für schnellen Datenverkehr.</a:t>
+              <a:t>Für den Unterricht rechnen wir absichtlich mit winzigen, unsicheren Zahlen.</a:t>
             </a:r>
           </a:p>
         </p:txBody>
@@ -5511,18 +7792,18 @@
         </p:nvSpPr>
         <p:spPr>
           <a:xfrm>
-            <a:off x="6217920" y="1554480"/>
-            <a:ext cx="5120640" cy="2560320"/>
+            <a:off x="6400800" y="1371600"/>
+            <a:ext cx="4754880" cy="2743200"/>
           </a:xfrm>
           <a:prstGeom prst="rect">
             <a:avLst/>
           </a:prstGeom>
           <a:solidFill>
-            <a:srgbClr val="FCFCFC"/>
+            <a:srgbClr val="FAFAFA"/>
           </a:solidFill>
           <a:ln>
             <a:solidFill>
-              <a:srgbClr val="6E6E6E"/>
+              <a:srgbClr val="646464"/>
             </a:solidFill>
           </a:ln>
         </p:spPr>
@@ -5546,15 +7827,15 @@
           <a:p>
             <a:pPr algn="ctr"/>
             <a:r>
-              <a:rPr sz="1400">
-                <a:solidFill>
-                  <a:srgbClr val="1E1E1E"/>
+              <a:rPr sz="1700">
+                <a:solidFill>
+                  <a:srgbClr val="232323"/>
                 </a:solidFill>
                 <a:latin typeface="Consolas"/>
               </a:rPr>
-              <a:t>1. Zertifikat / Public-Key-Kryptografie
-2. Sitzungsschlüssel aushandeln
-3. Datenverkehr symmetrisch schützen</a:t>
+              <a:t>p = 5, q = 11
+n = p·q = 55
+φ(n) = (5−1)(11−1) = 40</a:t>
             </a:r>
           </a:p>
         </p:txBody>
@@ -5567,8 +7848,8 @@
         </p:nvSpPr>
         <p:spPr>
           <a:xfrm>
-            <a:off x="365760" y="6510528"/>
-            <a:ext cx="11430000" cy="228600"/>
+            <a:off x="502920" y="6510528"/>
+            <a:ext cx="11064240" cy="182880"/>
           </a:xfrm>
           <a:prstGeom prst="rect">
             <a:avLst/>
@@ -5585,10 +7866,10 @@
             <a:r>
               <a:rPr sz="800">
                 <a:solidFill>
-                  <a:srgbClr val="6E6E6E"/>
+                  <a:srgbClr val="646464"/>
                 </a:solidFill>
               </a:rPr>
-              <a:t>Grafik: eigene Darstellung · TLS 1.3: https://www.rfc-editor.org/rfc/rfc8446</a:t>
+              <a:t>Grafik: eigene Darstellung</a:t>
             </a:r>
           </a:p>
         </p:txBody>
@@ -5620,13 +7901,13 @@
         <p:spPr>
           <a:xfrm>
             <a:off x="0" y="0"/>
-            <a:ext cx="12191695" cy="109728"/>
+            <a:ext cx="12191695" cy="100584"/>
           </a:xfrm>
           <a:prstGeom prst="rect">
             <a:avLst/>
           </a:prstGeom>
           <a:solidFill>
-            <a:srgbClr val="305396"/>
+            <a:srgbClr val="4472C4"/>
           </a:solidFill>
           <a:ln>
             <a:noFill/>
@@ -5663,7 +7944,7 @@
         <p:spPr>
           <a:xfrm>
             <a:off x="594360" y="320040"/>
-            <a:ext cx="10972800" cy="548640"/>
+            <a:ext cx="10972800" cy="502920"/>
           </a:xfrm>
           <a:prstGeom prst="rect">
             <a:avLst/>
@@ -5679,10 +7960,10 @@
             <a:r>
               <a:rPr sz="2600" b="1">
                 <a:solidFill>
-                  <a:srgbClr val="202C3C"/>
+                  <a:srgbClr val="1F374E"/>
                 </a:solidFill>
               </a:rPr>
-              <a:t>Quellen</a:t>
+              <a:t>RSA – Schlüssel berechnen</a:t>
             </a:r>
           </a:p>
         </p:txBody>
@@ -5696,7 +7977,7 @@
         <p:spPr>
           <a:xfrm>
             <a:off x="685800" y="1234440"/>
-            <a:ext cx="5394960" cy="5029200"/>
+            <a:ext cx="5303520" cy="4937760"/>
           </a:xfrm>
           <a:prstGeom prst="rect">
             <a:avLst/>
@@ -5711,75 +7992,132 @@
           <a:p>
             <a:pPr>
               <a:spcAft>
-                <a:spcPts val="700"/>
+                <a:spcPts val="800"/>
               </a:spcAft>
               <a:defRPr sz="1900">
                 <a:solidFill>
-                  <a:srgbClr val="1E1E1E"/>
+                  <a:srgbClr val="232323"/>
                 </a:solidFill>
               </a:defRPr>
             </a:pPr>
             <a:r>
-              <a:t>BSI: https://www.bsi.bund.de</a:t>
+              <a:t>Wähle e so, dass e und φ(n) teilerfremd sind: e = 3.</a:t>
             </a:r>
           </a:p>
           <a:p>
             <a:pPr>
               <a:spcAft>
-                <a:spcPts val="700"/>
+                <a:spcPts val="800"/>
               </a:spcAft>
               <a:defRPr sz="1900">
                 <a:solidFill>
-                  <a:srgbClr val="1E1E1E"/>
+                  <a:srgbClr val="232323"/>
                 </a:solidFill>
               </a:defRPr>
             </a:pPr>
             <a:r>
-              <a:t>IETF RFC 8446 – TLS 1.3: https://www.rfc-editor.org/rfc/rfc8446</a:t>
+              <a:t>Bestimme d mit e·d ≡ 1 (mod 40).</a:t>
             </a:r>
           </a:p>
           <a:p>
             <a:pPr>
               <a:spcAft>
-                <a:spcPts val="700"/>
+                <a:spcPts val="800"/>
               </a:spcAft>
               <a:defRPr sz="1900">
                 <a:solidFill>
-                  <a:srgbClr val="1E1E1E"/>
+                  <a:srgbClr val="232323"/>
                 </a:solidFill>
               </a:defRPr>
             </a:pPr>
             <a:r>
-              <a:t>Sächsischer Lehrplan Oberschule Informatik, Klassenstufe 8: https://www.schulportal.sachsen.de/lplandb/lehrplan/514</a:t>
+              <a:t>3·27 = 81 ≡ 1 (mod 40) → d = 27.</a:t>
             </a:r>
           </a:p>
           <a:p>
             <a:pPr>
               <a:spcAft>
-                <a:spcPts val="700"/>
+                <a:spcPts val="800"/>
               </a:spcAft>
               <a:defRPr sz="1900">
                 <a:solidFill>
-                  <a:srgbClr val="1E1E1E"/>
+                  <a:srgbClr val="232323"/>
                 </a:solidFill>
               </a:defRPr>
             </a:pPr>
             <a:r>
-              <a:t>Beispiele und Grafiken: eigene Darstellung.</a:t>
-            </a:r>
-          </a:p>
-        </p:txBody>
-      </p:sp>
-      <p:sp>
-        <p:nvSpPr>
-          <p:cNvPr id="5" name="TextBox 4"/>
+              <a:t>Öffentlich: (n=55, e=3) · Privat: d=27</a:t>
+            </a:r>
+          </a:p>
+        </p:txBody>
+      </p:sp>
+      <p:sp>
+        <p:nvSpPr>
+          <p:cNvPr id="5" name="Rectangle 4"/>
+          <p:cNvSpPr/>
+          <p:nvPr/>
+        </p:nvSpPr>
+        <p:spPr>
+          <a:xfrm>
+            <a:off x="6400800" y="1234440"/>
+            <a:ext cx="4846320" cy="3474720"/>
+          </a:xfrm>
+          <a:prstGeom prst="rect">
+            <a:avLst/>
+          </a:prstGeom>
+          <a:solidFill>
+            <a:srgbClr val="FAFAFA"/>
+          </a:solidFill>
+          <a:ln>
+            <a:solidFill>
+              <a:srgbClr val="646464"/>
+            </a:solidFill>
+          </a:ln>
+        </p:spPr>
+        <p:style>
+          <a:lnRef idx="1">
+            <a:schemeClr val="accent1"/>
+          </a:lnRef>
+          <a:fillRef idx="3">
+            <a:schemeClr val="accent1"/>
+          </a:fillRef>
+          <a:effectRef idx="2">
+            <a:schemeClr val="accent1"/>
+          </a:effectRef>
+          <a:fontRef idx="minor">
+            <a:schemeClr val="lt1"/>
+          </a:fontRef>
+        </p:style>
+        <p:txBody>
+          <a:bodyPr rtlCol="0" anchor="ctr" wrap="none"/>
+          <a:lstStyle/>
+          <a:p>
+            <a:pPr algn="ctr"/>
+            <a:r>
+              <a:rPr sz="1600">
+                <a:solidFill>
+                  <a:srgbClr val="232323"/>
+                </a:solidFill>
+                <a:latin typeface="Consolas"/>
+              </a:rPr>
+              <a:t>φ(n)=40
+e=3
+3·d ≡ 1 mod 40
+d=27, denn 3·27=81=2·40+1</a:t>
+            </a:r>
+          </a:p>
+        </p:txBody>
+      </p:sp>
+      <p:sp>
+        <p:nvSpPr>
+          <p:cNvPr id="6" name="TextBox 5"/>
           <p:cNvSpPr txBox="1"/>
           <p:nvPr/>
         </p:nvSpPr>
         <p:spPr>
           <a:xfrm>
-            <a:off x="365760" y="6510528"/>
-            <a:ext cx="11430000" cy="228600"/>
+            <a:off x="502920" y="6510528"/>
+            <a:ext cx="11064240" cy="182880"/>
           </a:xfrm>
           <a:prstGeom prst="rect">
             <a:avLst/>
@@ -5796,10 +8134,278 @@
             <a:r>
               <a:rPr sz="800">
                 <a:solidFill>
-                  <a:srgbClr val="6E6E6E"/>
+                  <a:srgbClr val="646464"/>
                 </a:solidFill>
               </a:rPr>
-              <a:t>Quellenangaben · Grafiken: eigene Darstellung</a:t>
+              <a:t>Grafik: eigene Darstellung</a:t>
+            </a:r>
+          </a:p>
+        </p:txBody>
+      </p:sp>
+    </p:spTree>
+  </p:cSld>
+  <p:clrMapOvr>
+    <a:masterClrMapping/>
+  </p:clrMapOvr>
+</p:sld>
+</file>
+
+<file path=ppt/slides/slide9.xml><?xml version="1.0" encoding="utf-8"?>
+<p:sld xmlns:a="http://schemas.openxmlformats.org/drawingml/2006/main" xmlns:p="http://schemas.openxmlformats.org/presentationml/2006/main" xmlns:r="http://schemas.openxmlformats.org/officeDocument/2006/relationships">
+  <p:cSld>
+    <p:spTree>
+      <p:nvGrpSpPr>
+        <p:cNvPr id="1" name=""/>
+        <p:cNvGrpSpPr/>
+        <p:nvPr/>
+      </p:nvGrpSpPr>
+      <p:grpSpPr/>
+      <p:sp>
+        <p:nvSpPr>
+          <p:cNvPr id="2" name="Rectangle 1"/>
+          <p:cNvSpPr/>
+          <p:nvPr/>
+        </p:nvSpPr>
+        <p:spPr>
+          <a:xfrm>
+            <a:off x="0" y="0"/>
+            <a:ext cx="12191695" cy="100584"/>
+          </a:xfrm>
+          <a:prstGeom prst="rect">
+            <a:avLst/>
+          </a:prstGeom>
+          <a:solidFill>
+            <a:srgbClr val="4472C4"/>
+          </a:solidFill>
+          <a:ln>
+            <a:noFill/>
+          </a:ln>
+        </p:spPr>
+        <p:style>
+          <a:lnRef idx="1">
+            <a:schemeClr val="accent1"/>
+          </a:lnRef>
+          <a:fillRef idx="3">
+            <a:schemeClr val="accent1"/>
+          </a:fillRef>
+          <a:effectRef idx="2">
+            <a:schemeClr val="accent1"/>
+          </a:effectRef>
+          <a:fontRef idx="minor">
+            <a:schemeClr val="lt1"/>
+          </a:fontRef>
+        </p:style>
+        <p:txBody>
+          <a:bodyPr rtlCol="0" anchor="ctr"/>
+          <a:lstStyle/>
+          <a:p>
+            <a:pPr algn="ctr"/>
+          </a:p>
+        </p:txBody>
+      </p:sp>
+      <p:sp>
+        <p:nvSpPr>
+          <p:cNvPr id="3" name="TextBox 2"/>
+          <p:cNvSpPr txBox="1"/>
+          <p:nvPr/>
+        </p:nvSpPr>
+        <p:spPr>
+          <a:xfrm>
+            <a:off x="594360" y="320040"/>
+            <a:ext cx="10972800" cy="502920"/>
+          </a:xfrm>
+          <a:prstGeom prst="rect">
+            <a:avLst/>
+          </a:prstGeom>
+          <a:noFill/>
+        </p:spPr>
+        <p:txBody>
+          <a:bodyPr wrap="none">
+            <a:spAutoFit/>
+          </a:bodyPr>
+          <a:lstStyle/>
+          <a:p>
+            <a:r>
+              <a:rPr sz="2600" b="1">
+                <a:solidFill>
+                  <a:srgbClr val="1F374E"/>
+                </a:solidFill>
+              </a:rPr>
+              <a:t>RSA – Beispiel verschlüsseln</a:t>
+            </a:r>
+          </a:p>
+        </p:txBody>
+      </p:sp>
+      <p:sp>
+        <p:nvSpPr>
+          <p:cNvPr id="4" name="TextBox 3"/>
+          <p:cNvSpPr txBox="1"/>
+          <p:nvPr/>
+        </p:nvSpPr>
+        <p:spPr>
+          <a:xfrm>
+            <a:off x="685800" y="1234440"/>
+            <a:ext cx="5303520" cy="4937760"/>
+          </a:xfrm>
+          <a:prstGeom prst="rect">
+            <a:avLst/>
+          </a:prstGeom>
+          <a:noFill/>
+        </p:spPr>
+        <p:txBody>
+          <a:bodyPr wrap="square">
+            <a:spAutoFit/>
+          </a:bodyPr>
+          <a:lstStyle/>
+          <a:p>
+            <a:pPr>
+              <a:spcAft>
+                <a:spcPts val="800"/>
+              </a:spcAft>
+              <a:defRPr sz="1900">
+                <a:solidFill>
+                  <a:srgbClr val="232323"/>
+                </a:solidFill>
+              </a:defRPr>
+            </a:pPr>
+            <a:r>
+              <a:t>Nachricht als Zahl: m = 7</a:t>
+            </a:r>
+          </a:p>
+          <a:p>
+            <a:pPr>
+              <a:spcAft>
+                <a:spcPts val="800"/>
+              </a:spcAft>
+              <a:defRPr sz="1900">
+                <a:solidFill>
+                  <a:srgbClr val="232323"/>
+                </a:solidFill>
+              </a:defRPr>
+            </a:pPr>
+            <a:r>
+              <a:t>Verschlüsselung: c = m^e mod n</a:t>
+            </a:r>
+          </a:p>
+          <a:p>
+            <a:pPr>
+              <a:spcAft>
+                <a:spcPts val="800"/>
+              </a:spcAft>
+              <a:defRPr sz="1900">
+                <a:solidFill>
+                  <a:srgbClr val="232323"/>
+                </a:solidFill>
+              </a:defRPr>
+            </a:pPr>
+            <a:r>
+              <a:t>c = 7³ mod 55 = 343 mod 55 = 13</a:t>
+            </a:r>
+          </a:p>
+          <a:p>
+            <a:pPr>
+              <a:spcAft>
+                <a:spcPts val="800"/>
+              </a:spcAft>
+              <a:defRPr sz="1900">
+                <a:solidFill>
+                  <a:srgbClr val="232323"/>
+                </a:solidFill>
+              </a:defRPr>
+            </a:pPr>
+            <a:r>
+              <a:t>Geheimtext: c = 13</a:t>
+            </a:r>
+          </a:p>
+        </p:txBody>
+      </p:sp>
+      <p:sp>
+        <p:nvSpPr>
+          <p:cNvPr id="5" name="Rectangle 4"/>
+          <p:cNvSpPr/>
+          <p:nvPr/>
+        </p:nvSpPr>
+        <p:spPr>
+          <a:xfrm>
+            <a:off x="6400800" y="1371600"/>
+            <a:ext cx="4754880" cy="2926080"/>
+          </a:xfrm>
+          <a:prstGeom prst="rect">
+            <a:avLst/>
+          </a:prstGeom>
+          <a:solidFill>
+            <a:srgbClr val="FAFAFA"/>
+          </a:solidFill>
+          <a:ln>
+            <a:solidFill>
+              <a:srgbClr val="646464"/>
+            </a:solidFill>
+          </a:ln>
+        </p:spPr>
+        <p:style>
+          <a:lnRef idx="1">
+            <a:schemeClr val="accent1"/>
+          </a:lnRef>
+          <a:fillRef idx="3">
+            <a:schemeClr val="accent1"/>
+          </a:fillRef>
+          <a:effectRef idx="2">
+            <a:schemeClr val="accent1"/>
+          </a:effectRef>
+          <a:fontRef idx="minor">
+            <a:schemeClr val="lt1"/>
+          </a:fontRef>
+        </p:style>
+        <p:txBody>
+          <a:bodyPr rtlCol="0" anchor="ctr" wrap="none"/>
+          <a:lstStyle/>
+          <a:p>
+            <a:pPr algn="ctr"/>
+            <a:r>
+              <a:rPr sz="1800">
+                <a:solidFill>
+                  <a:srgbClr val="232323"/>
+                </a:solidFill>
+                <a:latin typeface="Consolas"/>
+              </a:rPr>
+              <a:t>m = 7
+c = 7³ mod 55
+c = 343 mod 55
+c = 13</a:t>
+            </a:r>
+          </a:p>
+        </p:txBody>
+      </p:sp>
+      <p:sp>
+        <p:nvSpPr>
+          <p:cNvPr id="6" name="TextBox 5"/>
+          <p:cNvSpPr txBox="1"/>
+          <p:nvPr/>
+        </p:nvSpPr>
+        <p:spPr>
+          <a:xfrm>
+            <a:off x="502920" y="6510528"/>
+            <a:ext cx="11064240" cy="182880"/>
+          </a:xfrm>
+          <a:prstGeom prst="rect">
+            <a:avLst/>
+          </a:prstGeom>
+          <a:noFill/>
+        </p:spPr>
+        <p:txBody>
+          <a:bodyPr wrap="none">
+            <a:spAutoFit/>
+          </a:bodyPr>
+          <a:lstStyle/>
+          <a:p>
+            <a:pPr algn="r"/>
+            <a:r>
+              <a:rPr sz="800">
+                <a:solidFill>
+                  <a:srgbClr val="646464"/>
+                </a:solidFill>
+              </a:rPr>
+              <a:t>Grafik: eigene Darstellung</a:t>
             </a:r>
           </a:p>
         </p:txBody>
